--- a/dslab_presentation.pptx
+++ b/dslab_presentation.pptx
@@ -5,10 +5,10 @@
     <p:sldMasterId id="2147483799" r:id="rId4"/>
   </p:sldMasterIdLst>
   <p:notesMasterIdLst>
-    <p:notesMasterId r:id="rId18"/>
+    <p:notesMasterId r:id="rId20"/>
   </p:notesMasterIdLst>
   <p:handoutMasterIdLst>
-    <p:handoutMasterId r:id="rId19"/>
+    <p:handoutMasterId r:id="rId21"/>
   </p:handoutMasterIdLst>
   <p:sldIdLst>
     <p:sldId id="292" r:id="rId5"/>
@@ -16,14 +16,16 @@
     <p:sldId id="293" r:id="rId7"/>
     <p:sldId id="266" r:id="rId8"/>
     <p:sldId id="297" r:id="rId9"/>
-    <p:sldId id="295" r:id="rId10"/>
+    <p:sldId id="298" r:id="rId10"/>
     <p:sldId id="283" r:id="rId11"/>
-    <p:sldId id="264" r:id="rId12"/>
-    <p:sldId id="289" r:id="rId13"/>
-    <p:sldId id="268" r:id="rId14"/>
-    <p:sldId id="296" r:id="rId15"/>
-    <p:sldId id="285" r:id="rId16"/>
-    <p:sldId id="294" r:id="rId17"/>
+    <p:sldId id="299" r:id="rId12"/>
+    <p:sldId id="295" r:id="rId13"/>
+    <p:sldId id="264" r:id="rId14"/>
+    <p:sldId id="289" r:id="rId15"/>
+    <p:sldId id="268" r:id="rId16"/>
+    <p:sldId id="296" r:id="rId17"/>
+    <p:sldId id="285" r:id="rId18"/>
+    <p:sldId id="294" r:id="rId19"/>
   </p:sldIdLst>
   <p:sldSz cx="12192000" cy="6858000"/>
   <p:notesSz cx="6858000" cy="9144000"/>
@@ -233,7 +235,7 @@
           <a:p>
             <a:fld id="{7B97C6B7-F63D-48F8-8C65-A57506B0F13B}" type="datetimeFigureOut">
               <a:rPr lang="en-US" smtClean="0"/>
-              <a:t>11-Jul-26</a:t>
+              <a:t>12-Jul-26</a:t>
             </a:fld>
             <a:endParaRPr lang="en-US" dirty="0"/>
           </a:p>
@@ -410,7 +412,7 @@
           <a:p>
             <a:fld id="{AC09A0FA-2191-4F92-A1E4-6EB4598AC4EC}" type="datetimeFigureOut">
               <a:rPr lang="en-US" smtClean="0"/>
-              <a:t>11-Jul-26</a:t>
+              <a:t>12-Jul-26</a:t>
             </a:fld>
             <a:endParaRPr lang="en-US" dirty="0"/>
           </a:p>
@@ -835,7 +837,7 @@
     </p:spTree>
     <p:extLst>
       <p:ext uri="{BB962C8B-B14F-4D97-AF65-F5344CB8AC3E}">
-        <p14:creationId xmlns:p14="http://schemas.microsoft.com/office/powerpoint/2010/main" val="3509670309"/>
+        <p14:creationId xmlns:p14="http://schemas.microsoft.com/office/powerpoint/2010/main" val="3690289579"/>
       </p:ext>
     </p:extLst>
   </p:cSld>
@@ -919,7 +921,7 @@
     </p:spTree>
     <p:extLst>
       <p:ext uri="{BB962C8B-B14F-4D97-AF65-F5344CB8AC3E}">
-        <p14:creationId xmlns:p14="http://schemas.microsoft.com/office/powerpoint/2010/main" val="1806707979"/>
+        <p14:creationId xmlns:p14="http://schemas.microsoft.com/office/powerpoint/2010/main" val="2047023992"/>
       </p:ext>
     </p:extLst>
   </p:cSld>
@@ -1003,7 +1005,7 @@
     </p:spTree>
     <p:extLst>
       <p:ext uri="{BB962C8B-B14F-4D97-AF65-F5344CB8AC3E}">
-        <p14:creationId xmlns:p14="http://schemas.microsoft.com/office/powerpoint/2010/main" val="3734319746"/>
+        <p14:creationId xmlns:p14="http://schemas.microsoft.com/office/powerpoint/2010/main" val="3509670309"/>
       </p:ext>
     </p:extLst>
   </p:cSld>
@@ -1079,6 +1081,174 @@
             <a:fld id="{B63359F2-43EF-4812-9DC0-98C0B1A40681}" type="slidenum">
               <a:rPr lang="en-US" smtClean="0"/>
               <a:t>13</a:t>
+            </a:fld>
+            <a:endParaRPr lang="en-US" dirty="0"/>
+          </a:p>
+        </p:txBody>
+      </p:sp>
+    </p:spTree>
+    <p:extLst>
+      <p:ext uri="{BB962C8B-B14F-4D97-AF65-F5344CB8AC3E}">
+        <p14:creationId xmlns:p14="http://schemas.microsoft.com/office/powerpoint/2010/main" val="1806707979"/>
+      </p:ext>
+    </p:extLst>
+  </p:cSld>
+  <p:clrMapOvr>
+    <a:masterClrMapping/>
+  </p:clrMapOvr>
+</p:notes>
+</file>
+
+<file path=ppt/notesSlides/notesSlide14.xml><?xml version="1.0" encoding="utf-8"?>
+<p:notes xmlns:a="http://schemas.openxmlformats.org/drawingml/2006/main" xmlns:r="http://schemas.openxmlformats.org/officeDocument/2006/relationships" xmlns:p="http://schemas.openxmlformats.org/presentationml/2006/main">
+  <p:cSld>
+    <p:spTree>
+      <p:nvGrpSpPr>
+        <p:cNvPr id="1" name=""/>
+        <p:cNvGrpSpPr/>
+        <p:nvPr/>
+      </p:nvGrpSpPr>
+      <p:grpSpPr>
+        <a:xfrm>
+          <a:off x="0" y="0"/>
+          <a:ext cx="0" cy="0"/>
+          <a:chOff x="0" y="0"/>
+          <a:chExt cx="0" cy="0"/>
+        </a:xfrm>
+      </p:grpSpPr>
+      <p:sp>
+        <p:nvSpPr>
+          <p:cNvPr id="2" name="Slide Image Placeholder 1"/>
+          <p:cNvSpPr>
+            <a:spLocks noGrp="1" noRot="1" noChangeAspect="1"/>
+          </p:cNvSpPr>
+          <p:nvPr>
+            <p:ph type="sldImg"/>
+          </p:nvPr>
+        </p:nvSpPr>
+        <p:spPr/>
+      </p:sp>
+      <p:sp>
+        <p:nvSpPr>
+          <p:cNvPr id="3" name="Notes Placeholder 2"/>
+          <p:cNvSpPr>
+            <a:spLocks noGrp="1"/>
+          </p:cNvSpPr>
+          <p:nvPr>
+            <p:ph type="body" idx="1"/>
+          </p:nvPr>
+        </p:nvSpPr>
+        <p:spPr/>
+        <p:txBody>
+          <a:bodyPr/>
+          <a:lstStyle/>
+          <a:p>
+            <a:endParaRPr lang="en-US" dirty="0"/>
+          </a:p>
+        </p:txBody>
+      </p:sp>
+      <p:sp>
+        <p:nvSpPr>
+          <p:cNvPr id="4" name="Slide Number Placeholder 3"/>
+          <p:cNvSpPr>
+            <a:spLocks noGrp="1"/>
+          </p:cNvSpPr>
+          <p:nvPr>
+            <p:ph type="sldNum" sz="quarter" idx="5"/>
+          </p:nvPr>
+        </p:nvSpPr>
+        <p:spPr/>
+        <p:txBody>
+          <a:bodyPr/>
+          <a:lstStyle/>
+          <a:p>
+            <a:fld id="{B63359F2-43EF-4812-9DC0-98C0B1A40681}" type="slidenum">
+              <a:rPr lang="en-US" smtClean="0"/>
+              <a:t>14</a:t>
+            </a:fld>
+            <a:endParaRPr lang="en-US" dirty="0"/>
+          </a:p>
+        </p:txBody>
+      </p:sp>
+    </p:spTree>
+    <p:extLst>
+      <p:ext uri="{BB962C8B-B14F-4D97-AF65-F5344CB8AC3E}">
+        <p14:creationId xmlns:p14="http://schemas.microsoft.com/office/powerpoint/2010/main" val="3734319746"/>
+      </p:ext>
+    </p:extLst>
+  </p:cSld>
+  <p:clrMapOvr>
+    <a:masterClrMapping/>
+  </p:clrMapOvr>
+</p:notes>
+</file>
+
+<file path=ppt/notesSlides/notesSlide15.xml><?xml version="1.0" encoding="utf-8"?>
+<p:notes xmlns:a="http://schemas.openxmlformats.org/drawingml/2006/main" xmlns:r="http://schemas.openxmlformats.org/officeDocument/2006/relationships" xmlns:p="http://schemas.openxmlformats.org/presentationml/2006/main">
+  <p:cSld>
+    <p:spTree>
+      <p:nvGrpSpPr>
+        <p:cNvPr id="1" name=""/>
+        <p:cNvGrpSpPr/>
+        <p:nvPr/>
+      </p:nvGrpSpPr>
+      <p:grpSpPr>
+        <a:xfrm>
+          <a:off x="0" y="0"/>
+          <a:ext cx="0" cy="0"/>
+          <a:chOff x="0" y="0"/>
+          <a:chExt cx="0" cy="0"/>
+        </a:xfrm>
+      </p:grpSpPr>
+      <p:sp>
+        <p:nvSpPr>
+          <p:cNvPr id="2" name="Slide Image Placeholder 1"/>
+          <p:cNvSpPr>
+            <a:spLocks noGrp="1" noRot="1" noChangeAspect="1"/>
+          </p:cNvSpPr>
+          <p:nvPr>
+            <p:ph type="sldImg"/>
+          </p:nvPr>
+        </p:nvSpPr>
+        <p:spPr/>
+      </p:sp>
+      <p:sp>
+        <p:nvSpPr>
+          <p:cNvPr id="3" name="Notes Placeholder 2"/>
+          <p:cNvSpPr>
+            <a:spLocks noGrp="1"/>
+          </p:cNvSpPr>
+          <p:nvPr>
+            <p:ph type="body" idx="1"/>
+          </p:nvPr>
+        </p:nvSpPr>
+        <p:spPr/>
+        <p:txBody>
+          <a:bodyPr/>
+          <a:lstStyle/>
+          <a:p>
+            <a:endParaRPr lang="en-US" dirty="0"/>
+          </a:p>
+        </p:txBody>
+      </p:sp>
+      <p:sp>
+        <p:nvSpPr>
+          <p:cNvPr id="4" name="Slide Number Placeholder 3"/>
+          <p:cNvSpPr>
+            <a:spLocks noGrp="1"/>
+          </p:cNvSpPr>
+          <p:nvPr>
+            <p:ph type="sldNum" sz="quarter" idx="5"/>
+          </p:nvPr>
+        </p:nvSpPr>
+        <p:spPr/>
+        <p:txBody>
+          <a:bodyPr/>
+          <a:lstStyle/>
+          <a:p>
+            <a:fld id="{B63359F2-43EF-4812-9DC0-98C0B1A40681}" type="slidenum">
+              <a:rPr lang="en-US" smtClean="0"/>
+              <a:t>15</a:t>
             </a:fld>
             <a:endParaRPr lang="en-US" dirty="0"/>
           </a:p>
@@ -1462,7 +1632,13 @@
   <p:cSld>
     <p:spTree>
       <p:nvGrpSpPr>
-        <p:cNvPr id="1" name=""/>
+        <p:cNvPr id="1" name="">
+          <a:extLst>
+            <a:ext uri="{FF2B5EF4-FFF2-40B4-BE49-F238E27FC236}">
+              <a16:creationId xmlns:a16="http://schemas.microsoft.com/office/drawing/2014/main" id="{48EBE5A9-1DFD-5FD4-F441-9D8BD523D200}"/>
+            </a:ext>
+          </a:extLst>
+        </p:cNvPr>
         <p:cNvGrpSpPr/>
         <p:nvPr/>
       </p:nvGrpSpPr>
@@ -1476,7 +1652,13 @@
       </p:grpSpPr>
       <p:sp>
         <p:nvSpPr>
-          <p:cNvPr id="2" name="Slide Image Placeholder 1"/>
+          <p:cNvPr id="2" name="Slide Image Placeholder 1">
+            <a:extLst>
+              <a:ext uri="{FF2B5EF4-FFF2-40B4-BE49-F238E27FC236}">
+                <a16:creationId xmlns:a16="http://schemas.microsoft.com/office/drawing/2014/main" id="{75B10A76-45B5-9E45-D262-938B9C4126E7}"/>
+              </a:ext>
+            </a:extLst>
+          </p:cNvPr>
           <p:cNvSpPr>
             <a:spLocks noGrp="1" noRot="1" noChangeAspect="1"/>
           </p:cNvSpPr>
@@ -1488,7 +1670,13 @@
       </p:sp>
       <p:sp>
         <p:nvSpPr>
-          <p:cNvPr id="3" name="Notes Placeholder 2"/>
+          <p:cNvPr id="3" name="Notes Placeholder 2">
+            <a:extLst>
+              <a:ext uri="{FF2B5EF4-FFF2-40B4-BE49-F238E27FC236}">
+                <a16:creationId xmlns:a16="http://schemas.microsoft.com/office/drawing/2014/main" id="{93D6F726-F759-49FD-75D8-242850A0A309}"/>
+              </a:ext>
+            </a:extLst>
+          </p:cNvPr>
           <p:cNvSpPr>
             <a:spLocks noGrp="1"/>
           </p:cNvSpPr>
@@ -1507,7 +1695,13 @@
       </p:sp>
       <p:sp>
         <p:nvSpPr>
-          <p:cNvPr id="4" name="Slide Number Placeholder 3"/>
+          <p:cNvPr id="4" name="Slide Number Placeholder 3">
+            <a:extLst>
+              <a:ext uri="{FF2B5EF4-FFF2-40B4-BE49-F238E27FC236}">
+                <a16:creationId xmlns:a16="http://schemas.microsoft.com/office/drawing/2014/main" id="{715A7BA5-83FB-7ED1-C6B1-8533F066DB11}"/>
+              </a:ext>
+            </a:extLst>
+          </p:cNvPr>
           <p:cNvSpPr>
             <a:spLocks noGrp="1"/>
           </p:cNvSpPr>
@@ -1531,7 +1725,7 @@
     </p:spTree>
     <p:extLst>
       <p:ext uri="{BB962C8B-B14F-4D97-AF65-F5344CB8AC3E}">
-        <p14:creationId xmlns:p14="http://schemas.microsoft.com/office/powerpoint/2010/main" val="1039793184"/>
+        <p14:creationId xmlns:p14="http://schemas.microsoft.com/office/powerpoint/2010/main" val="3752569978"/>
       </p:ext>
     </p:extLst>
   </p:cSld>
@@ -1630,7 +1824,13 @@
   <p:cSld>
     <p:spTree>
       <p:nvGrpSpPr>
-        <p:cNvPr id="1" name=""/>
+        <p:cNvPr id="1" name="">
+          <a:extLst>
+            <a:ext uri="{FF2B5EF4-FFF2-40B4-BE49-F238E27FC236}">
+              <a16:creationId xmlns:a16="http://schemas.microsoft.com/office/drawing/2014/main" id="{A291F19F-96C2-055C-0F72-735103C5A3E9}"/>
+            </a:ext>
+          </a:extLst>
+        </p:cNvPr>
         <p:cNvGrpSpPr/>
         <p:nvPr/>
       </p:nvGrpSpPr>
@@ -1644,7 +1844,13 @@
       </p:grpSpPr>
       <p:sp>
         <p:nvSpPr>
-          <p:cNvPr id="2" name="Slide Image Placeholder 1"/>
+          <p:cNvPr id="2" name="Slide Image Placeholder 1">
+            <a:extLst>
+              <a:ext uri="{FF2B5EF4-FFF2-40B4-BE49-F238E27FC236}">
+                <a16:creationId xmlns:a16="http://schemas.microsoft.com/office/drawing/2014/main" id="{1D6B3341-9512-8246-CF3B-AAEBEF44E02B}"/>
+              </a:ext>
+            </a:extLst>
+          </p:cNvPr>
           <p:cNvSpPr>
             <a:spLocks noGrp="1" noRot="1" noChangeAspect="1"/>
           </p:cNvSpPr>
@@ -1656,7 +1862,13 @@
       </p:sp>
       <p:sp>
         <p:nvSpPr>
-          <p:cNvPr id="3" name="Notes Placeholder 2"/>
+          <p:cNvPr id="3" name="Notes Placeholder 2">
+            <a:extLst>
+              <a:ext uri="{FF2B5EF4-FFF2-40B4-BE49-F238E27FC236}">
+                <a16:creationId xmlns:a16="http://schemas.microsoft.com/office/drawing/2014/main" id="{C044D028-9518-CE49-5373-92D9B663F291}"/>
+              </a:ext>
+            </a:extLst>
+          </p:cNvPr>
           <p:cNvSpPr>
             <a:spLocks noGrp="1"/>
           </p:cNvSpPr>
@@ -1675,7 +1887,13 @@
       </p:sp>
       <p:sp>
         <p:nvSpPr>
-          <p:cNvPr id="4" name="Slide Number Placeholder 3"/>
+          <p:cNvPr id="4" name="Slide Number Placeholder 3">
+            <a:extLst>
+              <a:ext uri="{FF2B5EF4-FFF2-40B4-BE49-F238E27FC236}">
+                <a16:creationId xmlns:a16="http://schemas.microsoft.com/office/drawing/2014/main" id="{6D49838E-757B-5368-0467-E64B6EF06C29}"/>
+              </a:ext>
+            </a:extLst>
+          </p:cNvPr>
           <p:cNvSpPr>
             <a:spLocks noGrp="1"/>
           </p:cNvSpPr>
@@ -1699,7 +1917,7 @@
     </p:spTree>
     <p:extLst>
       <p:ext uri="{BB962C8B-B14F-4D97-AF65-F5344CB8AC3E}">
-        <p14:creationId xmlns:p14="http://schemas.microsoft.com/office/powerpoint/2010/main" val="3690289579"/>
+        <p14:creationId xmlns:p14="http://schemas.microsoft.com/office/powerpoint/2010/main" val="338413587"/>
       </p:ext>
     </p:extLst>
   </p:cSld>
@@ -1783,7 +2001,7 @@
     </p:spTree>
     <p:extLst>
       <p:ext uri="{BB962C8B-B14F-4D97-AF65-F5344CB8AC3E}">
-        <p14:creationId xmlns:p14="http://schemas.microsoft.com/office/powerpoint/2010/main" val="2047023992"/>
+        <p14:creationId xmlns:p14="http://schemas.microsoft.com/office/powerpoint/2010/main" val="1039793184"/>
       </p:ext>
     </p:extLst>
   </p:cSld>
@@ -9351,6 +9569,53 @@
           </a:solidFill>
         </p:spPr>
       </p:pic>
+      <p:sp>
+        <p:nvSpPr>
+          <p:cNvPr id="9" name="TextBox 8">
+            <a:extLst>
+              <a:ext uri="{FF2B5EF4-FFF2-40B4-BE49-F238E27FC236}">
+                <a16:creationId xmlns:a16="http://schemas.microsoft.com/office/drawing/2014/main" id="{9CDB2797-6A69-A23F-67C9-498270F68543}"/>
+              </a:ext>
+            </a:extLst>
+          </p:cNvPr>
+          <p:cNvSpPr txBox="1"/>
+          <p:nvPr/>
+        </p:nvSpPr>
+        <p:spPr>
+          <a:xfrm>
+            <a:off x="457200" y="3830794"/>
+            <a:ext cx="2993721" cy="1200329"/>
+          </a:xfrm>
+          <a:prstGeom prst="rect">
+            <a:avLst/>
+          </a:prstGeom>
+          <a:noFill/>
+        </p:spPr>
+        <p:txBody>
+          <a:bodyPr wrap="square" rtlCol="0">
+            <a:spAutoFit/>
+          </a:bodyPr>
+          <a:lstStyle/>
+          <a:p>
+            <a:r>
+              <a:rPr lang="en-US" dirty="0"/>
+              <a:t>Mirko Di Biase</a:t>
+            </a:r>
+          </a:p>
+          <a:p>
+            <a:r>
+              <a:rPr lang="en-US" dirty="0"/>
+              <a:t>ID: 792726</a:t>
+            </a:r>
+          </a:p>
+          <a:p>
+            <a:r>
+              <a:rPr lang="en-US" dirty="0"/>
+              <a:t>Data Science Lab, Medicine module - project work</a:t>
+            </a:r>
+          </a:p>
+        </p:txBody>
+      </p:sp>
     </p:spTree>
     <p:extLst>
       <p:ext uri="{BB962C8B-B14F-4D97-AF65-F5344CB8AC3E}">
@@ -9367,6 +9632,14 @@
 <file path=ppt/slides/slide10.xml><?xml version="1.0" encoding="utf-8"?>
 <p:sld xmlns:a="http://schemas.openxmlformats.org/drawingml/2006/main" xmlns:r="http://schemas.openxmlformats.org/officeDocument/2006/relationships" xmlns:p="http://schemas.openxmlformats.org/presentationml/2006/main">
   <p:cSld>
+    <p:bg>
+      <p:bgPr>
+        <a:solidFill>
+          <a:schemeClr val="bg1"/>
+        </a:solidFill>
+        <a:effectLst/>
+      </p:bgPr>
+    </p:bg>
     <p:spTree>
       <p:nvGrpSpPr>
         <p:cNvPr id="1" name=""/>
@@ -9383,6 +9656,919 @@
       </p:grpSpPr>
       <p:sp>
         <p:nvSpPr>
+          <p:cNvPr id="16" name="Rectangle 15">
+            <a:extLst>
+              <a:ext uri="{FF2B5EF4-FFF2-40B4-BE49-F238E27FC236}">
+                <a16:creationId xmlns:a16="http://schemas.microsoft.com/office/drawing/2014/main" id="{E6C8E6EB-4C59-429B-97E4-72A058CFC4FB}"/>
+              </a:ext>
+              <a:ext uri="{C183D7F6-B498-43B3-948B-1728B52AA6E4}">
+                <adec:decorative xmlns:adec="http://schemas.microsoft.com/office/drawing/2017/decorative" val="1"/>
+              </a:ext>
+            </a:extLst>
+          </p:cNvPr>
+          <p:cNvSpPr>
+            <a:spLocks noGrp="1" noRot="1" noChangeAspect="1" noMove="1" noResize="1" noEditPoints="1" noAdjustHandles="1" noChangeArrowheads="1" noChangeShapeType="1" noTextEdit="1"/>
+          </p:cNvSpPr>
+          <p:nvPr>
+            <p:extLst>
+              <p:ext uri="{386F3935-93C4-4BCD-93E2-E3B085C9AB24}">
+                <p16:designElem xmlns:p16="http://schemas.microsoft.com/office/powerpoint/2015/main" val="1"/>
+              </p:ext>
+            </p:extLst>
+          </p:nvPr>
+        </p:nvSpPr>
+        <p:spPr>
+          <a:xfrm>
+            <a:off x="446534" y="457200"/>
+            <a:ext cx="3703320" cy="94997"/>
+          </a:xfrm>
+          <a:prstGeom prst="rect">
+            <a:avLst/>
+          </a:prstGeom>
+          <a:solidFill>
+            <a:srgbClr val="465359"/>
+          </a:solidFill>
+          <a:ln>
+            <a:noFill/>
+          </a:ln>
+          <a:effectLst/>
+        </p:spPr>
+        <p:style>
+          <a:lnRef idx="1">
+            <a:schemeClr val="accent1"/>
+          </a:lnRef>
+          <a:fillRef idx="3">
+            <a:schemeClr val="accent1"/>
+          </a:fillRef>
+          <a:effectRef idx="2">
+            <a:schemeClr val="accent1"/>
+          </a:effectRef>
+          <a:fontRef idx="minor">
+            <a:schemeClr val="lt1"/>
+          </a:fontRef>
+        </p:style>
+        <p:txBody>
+          <a:bodyPr/>
+          <a:lstStyle/>
+          <a:p>
+            <a:endParaRPr lang="en-US"/>
+          </a:p>
+        </p:txBody>
+      </p:sp>
+      <p:sp>
+        <p:nvSpPr>
+          <p:cNvPr id="18" name="Rectangle 17">
+            <a:extLst>
+              <a:ext uri="{FF2B5EF4-FFF2-40B4-BE49-F238E27FC236}">
+                <a16:creationId xmlns:a16="http://schemas.microsoft.com/office/drawing/2014/main" id="{B5B90362-AFCC-46A9-B41C-A257A8C5B314}"/>
+              </a:ext>
+              <a:ext uri="{C183D7F6-B498-43B3-948B-1728B52AA6E4}">
+                <adec:decorative xmlns:adec="http://schemas.microsoft.com/office/drawing/2017/decorative" val="1"/>
+              </a:ext>
+            </a:extLst>
+          </p:cNvPr>
+          <p:cNvSpPr>
+            <a:spLocks noGrp="1" noRot="1" noChangeAspect="1" noMove="1" noResize="1" noEditPoints="1" noAdjustHandles="1" noChangeArrowheads="1" noChangeShapeType="1" noTextEdit="1"/>
+          </p:cNvSpPr>
+          <p:nvPr>
+            <p:extLst>
+              <p:ext uri="{386F3935-93C4-4BCD-93E2-E3B085C9AB24}">
+                <p16:designElem xmlns:p16="http://schemas.microsoft.com/office/powerpoint/2015/main" val="1"/>
+              </p:ext>
+            </p:extLst>
+          </p:nvPr>
+        </p:nvSpPr>
+        <p:spPr>
+          <a:xfrm>
+            <a:off x="8042147" y="453643"/>
+            <a:ext cx="3703320" cy="98554"/>
+          </a:xfrm>
+          <a:prstGeom prst="rect">
+            <a:avLst/>
+          </a:prstGeom>
+          <a:solidFill>
+            <a:srgbClr val="969FA7"/>
+          </a:solidFill>
+          <a:ln>
+            <a:noFill/>
+          </a:ln>
+          <a:effectLst/>
+        </p:spPr>
+        <p:style>
+          <a:lnRef idx="1">
+            <a:schemeClr val="accent1"/>
+          </a:lnRef>
+          <a:fillRef idx="3">
+            <a:schemeClr val="accent1"/>
+          </a:fillRef>
+          <a:effectRef idx="2">
+            <a:schemeClr val="accent1"/>
+          </a:effectRef>
+          <a:fontRef idx="minor">
+            <a:schemeClr val="lt1"/>
+          </a:fontRef>
+        </p:style>
+        <p:txBody>
+          <a:bodyPr/>
+          <a:lstStyle/>
+          <a:p>
+            <a:endParaRPr lang="en-US"/>
+          </a:p>
+        </p:txBody>
+      </p:sp>
+      <p:sp>
+        <p:nvSpPr>
+          <p:cNvPr id="13" name="Rectangle 12">
+            <a:extLst>
+              <a:ext uri="{FF2B5EF4-FFF2-40B4-BE49-F238E27FC236}">
+                <a16:creationId xmlns:a16="http://schemas.microsoft.com/office/drawing/2014/main" id="{F71EF7F1-38BA-471D-8CD4-2A9AE8E35527}"/>
+              </a:ext>
+              <a:ext uri="{C183D7F6-B498-43B3-948B-1728B52AA6E4}">
+                <adec:decorative xmlns:adec="http://schemas.microsoft.com/office/drawing/2017/decorative" val="1"/>
+              </a:ext>
+            </a:extLst>
+          </p:cNvPr>
+          <p:cNvSpPr>
+            <a:spLocks noGrp="1" noRot="1" noChangeAspect="1" noMove="1" noResize="1" noEditPoints="1" noAdjustHandles="1" noChangeArrowheads="1" noChangeShapeType="1" noTextEdit="1"/>
+          </p:cNvSpPr>
+          <p:nvPr>
+            <p:extLst>
+              <p:ext uri="{386F3935-93C4-4BCD-93E2-E3B085C9AB24}">
+                <p16:designElem xmlns:p16="http://schemas.microsoft.com/office/powerpoint/2015/main" val="1"/>
+              </p:ext>
+            </p:extLst>
+          </p:nvPr>
+        </p:nvSpPr>
+        <p:spPr>
+          <a:xfrm>
+            <a:off x="4241830" y="457200"/>
+            <a:ext cx="3703320" cy="91440"/>
+          </a:xfrm>
+          <a:prstGeom prst="rect">
+            <a:avLst/>
+          </a:prstGeom>
+          <a:solidFill>
+            <a:schemeClr val="accent1"/>
+          </a:solidFill>
+          <a:ln>
+            <a:noFill/>
+          </a:ln>
+          <a:effectLst/>
+        </p:spPr>
+        <p:style>
+          <a:lnRef idx="1">
+            <a:schemeClr val="accent1"/>
+          </a:lnRef>
+          <a:fillRef idx="3">
+            <a:schemeClr val="accent1"/>
+          </a:fillRef>
+          <a:effectRef idx="2">
+            <a:schemeClr val="accent1"/>
+          </a:effectRef>
+          <a:fontRef idx="minor">
+            <a:schemeClr val="lt1"/>
+          </a:fontRef>
+        </p:style>
+        <p:txBody>
+          <a:bodyPr/>
+          <a:lstStyle/>
+          <a:p>
+            <a:endParaRPr lang="en-US"/>
+          </a:p>
+        </p:txBody>
+      </p:sp>
+      <p:sp>
+        <p:nvSpPr>
+          <p:cNvPr id="22" name="Rectangle 21">
+            <a:extLst>
+              <a:ext uri="{FF2B5EF4-FFF2-40B4-BE49-F238E27FC236}">
+                <a16:creationId xmlns:a16="http://schemas.microsoft.com/office/drawing/2014/main" id="{C0524398-BFB4-4C4A-8317-83B8729F9B26}"/>
+              </a:ext>
+              <a:ext uri="{C183D7F6-B498-43B3-948B-1728B52AA6E4}">
+                <adec:decorative xmlns:adec="http://schemas.microsoft.com/office/drawing/2017/decorative" val="1"/>
+              </a:ext>
+            </a:extLst>
+          </p:cNvPr>
+          <p:cNvSpPr>
+            <a:spLocks noGrp="1" noRot="1" noChangeAspect="1" noMove="1" noResize="1" noEditPoints="1" noAdjustHandles="1" noChangeArrowheads="1" noChangeShapeType="1" noTextEdit="1"/>
+          </p:cNvSpPr>
+          <p:nvPr>
+            <p:extLst>
+              <p:ext uri="{386F3935-93C4-4BCD-93E2-E3B085C9AB24}">
+                <p16:designElem xmlns:p16="http://schemas.microsoft.com/office/powerpoint/2015/main" val="1"/>
+              </p:ext>
+            </p:extLst>
+          </p:nvPr>
+        </p:nvSpPr>
+        <p:spPr>
+          <a:xfrm>
+            <a:off x="446534" y="3085764"/>
+            <a:ext cx="11298932" cy="3338149"/>
+          </a:xfrm>
+          <a:prstGeom prst="rect">
+            <a:avLst/>
+          </a:prstGeom>
+          <a:solidFill>
+            <a:srgbClr val="465359"/>
+          </a:solidFill>
+          <a:ln>
+            <a:noFill/>
+          </a:ln>
+          <a:effectLst/>
+        </p:spPr>
+        <p:style>
+          <a:lnRef idx="1">
+            <a:schemeClr val="accent1"/>
+          </a:lnRef>
+          <a:fillRef idx="3">
+            <a:schemeClr val="accent1"/>
+          </a:fillRef>
+          <a:effectRef idx="2">
+            <a:schemeClr val="accent1"/>
+          </a:effectRef>
+          <a:fontRef idx="minor">
+            <a:schemeClr val="lt1"/>
+          </a:fontRef>
+        </p:style>
+        <p:txBody>
+          <a:bodyPr/>
+          <a:lstStyle/>
+          <a:p>
+            <a:endParaRPr lang="en-US"/>
+          </a:p>
+        </p:txBody>
+      </p:sp>
+      <p:sp useBgFill="1">
+        <p:nvSpPr>
+          <p:cNvPr id="24" name="Rectangle 23">
+            <a:extLst>
+              <a:ext uri="{FF2B5EF4-FFF2-40B4-BE49-F238E27FC236}">
+                <a16:creationId xmlns:a16="http://schemas.microsoft.com/office/drawing/2014/main" id="{D6D7A0BC-0046-4CAA-8E7F-DCAFE511EA0E}"/>
+              </a:ext>
+              <a:ext uri="{C183D7F6-B498-43B3-948B-1728B52AA6E4}">
+                <adec:decorative xmlns:adec="http://schemas.microsoft.com/office/drawing/2017/decorative" val="1"/>
+              </a:ext>
+            </a:extLst>
+          </p:cNvPr>
+          <p:cNvSpPr>
+            <a:spLocks noGrp="1" noRot="1" noChangeAspect="1" noMove="1" noResize="1" noEditPoints="1" noAdjustHandles="1" noChangeArrowheads="1" noChangeShapeType="1" noTextEdit="1"/>
+          </p:cNvSpPr>
+          <p:nvPr>
+            <p:extLst>
+              <p:ext uri="{386F3935-93C4-4BCD-93E2-E3B085C9AB24}">
+                <p16:designElem xmlns:p16="http://schemas.microsoft.com/office/powerpoint/2015/main" val="1"/>
+              </p:ext>
+            </p:extLst>
+          </p:nvPr>
+        </p:nvSpPr>
+        <p:spPr>
+          <a:xfrm>
+            <a:off x="0" y="0"/>
+            <a:ext cx="12192000" cy="6858000"/>
+          </a:xfrm>
+          <a:prstGeom prst="rect">
+            <a:avLst/>
+          </a:prstGeom>
+          <a:ln>
+            <a:noFill/>
+          </a:ln>
+        </p:spPr>
+        <p:style>
+          <a:lnRef idx="2">
+            <a:schemeClr val="accent1">
+              <a:shade val="50000"/>
+            </a:schemeClr>
+          </a:lnRef>
+          <a:fillRef idx="1">
+            <a:schemeClr val="accent1"/>
+          </a:fillRef>
+          <a:effectRef idx="0">
+            <a:schemeClr val="accent1"/>
+          </a:effectRef>
+          <a:fontRef idx="minor">
+            <a:schemeClr val="lt1"/>
+          </a:fontRef>
+        </p:style>
+        <p:txBody>
+          <a:bodyPr rtlCol="0" anchor="ctr"/>
+          <a:lstStyle/>
+          <a:p>
+            <a:pPr algn="ctr"/>
+            <a:endParaRPr lang="en-US"/>
+          </a:p>
+        </p:txBody>
+      </p:sp>
+      <p:sp>
+        <p:nvSpPr>
+          <p:cNvPr id="11" name="Title 10">
+            <a:extLst>
+              <a:ext uri="{FF2B5EF4-FFF2-40B4-BE49-F238E27FC236}">
+                <a16:creationId xmlns:a16="http://schemas.microsoft.com/office/drawing/2014/main" id="{FF0FD1A0-C075-EE18-B3AE-363C242D0BCE}"/>
+              </a:ext>
+            </a:extLst>
+          </p:cNvPr>
+          <p:cNvSpPr>
+            <a:spLocks noGrp="1"/>
+          </p:cNvSpPr>
+          <p:nvPr>
+            <p:ph type="title"/>
+          </p:nvPr>
+        </p:nvSpPr>
+        <p:spPr>
+          <a:xfrm>
+            <a:off x="580092" y="-7707"/>
+            <a:ext cx="10993549" cy="1475013"/>
+          </a:xfrm>
+        </p:spPr>
+        <p:txBody>
+          <a:bodyPr vert="horz" lIns="91440" tIns="45720" rIns="91440" bIns="45720" rtlCol="0" anchor="b">
+            <a:normAutofit/>
+          </a:bodyPr>
+          <a:lstStyle/>
+          <a:p>
+            <a:pPr algn="ctr"/>
+            <a:r>
+              <a:rPr lang="en-US" sz="3600" dirty="0"/>
+              <a:t>TRAINING PERFORMANCE</a:t>
+            </a:r>
+          </a:p>
+        </p:txBody>
+      </p:sp>
+      <p:sp>
+        <p:nvSpPr>
+          <p:cNvPr id="26" name="Rectangle 25">
+            <a:extLst>
+              <a:ext uri="{FF2B5EF4-FFF2-40B4-BE49-F238E27FC236}">
+                <a16:creationId xmlns:a16="http://schemas.microsoft.com/office/drawing/2014/main" id="{E7C6334F-6411-41EC-AD7D-179EDD8B58CB}"/>
+              </a:ext>
+              <a:ext uri="{C183D7F6-B498-43B3-948B-1728B52AA6E4}">
+                <adec:decorative xmlns:adec="http://schemas.microsoft.com/office/drawing/2017/decorative" val="1"/>
+              </a:ext>
+            </a:extLst>
+          </p:cNvPr>
+          <p:cNvSpPr>
+            <a:spLocks noGrp="1" noRot="1" noChangeAspect="1" noMove="1" noResize="1" noEditPoints="1" noAdjustHandles="1" noChangeArrowheads="1" noChangeShapeType="1" noTextEdit="1"/>
+          </p:cNvSpPr>
+          <p:nvPr>
+            <p:extLst>
+              <p:ext uri="{386F3935-93C4-4BCD-93E2-E3B085C9AB24}">
+                <p16:designElem xmlns:p16="http://schemas.microsoft.com/office/powerpoint/2015/main" val="1"/>
+              </p:ext>
+            </p:extLst>
+          </p:nvPr>
+        </p:nvSpPr>
+        <p:spPr>
+          <a:xfrm>
+            <a:off x="446534" y="457200"/>
+            <a:ext cx="3703320" cy="94997"/>
+          </a:xfrm>
+          <a:prstGeom prst="rect">
+            <a:avLst/>
+          </a:prstGeom>
+          <a:solidFill>
+            <a:srgbClr val="465359"/>
+          </a:solidFill>
+          <a:ln>
+            <a:noFill/>
+          </a:ln>
+          <a:effectLst/>
+        </p:spPr>
+        <p:style>
+          <a:lnRef idx="1">
+            <a:schemeClr val="accent1"/>
+          </a:lnRef>
+          <a:fillRef idx="3">
+            <a:schemeClr val="accent1"/>
+          </a:fillRef>
+          <a:effectRef idx="2">
+            <a:schemeClr val="accent1"/>
+          </a:effectRef>
+          <a:fontRef idx="minor">
+            <a:schemeClr val="lt1"/>
+          </a:fontRef>
+        </p:style>
+        <p:txBody>
+          <a:bodyPr/>
+          <a:lstStyle/>
+          <a:p>
+            <a:endParaRPr lang="en-US"/>
+          </a:p>
+        </p:txBody>
+      </p:sp>
+      <p:sp>
+        <p:nvSpPr>
+          <p:cNvPr id="28" name="Rectangle 27">
+            <a:extLst>
+              <a:ext uri="{FF2B5EF4-FFF2-40B4-BE49-F238E27FC236}">
+                <a16:creationId xmlns:a16="http://schemas.microsoft.com/office/drawing/2014/main" id="{E6B02CEE-3AF8-4349-9B3E-8970E6DF62B3}"/>
+              </a:ext>
+              <a:ext uri="{C183D7F6-B498-43B3-948B-1728B52AA6E4}">
+                <adec:decorative xmlns:adec="http://schemas.microsoft.com/office/drawing/2017/decorative" val="1"/>
+              </a:ext>
+            </a:extLst>
+          </p:cNvPr>
+          <p:cNvSpPr>
+            <a:spLocks noGrp="1" noRot="1" noChangeAspect="1" noMove="1" noResize="1" noEditPoints="1" noAdjustHandles="1" noChangeArrowheads="1" noChangeShapeType="1" noTextEdit="1"/>
+          </p:cNvSpPr>
+          <p:nvPr>
+            <p:extLst>
+              <p:ext uri="{386F3935-93C4-4BCD-93E2-E3B085C9AB24}">
+                <p16:designElem xmlns:p16="http://schemas.microsoft.com/office/powerpoint/2015/main" val="1"/>
+              </p:ext>
+            </p:extLst>
+          </p:nvPr>
+        </p:nvSpPr>
+        <p:spPr>
+          <a:xfrm>
+            <a:off x="4241830" y="457200"/>
+            <a:ext cx="3703320" cy="91440"/>
+          </a:xfrm>
+          <a:prstGeom prst="rect">
+            <a:avLst/>
+          </a:prstGeom>
+          <a:solidFill>
+            <a:schemeClr val="accent1"/>
+          </a:solidFill>
+          <a:ln>
+            <a:noFill/>
+          </a:ln>
+          <a:effectLst/>
+        </p:spPr>
+        <p:style>
+          <a:lnRef idx="1">
+            <a:schemeClr val="accent1"/>
+          </a:lnRef>
+          <a:fillRef idx="3">
+            <a:schemeClr val="accent1"/>
+          </a:fillRef>
+          <a:effectRef idx="2">
+            <a:schemeClr val="accent1"/>
+          </a:effectRef>
+          <a:fontRef idx="minor">
+            <a:schemeClr val="lt1"/>
+          </a:fontRef>
+        </p:style>
+        <p:txBody>
+          <a:bodyPr/>
+          <a:lstStyle/>
+          <a:p>
+            <a:endParaRPr lang="en-US"/>
+          </a:p>
+        </p:txBody>
+      </p:sp>
+      <p:sp>
+        <p:nvSpPr>
+          <p:cNvPr id="30" name="Rectangle 29">
+            <a:extLst>
+              <a:ext uri="{FF2B5EF4-FFF2-40B4-BE49-F238E27FC236}">
+                <a16:creationId xmlns:a16="http://schemas.microsoft.com/office/drawing/2014/main" id="{AAA01CF0-3FB5-44EB-B7DE-F2E86374C2FB}"/>
+              </a:ext>
+              <a:ext uri="{C183D7F6-B498-43B3-948B-1728B52AA6E4}">
+                <adec:decorative xmlns:adec="http://schemas.microsoft.com/office/drawing/2017/decorative" val="1"/>
+              </a:ext>
+            </a:extLst>
+          </p:cNvPr>
+          <p:cNvSpPr>
+            <a:spLocks noGrp="1" noRot="1" noChangeAspect="1" noMove="1" noResize="1" noEditPoints="1" noAdjustHandles="1" noChangeArrowheads="1" noChangeShapeType="1" noTextEdit="1"/>
+          </p:cNvSpPr>
+          <p:nvPr>
+            <p:extLst>
+              <p:ext uri="{386F3935-93C4-4BCD-93E2-E3B085C9AB24}">
+                <p16:designElem xmlns:p16="http://schemas.microsoft.com/office/powerpoint/2015/main" val="1"/>
+              </p:ext>
+            </p:extLst>
+          </p:nvPr>
+        </p:nvSpPr>
+        <p:spPr>
+          <a:xfrm>
+            <a:off x="8042147" y="453643"/>
+            <a:ext cx="3703320" cy="98554"/>
+          </a:xfrm>
+          <a:prstGeom prst="rect">
+            <a:avLst/>
+          </a:prstGeom>
+          <a:solidFill>
+            <a:srgbClr val="969FA7"/>
+          </a:solidFill>
+          <a:ln>
+            <a:noFill/>
+          </a:ln>
+          <a:effectLst/>
+        </p:spPr>
+        <p:style>
+          <a:lnRef idx="1">
+            <a:schemeClr val="accent1"/>
+          </a:lnRef>
+          <a:fillRef idx="3">
+            <a:schemeClr val="accent1"/>
+          </a:fillRef>
+          <a:effectRef idx="2">
+            <a:schemeClr val="accent1"/>
+          </a:effectRef>
+          <a:fontRef idx="minor">
+            <a:schemeClr val="lt1"/>
+          </a:fontRef>
+        </p:style>
+        <p:txBody>
+          <a:bodyPr/>
+          <a:lstStyle/>
+          <a:p>
+            <a:endParaRPr lang="en-US"/>
+          </a:p>
+        </p:txBody>
+      </p:sp>
+      <p:pic>
+        <p:nvPicPr>
+          <p:cNvPr id="9" name="Picture 8">
+            <a:extLst>
+              <a:ext uri="{FF2B5EF4-FFF2-40B4-BE49-F238E27FC236}">
+                <a16:creationId xmlns:a16="http://schemas.microsoft.com/office/drawing/2014/main" id="{A693C5D6-1BF7-217B-9098-F18569A7A99E}"/>
+              </a:ext>
+            </a:extLst>
+          </p:cNvPr>
+          <p:cNvPicPr>
+            <a:picLocks noChangeAspect="1"/>
+          </p:cNvPicPr>
+          <p:nvPr/>
+        </p:nvPicPr>
+        <p:blipFill>
+          <a:blip r:embed="rId3"/>
+          <a:stretch>
+            <a:fillRect/>
+          </a:stretch>
+        </p:blipFill>
+        <p:spPr>
+          <a:xfrm>
+            <a:off x="177800" y="1506097"/>
+            <a:ext cx="11728450" cy="3423240"/>
+          </a:xfrm>
+          <a:prstGeom prst="rect">
+            <a:avLst/>
+          </a:prstGeom>
+        </p:spPr>
+      </p:pic>
+      <p:sp>
+        <p:nvSpPr>
+          <p:cNvPr id="10" name="Rectangle: Rounded Corners 9">
+            <a:extLst>
+              <a:ext uri="{FF2B5EF4-FFF2-40B4-BE49-F238E27FC236}">
+                <a16:creationId xmlns:a16="http://schemas.microsoft.com/office/drawing/2014/main" id="{00A37067-EDE4-9CAA-34BC-A4A0858AE2FC}"/>
+              </a:ext>
+            </a:extLst>
+          </p:cNvPr>
+          <p:cNvSpPr/>
+          <p:nvPr/>
+        </p:nvSpPr>
+        <p:spPr>
+          <a:xfrm>
+            <a:off x="736600" y="5194300"/>
+            <a:ext cx="11008866" cy="1047750"/>
+          </a:xfrm>
+          <a:prstGeom prst="roundRect">
+            <a:avLst/>
+          </a:prstGeom>
+          <a:solidFill>
+            <a:schemeClr val="bg1">
+              <a:lumMod val="95000"/>
+            </a:schemeClr>
+          </a:solidFill>
+          <a:ln>
+            <a:noFill/>
+          </a:ln>
+        </p:spPr>
+        <p:style>
+          <a:lnRef idx="2">
+            <a:schemeClr val="accent1">
+              <a:shade val="15000"/>
+            </a:schemeClr>
+          </a:lnRef>
+          <a:fillRef idx="1">
+            <a:schemeClr val="accent1"/>
+          </a:fillRef>
+          <a:effectRef idx="0">
+            <a:schemeClr val="accent1"/>
+          </a:effectRef>
+          <a:fontRef idx="minor">
+            <a:schemeClr val="lt1"/>
+          </a:fontRef>
+        </p:style>
+        <p:txBody>
+          <a:bodyPr rtlCol="0" anchor="ctr"/>
+          <a:lstStyle/>
+          <a:p>
+            <a:pPr marL="285750" indent="-285750">
+              <a:buFont typeface="Wingdings" panose="05000000000000000000" pitchFamily="2" charset="2"/>
+              <a:buChar char="q"/>
+            </a:pPr>
+            <a:r>
+              <a:rPr lang="en-US" sz="1400" b="1" dirty="0">
+                <a:solidFill>
+                  <a:schemeClr val="bg2">
+                    <a:lumMod val="50000"/>
+                  </a:schemeClr>
+                </a:solidFill>
+              </a:rPr>
+              <a:t>Training</a:t>
+            </a:r>
+            <a:r>
+              <a:rPr lang="en-US" sz="1400" dirty="0">
+                <a:solidFill>
+                  <a:schemeClr val="bg2">
+                    <a:lumMod val="50000"/>
+                  </a:schemeClr>
+                </a:solidFill>
+              </a:rPr>
+              <a:t> and </a:t>
+            </a:r>
+            <a:r>
+              <a:rPr lang="en-US" sz="1400" b="1" dirty="0">
+                <a:solidFill>
+                  <a:schemeClr val="bg2">
+                    <a:lumMod val="50000"/>
+                  </a:schemeClr>
+                </a:solidFill>
+              </a:rPr>
+              <a:t>validation</a:t>
+            </a:r>
+            <a:r>
+              <a:rPr lang="en-US" sz="1400" dirty="0">
+                <a:solidFill>
+                  <a:schemeClr val="bg2">
+                    <a:lumMod val="50000"/>
+                  </a:schemeClr>
+                </a:solidFill>
+              </a:rPr>
+              <a:t> </a:t>
+            </a:r>
+            <a:r>
+              <a:rPr lang="en-US" sz="1400" b="1" dirty="0">
+                <a:solidFill>
+                  <a:schemeClr val="bg2">
+                    <a:lumMod val="50000"/>
+                  </a:schemeClr>
+                </a:solidFill>
+              </a:rPr>
+              <a:t>losses</a:t>
+            </a:r>
+            <a:r>
+              <a:rPr lang="en-US" sz="1400" dirty="0">
+                <a:solidFill>
+                  <a:schemeClr val="bg2">
+                    <a:lumMod val="50000"/>
+                  </a:schemeClr>
+                </a:solidFill>
+              </a:rPr>
+              <a:t> decrease across epochs, suggesting convergence achievement</a:t>
+            </a:r>
+          </a:p>
+          <a:p>
+            <a:pPr marL="285750" indent="-285750">
+              <a:buFont typeface="Wingdings" panose="05000000000000000000" pitchFamily="2" charset="2"/>
+              <a:buChar char="q"/>
+            </a:pPr>
+            <a:r>
+              <a:rPr lang="en-US" sz="1400" b="1" dirty="0">
+                <a:solidFill>
+                  <a:schemeClr val="bg2">
+                    <a:lumMod val="50000"/>
+                  </a:schemeClr>
+                </a:solidFill>
+              </a:rPr>
+              <a:t>Evaluation metric</a:t>
+            </a:r>
+            <a:r>
+              <a:rPr lang="en-US" sz="1400" dirty="0">
+                <a:solidFill>
+                  <a:schemeClr val="bg2">
+                    <a:lumMod val="50000"/>
+                  </a:schemeClr>
+                </a:solidFill>
+              </a:rPr>
+              <a:t> improves in a quite overlapping behavior between train and validation set, suggesting the absence of overfitting</a:t>
+            </a:r>
+          </a:p>
+          <a:p>
+            <a:pPr marL="285750" indent="-285750">
+              <a:buFont typeface="Wingdings" panose="05000000000000000000" pitchFamily="2" charset="2"/>
+              <a:buChar char="q"/>
+            </a:pPr>
+            <a:r>
+              <a:rPr lang="en-US" sz="1400" dirty="0">
+                <a:solidFill>
+                  <a:schemeClr val="bg2">
+                    <a:lumMod val="50000"/>
+                  </a:schemeClr>
+                </a:solidFill>
+              </a:rPr>
+              <a:t>The highest evaluation metric score is </a:t>
+            </a:r>
+            <a:r>
+              <a:rPr lang="en-US" sz="1400" b="1" dirty="0">
+                <a:solidFill>
+                  <a:schemeClr val="bg2">
+                    <a:lumMod val="50000"/>
+                  </a:schemeClr>
+                </a:solidFill>
+              </a:rPr>
+              <a:t>0.60</a:t>
+            </a:r>
+          </a:p>
+        </p:txBody>
+      </p:sp>
+    </p:spTree>
+    <p:extLst>
+      <p:ext uri="{BB962C8B-B14F-4D97-AF65-F5344CB8AC3E}">
+        <p14:creationId xmlns:p14="http://schemas.microsoft.com/office/powerpoint/2010/main" val="837402205"/>
+      </p:ext>
+    </p:extLst>
+  </p:cSld>
+  <p:clrMapOvr>
+    <a:masterClrMapping/>
+  </p:clrMapOvr>
+</p:sld>
+</file>
+
+<file path=ppt/slides/slide11.xml><?xml version="1.0" encoding="utf-8"?>
+<p:sld xmlns:a="http://schemas.openxmlformats.org/drawingml/2006/main" xmlns:r="http://schemas.openxmlformats.org/officeDocument/2006/relationships" xmlns:p="http://schemas.openxmlformats.org/presentationml/2006/main">
+  <p:cSld>
+    <p:spTree>
+      <p:nvGrpSpPr>
+        <p:cNvPr id="1" name=""/>
+        <p:cNvGrpSpPr/>
+        <p:nvPr/>
+      </p:nvGrpSpPr>
+      <p:grpSpPr>
+        <a:xfrm>
+          <a:off x="0" y="0"/>
+          <a:ext cx="0" cy="0"/>
+          <a:chOff x="0" y="0"/>
+          <a:chExt cx="0" cy="0"/>
+        </a:xfrm>
+      </p:grpSpPr>
+      <p:sp>
+        <p:nvSpPr>
+          <p:cNvPr id="17" name="Title 16">
+            <a:extLst>
+              <a:ext uri="{FF2B5EF4-FFF2-40B4-BE49-F238E27FC236}">
+                <a16:creationId xmlns:a16="http://schemas.microsoft.com/office/drawing/2014/main" id="{EBA544F6-BF8C-2C87-3906-146BEDB4C299}"/>
+              </a:ext>
+            </a:extLst>
+          </p:cNvPr>
+          <p:cNvSpPr>
+            <a:spLocks noGrp="1"/>
+          </p:cNvSpPr>
+          <p:nvPr>
+            <p:ph type="title"/>
+          </p:nvPr>
+        </p:nvSpPr>
+        <p:spPr/>
+        <p:txBody>
+          <a:bodyPr/>
+          <a:lstStyle/>
+          <a:p>
+            <a:r>
+              <a:rPr lang="en-US" dirty="0"/>
+              <a:t>Navigating Q&amp;A sessions</a:t>
+            </a:r>
+          </a:p>
+        </p:txBody>
+      </p:sp>
+      <p:sp>
+        <p:nvSpPr>
+          <p:cNvPr id="3" name="Content Placeholder 2">
+            <a:extLst>
+              <a:ext uri="{FF2B5EF4-FFF2-40B4-BE49-F238E27FC236}">
+                <a16:creationId xmlns:a16="http://schemas.microsoft.com/office/drawing/2014/main" id="{68A5FD2B-E3E5-1C2B-0151-21F216B14A33}"/>
+              </a:ext>
+            </a:extLst>
+          </p:cNvPr>
+          <p:cNvSpPr>
+            <a:spLocks noGrp="1"/>
+          </p:cNvSpPr>
+          <p:nvPr>
+            <p:ph sz="half" idx="13"/>
+          </p:nvPr>
+        </p:nvSpPr>
+        <p:spPr>
+          <a:noFill/>
+        </p:spPr>
+        <p:txBody>
+          <a:bodyPr>
+            <a:normAutofit/>
+          </a:bodyPr>
+          <a:lstStyle/>
+          <a:p>
+            <a:r>
+              <a:rPr lang="en-US" dirty="0"/>
+              <a:t>Know your material in advance</a:t>
+            </a:r>
+          </a:p>
+          <a:p>
+            <a:r>
+              <a:rPr lang="en-US" dirty="0"/>
+              <a:t>Anticipate common questions</a:t>
+            </a:r>
+          </a:p>
+          <a:p>
+            <a:r>
+              <a:rPr lang="en-US" dirty="0"/>
+              <a:t>Rehearse your responses</a:t>
+            </a:r>
+          </a:p>
+        </p:txBody>
+      </p:sp>
+      <p:sp>
+        <p:nvSpPr>
+          <p:cNvPr id="4" name="Content Placeholder 3">
+            <a:extLst>
+              <a:ext uri="{FF2B5EF4-FFF2-40B4-BE49-F238E27FC236}">
+                <a16:creationId xmlns:a16="http://schemas.microsoft.com/office/drawing/2014/main" id="{ACFBB810-3430-2C29-1AA0-9744AA0A1AA3}"/>
+              </a:ext>
+            </a:extLst>
+          </p:cNvPr>
+          <p:cNvSpPr>
+            <a:spLocks noGrp="1"/>
+          </p:cNvSpPr>
+          <p:nvPr>
+            <p:ph sz="half" idx="2"/>
+          </p:nvPr>
+        </p:nvSpPr>
+        <p:spPr>
+          <a:noFill/>
+        </p:spPr>
+        <p:txBody>
+          <a:bodyPr>
+            <a:normAutofit/>
+          </a:bodyPr>
+          <a:lstStyle/>
+          <a:p>
+            <a:r>
+              <a:rPr lang="en-US" dirty="0"/>
+              <a:t>Maintaining composure during the Q&amp;A session is essential for projecting confidence and authority. Consider the following tips for staying composed:</a:t>
+            </a:r>
+          </a:p>
+          <a:p>
+            <a:pPr lvl="1"/>
+            <a:r>
+              <a:rPr lang="en-US" dirty="0"/>
+              <a:t>Stay calm</a:t>
+            </a:r>
+          </a:p>
+          <a:p>
+            <a:pPr lvl="1"/>
+            <a:r>
+              <a:rPr lang="en-US" dirty="0"/>
+              <a:t>Actively listen</a:t>
+            </a:r>
+          </a:p>
+          <a:p>
+            <a:pPr lvl="1"/>
+            <a:r>
+              <a:rPr lang="en-US" dirty="0"/>
+              <a:t>Pause and reflect</a:t>
+            </a:r>
+          </a:p>
+          <a:p>
+            <a:pPr lvl="1"/>
+            <a:r>
+              <a:rPr lang="en-US" dirty="0"/>
+              <a:t>Maintain eye contact</a:t>
+            </a:r>
+          </a:p>
+        </p:txBody>
+      </p:sp>
+    </p:spTree>
+    <p:extLst>
+      <p:ext uri="{BB962C8B-B14F-4D97-AF65-F5344CB8AC3E}">
+        <p14:creationId xmlns:p14="http://schemas.microsoft.com/office/powerpoint/2010/main" val="2676905442"/>
+      </p:ext>
+    </p:extLst>
+  </p:cSld>
+  <p:clrMapOvr>
+    <a:masterClrMapping/>
+  </p:clrMapOvr>
+</p:sld>
+</file>
+
+<file path=ppt/slides/slide12.xml><?xml version="1.0" encoding="utf-8"?>
+<p:sld xmlns:a="http://schemas.openxmlformats.org/drawingml/2006/main" xmlns:r="http://schemas.openxmlformats.org/officeDocument/2006/relationships" xmlns:p="http://schemas.openxmlformats.org/presentationml/2006/main">
+  <p:cSld>
+    <p:spTree>
+      <p:nvGrpSpPr>
+        <p:cNvPr id="1" name=""/>
+        <p:cNvGrpSpPr/>
+        <p:nvPr/>
+      </p:nvGrpSpPr>
+      <p:grpSpPr>
+        <a:xfrm>
+          <a:off x="0" y="0"/>
+          <a:ext cx="0" cy="0"/>
+          <a:chOff x="0" y="0"/>
+          <a:chExt cx="0" cy="0"/>
+        </a:xfrm>
+      </p:grpSpPr>
+      <p:sp>
+        <p:nvSpPr>
           <p:cNvPr id="30" name="Title 29">
             <a:extLst>
               <a:ext uri="{FF2B5EF4-FFF2-40B4-BE49-F238E27FC236}">
@@ -9425,7 +10611,12 @@
             <p:ph sz="half" idx="1"/>
           </p:nvPr>
         </p:nvSpPr>
-        <p:spPr/>
+        <p:spPr>
+          <a:xfrm>
+            <a:off x="447040" y="2236788"/>
+            <a:ext cx="3342640" cy="3992880"/>
+          </a:xfrm>
+        </p:spPr>
         <p:txBody>
           <a:bodyPr/>
           <a:lstStyle/>
@@ -9899,7 +11090,7 @@
 </p:sld>
 </file>
 
-<file path=ppt/slides/slide11.xml><?xml version="1.0" encoding="utf-8"?>
+<file path=ppt/slides/slide13.xml><?xml version="1.0" encoding="utf-8"?>
 <p:sld xmlns:a="http://schemas.openxmlformats.org/drawingml/2006/main" xmlns:r="http://schemas.openxmlformats.org/officeDocument/2006/relationships" xmlns:p="http://schemas.openxmlformats.org/presentationml/2006/main">
   <p:cSld>
     <p:spTree>
@@ -10083,7 +11274,7 @@
 </p:sld>
 </file>
 
-<file path=ppt/slides/slide12.xml><?xml version="1.0" encoding="utf-8"?>
+<file path=ppt/slides/slide14.xml><?xml version="1.0" encoding="utf-8"?>
 <p:sld xmlns:a="http://schemas.openxmlformats.org/drawingml/2006/main" xmlns:r="http://schemas.openxmlformats.org/officeDocument/2006/relationships" xmlns:p="http://schemas.openxmlformats.org/presentationml/2006/main">
   <p:cSld>
     <p:spTree>
@@ -10584,7 +11775,7 @@
 </p:sld>
 </file>
 
-<file path=ppt/slides/slide13.xml><?xml version="1.0" encoding="utf-8"?>
+<file path=ppt/slides/slide15.xml><?xml version="1.0" encoding="utf-8"?>
 <p:sld xmlns:a="http://schemas.openxmlformats.org/drawingml/2006/main" xmlns:r="http://schemas.openxmlformats.org/officeDocument/2006/relationships" xmlns:p="http://schemas.openxmlformats.org/presentationml/2006/main">
   <p:cSld>
     <p:spTree>
@@ -10677,10 +11868,10 @@
       </p:sp>
       <p:pic>
         <p:nvPicPr>
-          <p:cNvPr id="23" name="Picture Placeholder 22" descr="A group of people giving each other a high five">
+          <p:cNvPr id="6" name="Picture Placeholder 5">
             <a:extLst>
               <a:ext uri="{FF2B5EF4-FFF2-40B4-BE49-F238E27FC236}">
-                <a16:creationId xmlns:a16="http://schemas.microsoft.com/office/drawing/2014/main" id="{D92A2E6E-E7AB-92FB-0E6F-133483021C22}"/>
+                <a16:creationId xmlns:a16="http://schemas.microsoft.com/office/drawing/2014/main" id="{5A2ECFE2-C2B6-18B8-2668-85378DF231CF}"/>
               </a:ext>
             </a:extLst>
           </p:cNvPr>
@@ -10691,12 +11882,161 @@
             <p:ph type="pic" sz="quarter" idx="13"/>
           </p:nvPr>
         </p:nvPicPr>
-        <p:blipFill rotWithShape="1">
+        <p:blipFill>
           <a:blip r:embed="rId3"/>
-          <a:srcRect l="6095" r="6095"/>
-          <a:stretch/>
+          <a:srcRect l="16797" r="16797"/>
+          <a:stretch>
+            <a:fillRect/>
+          </a:stretch>
         </p:blipFill>
-        <p:spPr/>
+        <p:spPr>
+          <a:custGeom>
+            <a:avLst/>
+            <a:gdLst>
+              <a:gd name="connsiteX0" fmla="*/ 3803282 w 7497880"/>
+              <a:gd name="connsiteY0" fmla="*/ 0 h 5687344"/>
+              <a:gd name="connsiteX1" fmla="*/ 7497880 w 7497880"/>
+              <a:gd name="connsiteY1" fmla="*/ 0 h 5687344"/>
+              <a:gd name="connsiteX2" fmla="*/ 7497880 w 7497880"/>
+              <a:gd name="connsiteY2" fmla="*/ 4581885 h 5687344"/>
+              <a:gd name="connsiteX3" fmla="*/ 3803282 w 7497880"/>
+              <a:gd name="connsiteY3" fmla="*/ 4581885 h 5687344"/>
+              <a:gd name="connsiteX4" fmla="*/ 0 w 7497880"/>
+              <a:gd name="connsiteY4" fmla="*/ 0 h 5687344"/>
+              <a:gd name="connsiteX5" fmla="*/ 3699373 w 7497880"/>
+              <a:gd name="connsiteY5" fmla="*/ 0 h 5687344"/>
+              <a:gd name="connsiteX6" fmla="*/ 3699373 w 7497880"/>
+              <a:gd name="connsiteY6" fmla="*/ 4581885 h 5687344"/>
+              <a:gd name="connsiteX7" fmla="*/ 2 w 7497880"/>
+              <a:gd name="connsiteY7" fmla="*/ 4581885 h 5687344"/>
+              <a:gd name="connsiteX8" fmla="*/ 2 w 7497880"/>
+              <a:gd name="connsiteY8" fmla="*/ 4679200 h 5687344"/>
+              <a:gd name="connsiteX9" fmla="*/ 3699373 w 7497880"/>
+              <a:gd name="connsiteY9" fmla="*/ 4679200 h 5687344"/>
+              <a:gd name="connsiteX10" fmla="*/ 3699373 w 7497880"/>
+              <a:gd name="connsiteY10" fmla="*/ 5679350 h 5687344"/>
+              <a:gd name="connsiteX11" fmla="*/ 3803282 w 7497880"/>
+              <a:gd name="connsiteY11" fmla="*/ 5679350 h 5687344"/>
+              <a:gd name="connsiteX12" fmla="*/ 3803282 w 7497880"/>
+              <a:gd name="connsiteY12" fmla="*/ 4679200 h 5687344"/>
+              <a:gd name="connsiteX13" fmla="*/ 7497880 w 7497880"/>
+              <a:gd name="connsiteY13" fmla="*/ 4679200 h 5687344"/>
+              <a:gd name="connsiteX14" fmla="*/ 7497880 w 7497880"/>
+              <a:gd name="connsiteY14" fmla="*/ 5687344 h 5687344"/>
+              <a:gd name="connsiteX15" fmla="*/ 0 w 7497880"/>
+              <a:gd name="connsiteY15" fmla="*/ 5687344 h 5687344"/>
+            </a:gdLst>
+            <a:ahLst/>
+            <a:cxnLst>
+              <a:cxn ang="0">
+                <a:pos x="connsiteX0" y="connsiteY0"/>
+              </a:cxn>
+              <a:cxn ang="0">
+                <a:pos x="connsiteX1" y="connsiteY1"/>
+              </a:cxn>
+              <a:cxn ang="0">
+                <a:pos x="connsiteX2" y="connsiteY2"/>
+              </a:cxn>
+              <a:cxn ang="0">
+                <a:pos x="connsiteX3" y="connsiteY3"/>
+              </a:cxn>
+              <a:cxn ang="0">
+                <a:pos x="connsiteX4" y="connsiteY4"/>
+              </a:cxn>
+              <a:cxn ang="0">
+                <a:pos x="connsiteX5" y="connsiteY5"/>
+              </a:cxn>
+              <a:cxn ang="0">
+                <a:pos x="connsiteX6" y="connsiteY6"/>
+              </a:cxn>
+              <a:cxn ang="0">
+                <a:pos x="connsiteX7" y="connsiteY7"/>
+              </a:cxn>
+              <a:cxn ang="0">
+                <a:pos x="connsiteX8" y="connsiteY8"/>
+              </a:cxn>
+              <a:cxn ang="0">
+                <a:pos x="connsiteX9" y="connsiteY9"/>
+              </a:cxn>
+              <a:cxn ang="0">
+                <a:pos x="connsiteX10" y="connsiteY10"/>
+              </a:cxn>
+              <a:cxn ang="0">
+                <a:pos x="connsiteX11" y="connsiteY11"/>
+              </a:cxn>
+              <a:cxn ang="0">
+                <a:pos x="connsiteX12" y="connsiteY12"/>
+              </a:cxn>
+              <a:cxn ang="0">
+                <a:pos x="connsiteX13" y="connsiteY13"/>
+              </a:cxn>
+              <a:cxn ang="0">
+                <a:pos x="connsiteX14" y="connsiteY14"/>
+              </a:cxn>
+              <a:cxn ang="0">
+                <a:pos x="connsiteX15" y="connsiteY15"/>
+              </a:cxn>
+            </a:cxnLst>
+            <a:rect l="l" t="t" r="r" b="b"/>
+            <a:pathLst>
+              <a:path w="7497880" h="5687344">
+                <a:moveTo>
+                  <a:pt x="3803282" y="0"/>
+                </a:moveTo>
+                <a:lnTo>
+                  <a:pt x="7497880" y="0"/>
+                </a:lnTo>
+                <a:lnTo>
+                  <a:pt x="7497880" y="4581885"/>
+                </a:lnTo>
+                <a:lnTo>
+                  <a:pt x="3803282" y="4581885"/>
+                </a:lnTo>
+                <a:close/>
+                <a:moveTo>
+                  <a:pt x="0" y="0"/>
+                </a:moveTo>
+                <a:lnTo>
+                  <a:pt x="3699373" y="0"/>
+                </a:lnTo>
+                <a:lnTo>
+                  <a:pt x="3699373" y="4581885"/>
+                </a:lnTo>
+                <a:lnTo>
+                  <a:pt x="2" y="4581885"/>
+                </a:lnTo>
+                <a:lnTo>
+                  <a:pt x="2" y="4679200"/>
+                </a:lnTo>
+                <a:lnTo>
+                  <a:pt x="3699373" y="4679200"/>
+                </a:lnTo>
+                <a:lnTo>
+                  <a:pt x="3699373" y="5679350"/>
+                </a:lnTo>
+                <a:lnTo>
+                  <a:pt x="3803282" y="5679350"/>
+                </a:lnTo>
+                <a:lnTo>
+                  <a:pt x="3803282" y="4679200"/>
+                </a:lnTo>
+                <a:lnTo>
+                  <a:pt x="7497880" y="4679200"/>
+                </a:lnTo>
+                <a:lnTo>
+                  <a:pt x="7497880" y="5687344"/>
+                </a:lnTo>
+                <a:lnTo>
+                  <a:pt x="0" y="5687344"/>
+                </a:lnTo>
+                <a:close/>
+              </a:path>
+            </a:pathLst>
+          </a:custGeom>
+          <a:solidFill>
+            <a:srgbClr val="E6C46D"/>
+          </a:solidFill>
+        </p:spPr>
       </p:pic>
     </p:spTree>
     <p:extLst>
@@ -10746,7 +12086,7 @@
         </p:nvSpPr>
         <p:spPr>
           <a:xfrm>
-            <a:off x="6096000" y="-10547"/>
+            <a:off x="5833170" y="-148095"/>
             <a:ext cx="5626579" cy="1286219"/>
           </a:xfrm>
         </p:spPr>
@@ -10758,6 +12098,57 @@
               <a:rPr lang="en-US" dirty="0"/>
               <a:t>BRAIN STROKE INTRODUCTION</a:t>
             </a:r>
+          </a:p>
+        </p:txBody>
+      </p:sp>
+      <p:sp>
+        <p:nvSpPr>
+          <p:cNvPr id="12" name="Rectangle: Rounded Corners 11">
+            <a:extLst>
+              <a:ext uri="{FF2B5EF4-FFF2-40B4-BE49-F238E27FC236}">
+                <a16:creationId xmlns:a16="http://schemas.microsoft.com/office/drawing/2014/main" id="{B675172A-E71B-4763-4AD6-991B10C3DCE1}"/>
+              </a:ext>
+            </a:extLst>
+          </p:cNvPr>
+          <p:cNvSpPr/>
+          <p:nvPr/>
+        </p:nvSpPr>
+        <p:spPr>
+          <a:xfrm>
+            <a:off x="5428200" y="1275672"/>
+            <a:ext cx="6349907" cy="949935"/>
+          </a:xfrm>
+          <a:prstGeom prst="roundRect">
+            <a:avLst/>
+          </a:prstGeom>
+          <a:solidFill>
+            <a:schemeClr val="bg1">
+              <a:lumMod val="95000"/>
+            </a:schemeClr>
+          </a:solidFill>
+        </p:spPr>
+        <p:style>
+          <a:lnRef idx="2">
+            <a:schemeClr val="accent1">
+              <a:shade val="15000"/>
+            </a:schemeClr>
+          </a:lnRef>
+          <a:fillRef idx="1">
+            <a:schemeClr val="accent1"/>
+          </a:fillRef>
+          <a:effectRef idx="0">
+            <a:schemeClr val="accent1"/>
+          </a:effectRef>
+          <a:fontRef idx="minor">
+            <a:schemeClr val="lt1"/>
+          </a:fontRef>
+        </p:style>
+        <p:txBody>
+          <a:bodyPr rtlCol="0" anchor="ctr"/>
+          <a:lstStyle/>
+          <a:p>
+            <a:pPr algn="ctr"/>
+            <a:endParaRPr lang="en-US"/>
           </a:p>
         </p:txBody>
       </p:sp>
@@ -10779,8 +12170,8 @@
         </p:nvSpPr>
         <p:spPr>
           <a:xfrm>
-            <a:off x="5459288" y="1353424"/>
-            <a:ext cx="6263291" cy="1092817"/>
+            <a:off x="5471509" y="1451781"/>
+            <a:ext cx="6263291" cy="773826"/>
           </a:xfrm>
         </p:spPr>
         <p:txBody>
@@ -10789,6 +12180,9 @@
           </a:bodyPr>
           <a:lstStyle/>
           <a:p>
+            <a:pPr marL="0" indent="0">
+              <a:buNone/>
+            </a:pPr>
             <a:r>
               <a:rPr lang="en-US" sz="1700" b="1" dirty="0"/>
               <a:t>Neurological deficit </a:t>
@@ -10987,6 +12381,57 @@
       </p:pic>
       <p:sp>
         <p:nvSpPr>
+          <p:cNvPr id="7" name="Rectangle: Rounded Corners 6">
+            <a:extLst>
+              <a:ext uri="{FF2B5EF4-FFF2-40B4-BE49-F238E27FC236}">
+                <a16:creationId xmlns:a16="http://schemas.microsoft.com/office/drawing/2014/main" id="{1DE8FF97-4120-AC06-2C19-DB21AC219B3C}"/>
+              </a:ext>
+            </a:extLst>
+          </p:cNvPr>
+          <p:cNvSpPr/>
+          <p:nvPr/>
+        </p:nvSpPr>
+        <p:spPr>
+          <a:xfrm>
+            <a:off x="5471509" y="2394548"/>
+            <a:ext cx="6349907" cy="1585310"/>
+          </a:xfrm>
+          <a:prstGeom prst="roundRect">
+            <a:avLst/>
+          </a:prstGeom>
+          <a:solidFill>
+            <a:schemeClr val="bg1">
+              <a:lumMod val="95000"/>
+            </a:schemeClr>
+          </a:solidFill>
+        </p:spPr>
+        <p:style>
+          <a:lnRef idx="2">
+            <a:schemeClr val="accent1">
+              <a:shade val="15000"/>
+            </a:schemeClr>
+          </a:lnRef>
+          <a:fillRef idx="1">
+            <a:schemeClr val="accent1"/>
+          </a:fillRef>
+          <a:effectRef idx="0">
+            <a:schemeClr val="accent1"/>
+          </a:effectRef>
+          <a:fontRef idx="minor">
+            <a:schemeClr val="lt1"/>
+          </a:fontRef>
+        </p:style>
+        <p:txBody>
+          <a:bodyPr rtlCol="0" anchor="ctr"/>
+          <a:lstStyle/>
+          <a:p>
+            <a:pPr algn="ctr"/>
+            <a:endParaRPr lang="en-US"/>
+          </a:p>
+        </p:txBody>
+      </p:sp>
+      <p:sp>
+        <p:nvSpPr>
           <p:cNvPr id="6" name="Content Placeholder 32">
             <a:extLst>
               <a:ext uri="{FF2B5EF4-FFF2-40B4-BE49-F238E27FC236}">
@@ -11001,8 +12446,8 @@
         </p:nvSpPr>
         <p:spPr>
           <a:xfrm>
-            <a:off x="5459287" y="2192802"/>
-            <a:ext cx="6263291" cy="1727846"/>
+            <a:off x="5514816" y="2486646"/>
+            <a:ext cx="6263291" cy="1644515"/>
           </a:xfrm>
           <a:prstGeom prst="rect">
             <a:avLst/>
@@ -11213,49 +12658,95 @@
             </a:lvl9pPr>
           </a:lstStyle>
           <a:p>
+            <a:pPr marL="0" indent="0">
+              <a:buNone/>
+            </a:pPr>
             <a:r>
               <a:rPr lang="en-US" sz="2700" dirty="0"/>
               <a:t>Two main different types of stroke do exist [Gomes, Wachsman, 2013]:</a:t>
             </a:r>
           </a:p>
           <a:p>
-            <a:pPr marL="0" indent="0">
-              <a:buFont typeface="Wingdings 2" panose="05020102010507070707" pitchFamily="18" charset="2"/>
-              <a:buNone/>
+            <a:pPr lvl="1">
+              <a:buFont typeface="Wingdings" panose="05000000000000000000" pitchFamily="2" charset="2"/>
+              <a:buChar char="q"/>
             </a:pPr>
             <a:r>
-              <a:rPr lang="en-US" sz="2700" dirty="0"/>
-              <a:t>    - </a:t>
-            </a:r>
-            <a:r>
-              <a:rPr lang="en-US" sz="2700" b="1" dirty="0"/>
+              <a:rPr lang="en-US" sz="2400" b="1" dirty="0"/>
               <a:t>ischemic</a:t>
             </a:r>
             <a:r>
-              <a:rPr lang="en-US" sz="2700" dirty="0"/>
-              <a:t> due to vessels occlusion, leading to the 	blood flow interruption to brain areas</a:t>
-            </a:r>
-          </a:p>
-          <a:p>
-            <a:pPr marL="0" indent="0">
-              <a:buFont typeface="Wingdings 2" panose="05020102010507070707" pitchFamily="18" charset="2"/>
-              <a:buNone/>
+              <a:rPr lang="en-US" sz="2400" dirty="0"/>
+              <a:t> due to vessels occlusion, leading to the blood flow  interruption to brain areas</a:t>
+            </a:r>
+          </a:p>
+          <a:p>
+            <a:pPr lvl="1">
+              <a:buFont typeface="Wingdings" panose="05000000000000000000" pitchFamily="2" charset="2"/>
+              <a:buChar char="q"/>
             </a:pPr>
             <a:r>
-              <a:rPr lang="en-US" sz="2700" dirty="0"/>
-              <a:t>    - </a:t>
-            </a:r>
-            <a:r>
-              <a:rPr lang="en-US" sz="2700" b="1" dirty="0" err="1"/>
+              <a:rPr lang="en-US" sz="2400" b="1" dirty="0" err="1"/>
               <a:t>hemorragic</a:t>
             </a:r>
             <a:r>
-              <a:rPr lang="en-US" sz="2700" dirty="0"/>
-              <a:t> due to vessels bleeding causing 	direct damage to brain tissue</a:t>
+              <a:rPr lang="en-US" sz="2400" dirty="0"/>
+              <a:t> due to vessels bleeding causing direct damage to brain tissue</a:t>
             </a:r>
           </a:p>
           <a:p>
             <a:endParaRPr lang="en-US" dirty="0"/>
+          </a:p>
+        </p:txBody>
+      </p:sp>
+      <p:sp>
+        <p:nvSpPr>
+          <p:cNvPr id="14" name="Rectangle: Rounded Corners 13">
+            <a:extLst>
+              <a:ext uri="{FF2B5EF4-FFF2-40B4-BE49-F238E27FC236}">
+                <a16:creationId xmlns:a16="http://schemas.microsoft.com/office/drawing/2014/main" id="{48E372AA-1CBA-F540-B7E2-D5C47B915F96}"/>
+              </a:ext>
+            </a:extLst>
+          </p:cNvPr>
+          <p:cNvSpPr/>
+          <p:nvPr/>
+        </p:nvSpPr>
+        <p:spPr>
+          <a:xfrm>
+            <a:off x="5471507" y="4144313"/>
+            <a:ext cx="6349907" cy="2279601"/>
+          </a:xfrm>
+          <a:prstGeom prst="roundRect">
+            <a:avLst/>
+          </a:prstGeom>
+          <a:solidFill>
+            <a:schemeClr val="bg1">
+              <a:lumMod val="95000"/>
+            </a:schemeClr>
+          </a:solidFill>
+        </p:spPr>
+        <p:style>
+          <a:lnRef idx="2">
+            <a:schemeClr val="accent1">
+              <a:shade val="15000"/>
+            </a:schemeClr>
+          </a:lnRef>
+          <a:fillRef idx="1">
+            <a:schemeClr val="accent1"/>
+          </a:fillRef>
+          <a:effectRef idx="0">
+            <a:schemeClr val="accent1"/>
+          </a:effectRef>
+          <a:fontRef idx="minor">
+            <a:schemeClr val="lt1"/>
+          </a:fontRef>
+        </p:style>
+        <p:txBody>
+          <a:bodyPr rtlCol="0" anchor="ctr"/>
+          <a:lstStyle/>
+          <a:p>
+            <a:pPr algn="ctr"/>
+            <a:endParaRPr lang="en-US"/>
           </a:p>
         </p:txBody>
       </p:sp>
@@ -11275,8 +12766,8 @@
         </p:nvSpPr>
         <p:spPr>
           <a:xfrm>
-            <a:off x="5471509" y="3846238"/>
-            <a:ext cx="6263291" cy="2674306"/>
+            <a:off x="5471509" y="4293515"/>
+            <a:ext cx="6349905" cy="2002030"/>
           </a:xfrm>
           <a:prstGeom prst="rect">
             <a:avLst/>
@@ -11487,30 +12978,54 @@
             </a:lvl9pPr>
           </a:lstStyle>
           <a:p>
-            <a:r>
-              <a:rPr lang="en-US" sz="1700" dirty="0"/>
-              <a:t>Stroke-related impairments could be [Jambi et al. 2024]:</a:t>
-            </a:r>
-          </a:p>
-          <a:p>
             <a:pPr marL="0" indent="0">
               <a:buNone/>
             </a:pPr>
             <a:r>
-              <a:rPr lang="en-US" sz="1700" b="1" dirty="0"/>
-              <a:t>    </a:t>
-            </a:r>
-            <a:r>
-              <a:rPr lang="en-US" sz="1700" dirty="0"/>
-              <a:t>- </a:t>
-            </a:r>
-            <a:r>
-              <a:rPr lang="en-US" sz="1700" b="1" dirty="0"/>
+              <a:rPr lang="en-US" sz="1500" dirty="0"/>
+              <a:t>Stroke-related impairments could be [Jambi et al. 2024]:</a:t>
+            </a:r>
+          </a:p>
+          <a:p>
+            <a:pPr lvl="1">
+              <a:buFont typeface="Wingdings" panose="05000000000000000000" pitchFamily="2" charset="2"/>
+              <a:buChar char="q"/>
+            </a:pPr>
+            <a:r>
+              <a:rPr lang="en-US" sz="1400" b="1" dirty="0"/>
               <a:t>Physical</a:t>
             </a:r>
             <a:r>
-              <a:rPr lang="en-US" sz="1700" dirty="0"/>
-              <a:t>: paralysis, balance and coordination deficits affecting mobility and daily activities </a:t>
+              <a:rPr lang="en-US" sz="1400" dirty="0"/>
+              <a:t>: paralysis, balance and coordination deficits affecting mobility and daily activities</a:t>
+            </a:r>
+          </a:p>
+          <a:p>
+            <a:pPr lvl="1">
+              <a:buFont typeface="Wingdings" panose="05000000000000000000" pitchFamily="2" charset="2"/>
+              <a:buChar char="q"/>
+            </a:pPr>
+            <a:r>
+              <a:rPr lang="en-US" sz="1400" b="1" dirty="0"/>
+              <a:t>Cognitive:</a:t>
+            </a:r>
+            <a:r>
+              <a:rPr lang="en-US" sz="1400" dirty="0"/>
+              <a:t> memory, attention, reasoning and decision-making difficulties</a:t>
+            </a:r>
+          </a:p>
+          <a:p>
+            <a:pPr lvl="1">
+              <a:buFont typeface="Wingdings" panose="05000000000000000000" pitchFamily="2" charset="2"/>
+              <a:buChar char="q"/>
+            </a:pPr>
+            <a:r>
+              <a:rPr lang="en-US" sz="1400" b="1" dirty="0"/>
+              <a:t>Communication</a:t>
+            </a:r>
+            <a:r>
+              <a:rPr lang="en-US" sz="1400" dirty="0"/>
+              <a:t>: aphasia, speech and swallowing disorders limiting interaction</a:t>
             </a:r>
           </a:p>
           <a:p>
@@ -11521,44 +13036,6 @@
               <a:rPr lang="en-US" sz="1700" b="1" dirty="0"/>
               <a:t>    </a:t>
             </a:r>
-            <a:r>
-              <a:rPr lang="en-US" sz="1700" dirty="0"/>
-              <a:t>-</a:t>
-            </a:r>
-            <a:r>
-              <a:rPr lang="en-US" sz="1700" b="1" dirty="0"/>
-              <a:t> Cognitive:</a:t>
-            </a:r>
-            <a:r>
-              <a:rPr lang="en-US" sz="1700" dirty="0"/>
-              <a:t> memory, attention, reasoning and decision-making difficulties </a:t>
-            </a:r>
-          </a:p>
-          <a:p>
-            <a:pPr marL="0" indent="0">
-              <a:buNone/>
-            </a:pPr>
-            <a:r>
-              <a:rPr lang="en-US" sz="1700" b="1" dirty="0"/>
-              <a:t>    </a:t>
-            </a:r>
-            <a:r>
-              <a:rPr lang="en-US" sz="1700" dirty="0"/>
-              <a:t>-</a:t>
-            </a:r>
-            <a:r>
-              <a:rPr lang="en-US" sz="1700" b="1" dirty="0"/>
-              <a:t> Communication</a:t>
-            </a:r>
-            <a:r>
-              <a:rPr lang="en-US" sz="1700" dirty="0"/>
-              <a:t>: aphasia, speech and swallowing disorders limiting interaction</a:t>
-            </a:r>
-          </a:p>
-          <a:p>
-            <a:pPr marL="0" indent="0">
-              <a:buNone/>
-            </a:pPr>
             <a:endParaRPr lang="en-US" sz="1700" dirty="0"/>
           </a:p>
           <a:p>
@@ -11617,7 +13094,7 @@
         </p:nvSpPr>
         <p:spPr>
           <a:xfrm>
-            <a:off x="467360" y="3200233"/>
+            <a:off x="467360" y="1417361"/>
             <a:ext cx="3729789" cy="2796199"/>
           </a:xfrm>
         </p:spPr>
@@ -11654,7 +13131,7 @@
         </p:nvSpPr>
         <p:spPr>
           <a:xfrm>
-            <a:off x="4197149" y="3141138"/>
+            <a:off x="4462024" y="3015877"/>
             <a:ext cx="7418813" cy="3440485"/>
           </a:xfrm>
         </p:spPr>
@@ -11836,12 +13313,186 @@
         </p:blipFill>
         <p:spPr>
           <a:xfrm>
-            <a:off x="837930" y="750280"/>
-            <a:ext cx="10516140" cy="1999183"/>
+            <a:off x="3650292" y="693913"/>
+            <a:ext cx="8280749" cy="1999183"/>
           </a:xfrm>
           <a:prstGeom prst="rect">
             <a:avLst/>
           </a:prstGeom>
+        </p:spPr>
+      </p:pic>
+      <p:pic>
+        <p:nvPicPr>
+          <p:cNvPr id="18" name="Picture Placeholder 5">
+            <a:extLst>
+              <a:ext uri="{FF2B5EF4-FFF2-40B4-BE49-F238E27FC236}">
+                <a16:creationId xmlns:a16="http://schemas.microsoft.com/office/drawing/2014/main" id="{E88F2DAD-B909-658D-7329-2627AA19050A}"/>
+              </a:ext>
+            </a:extLst>
+          </p:cNvPr>
+          <p:cNvPicPr>
+            <a:picLocks noChangeAspect="1"/>
+          </p:cNvPicPr>
+          <p:nvPr/>
+        </p:nvPicPr>
+        <p:blipFill>
+          <a:blip r:embed="rId6"/>
+          <a:srcRect l="16797" r="16797"/>
+          <a:stretch>
+            <a:fillRect/>
+          </a:stretch>
+        </p:blipFill>
+        <p:spPr>
+          <a:xfrm>
+            <a:off x="311163" y="3416544"/>
+            <a:ext cx="3340174" cy="2533612"/>
+          </a:xfrm>
+          <a:custGeom>
+            <a:avLst/>
+            <a:gdLst>
+              <a:gd name="connsiteX0" fmla="*/ 3803282 w 7497880"/>
+              <a:gd name="connsiteY0" fmla="*/ 0 h 5687344"/>
+              <a:gd name="connsiteX1" fmla="*/ 7497880 w 7497880"/>
+              <a:gd name="connsiteY1" fmla="*/ 0 h 5687344"/>
+              <a:gd name="connsiteX2" fmla="*/ 7497880 w 7497880"/>
+              <a:gd name="connsiteY2" fmla="*/ 4581885 h 5687344"/>
+              <a:gd name="connsiteX3" fmla="*/ 3803282 w 7497880"/>
+              <a:gd name="connsiteY3" fmla="*/ 4581885 h 5687344"/>
+              <a:gd name="connsiteX4" fmla="*/ 0 w 7497880"/>
+              <a:gd name="connsiteY4" fmla="*/ 0 h 5687344"/>
+              <a:gd name="connsiteX5" fmla="*/ 3699373 w 7497880"/>
+              <a:gd name="connsiteY5" fmla="*/ 0 h 5687344"/>
+              <a:gd name="connsiteX6" fmla="*/ 3699373 w 7497880"/>
+              <a:gd name="connsiteY6" fmla="*/ 4581885 h 5687344"/>
+              <a:gd name="connsiteX7" fmla="*/ 2 w 7497880"/>
+              <a:gd name="connsiteY7" fmla="*/ 4581885 h 5687344"/>
+              <a:gd name="connsiteX8" fmla="*/ 2 w 7497880"/>
+              <a:gd name="connsiteY8" fmla="*/ 4679200 h 5687344"/>
+              <a:gd name="connsiteX9" fmla="*/ 3699373 w 7497880"/>
+              <a:gd name="connsiteY9" fmla="*/ 4679200 h 5687344"/>
+              <a:gd name="connsiteX10" fmla="*/ 3699373 w 7497880"/>
+              <a:gd name="connsiteY10" fmla="*/ 5679350 h 5687344"/>
+              <a:gd name="connsiteX11" fmla="*/ 3803282 w 7497880"/>
+              <a:gd name="connsiteY11" fmla="*/ 5679350 h 5687344"/>
+              <a:gd name="connsiteX12" fmla="*/ 3803282 w 7497880"/>
+              <a:gd name="connsiteY12" fmla="*/ 4679200 h 5687344"/>
+              <a:gd name="connsiteX13" fmla="*/ 7497880 w 7497880"/>
+              <a:gd name="connsiteY13" fmla="*/ 4679200 h 5687344"/>
+              <a:gd name="connsiteX14" fmla="*/ 7497880 w 7497880"/>
+              <a:gd name="connsiteY14" fmla="*/ 5687344 h 5687344"/>
+              <a:gd name="connsiteX15" fmla="*/ 0 w 7497880"/>
+              <a:gd name="connsiteY15" fmla="*/ 5687344 h 5687344"/>
+            </a:gdLst>
+            <a:ahLst/>
+            <a:cxnLst>
+              <a:cxn ang="0">
+                <a:pos x="connsiteX0" y="connsiteY0"/>
+              </a:cxn>
+              <a:cxn ang="0">
+                <a:pos x="connsiteX1" y="connsiteY1"/>
+              </a:cxn>
+              <a:cxn ang="0">
+                <a:pos x="connsiteX2" y="connsiteY2"/>
+              </a:cxn>
+              <a:cxn ang="0">
+                <a:pos x="connsiteX3" y="connsiteY3"/>
+              </a:cxn>
+              <a:cxn ang="0">
+                <a:pos x="connsiteX4" y="connsiteY4"/>
+              </a:cxn>
+              <a:cxn ang="0">
+                <a:pos x="connsiteX5" y="connsiteY5"/>
+              </a:cxn>
+              <a:cxn ang="0">
+                <a:pos x="connsiteX6" y="connsiteY6"/>
+              </a:cxn>
+              <a:cxn ang="0">
+                <a:pos x="connsiteX7" y="connsiteY7"/>
+              </a:cxn>
+              <a:cxn ang="0">
+                <a:pos x="connsiteX8" y="connsiteY8"/>
+              </a:cxn>
+              <a:cxn ang="0">
+                <a:pos x="connsiteX9" y="connsiteY9"/>
+              </a:cxn>
+              <a:cxn ang="0">
+                <a:pos x="connsiteX10" y="connsiteY10"/>
+              </a:cxn>
+              <a:cxn ang="0">
+                <a:pos x="connsiteX11" y="connsiteY11"/>
+              </a:cxn>
+              <a:cxn ang="0">
+                <a:pos x="connsiteX12" y="connsiteY12"/>
+              </a:cxn>
+              <a:cxn ang="0">
+                <a:pos x="connsiteX13" y="connsiteY13"/>
+              </a:cxn>
+              <a:cxn ang="0">
+                <a:pos x="connsiteX14" y="connsiteY14"/>
+              </a:cxn>
+              <a:cxn ang="0">
+                <a:pos x="connsiteX15" y="connsiteY15"/>
+              </a:cxn>
+            </a:cxnLst>
+            <a:rect l="l" t="t" r="r" b="b"/>
+            <a:pathLst>
+              <a:path w="7497880" h="5687344">
+                <a:moveTo>
+                  <a:pt x="3803282" y="0"/>
+                </a:moveTo>
+                <a:lnTo>
+                  <a:pt x="7497880" y="0"/>
+                </a:lnTo>
+                <a:lnTo>
+                  <a:pt x="7497880" y="4581885"/>
+                </a:lnTo>
+                <a:lnTo>
+                  <a:pt x="3803282" y="4581885"/>
+                </a:lnTo>
+                <a:close/>
+                <a:moveTo>
+                  <a:pt x="0" y="0"/>
+                </a:moveTo>
+                <a:lnTo>
+                  <a:pt x="3699373" y="0"/>
+                </a:lnTo>
+                <a:lnTo>
+                  <a:pt x="3699373" y="4581885"/>
+                </a:lnTo>
+                <a:lnTo>
+                  <a:pt x="2" y="4581885"/>
+                </a:lnTo>
+                <a:lnTo>
+                  <a:pt x="2" y="4679200"/>
+                </a:lnTo>
+                <a:lnTo>
+                  <a:pt x="3699373" y="4679200"/>
+                </a:lnTo>
+                <a:lnTo>
+                  <a:pt x="3699373" y="5679350"/>
+                </a:lnTo>
+                <a:lnTo>
+                  <a:pt x="3803282" y="5679350"/>
+                </a:lnTo>
+                <a:lnTo>
+                  <a:pt x="3803282" y="4679200"/>
+                </a:lnTo>
+                <a:lnTo>
+                  <a:pt x="7497880" y="4679200"/>
+                </a:lnTo>
+                <a:lnTo>
+                  <a:pt x="7497880" y="5687344"/>
+                </a:lnTo>
+                <a:lnTo>
+                  <a:pt x="0" y="5687344"/>
+                </a:lnTo>
+                <a:close/>
+              </a:path>
+            </a:pathLst>
+          </a:custGeom>
+          <a:solidFill>
+            <a:srgbClr val="E6C46D"/>
+          </a:solidFill>
         </p:spPr>
       </p:pic>
     </p:spTree>
@@ -11932,7 +13583,7 @@
         <p:spPr>
           <a:xfrm>
             <a:off x="597715" y="1764155"/>
-            <a:ext cx="4638410" cy="4154394"/>
+            <a:ext cx="3767606" cy="2557324"/>
           </a:xfrm>
           <a:prstGeom prst="rect">
             <a:avLst/>
@@ -11955,8 +13606,335 @@
         </p:nvSpPr>
         <p:spPr>
           <a:xfrm>
-            <a:off x="5646002" y="2541789"/>
-            <a:ext cx="5948283" cy="2909122"/>
+            <a:off x="197180" y="4565736"/>
+            <a:ext cx="5257905" cy="1741119"/>
+          </a:xfrm>
+          <a:prstGeom prst="rect">
+            <a:avLst/>
+          </a:prstGeom>
+          <a:noFill/>
+        </p:spPr>
+        <p:txBody>
+          <a:bodyPr>
+            <a:normAutofit fontScale="85000" lnSpcReduction="20000"/>
+          </a:bodyPr>
+          <a:lstStyle>
+            <a:lvl1pPr marL="306000" indent="-306000" algn="l" defTabSz="457200" rtl="0" eaLnBrk="1" latinLnBrk="0" hangingPunct="1">
+              <a:spcBef>
+                <a:spcPct val="20000"/>
+              </a:spcBef>
+              <a:spcAft>
+                <a:spcPts val="600"/>
+              </a:spcAft>
+              <a:buClr>
+                <a:schemeClr val="accent1"/>
+              </a:buClr>
+              <a:buSzPct val="92000"/>
+              <a:buFont typeface="Wingdings 2" panose="05020102010507070707" pitchFamily="18" charset="2"/>
+              <a:buChar char=""/>
+              <a:defRPr sz="1800" kern="1200">
+                <a:solidFill>
+                  <a:schemeClr val="tx1">
+                    <a:lumMod val="75000"/>
+                    <a:lumOff val="25000"/>
+                  </a:schemeClr>
+                </a:solidFill>
+                <a:latin typeface="+mn-lt"/>
+                <a:ea typeface="+mn-ea"/>
+                <a:cs typeface="+mn-cs"/>
+              </a:defRPr>
+            </a:lvl1pPr>
+            <a:lvl2pPr marL="630000" indent="-306000" algn="l" defTabSz="457200" rtl="0" eaLnBrk="1" latinLnBrk="0" hangingPunct="1">
+              <a:spcBef>
+                <a:spcPct val="20000"/>
+              </a:spcBef>
+              <a:spcAft>
+                <a:spcPts val="600"/>
+              </a:spcAft>
+              <a:buClr>
+                <a:schemeClr val="accent1"/>
+              </a:buClr>
+              <a:buSzPct val="92000"/>
+              <a:buFont typeface="Wingdings 2" panose="05020102010507070707" pitchFamily="18" charset="2"/>
+              <a:buChar char=""/>
+              <a:defRPr sz="1600" kern="1200">
+                <a:solidFill>
+                  <a:schemeClr val="tx1">
+                    <a:lumMod val="75000"/>
+                    <a:lumOff val="25000"/>
+                  </a:schemeClr>
+                </a:solidFill>
+                <a:latin typeface="+mn-lt"/>
+                <a:ea typeface="+mn-ea"/>
+                <a:cs typeface="+mn-cs"/>
+              </a:defRPr>
+            </a:lvl2pPr>
+            <a:lvl3pPr marL="900000" indent="-270000" algn="l" defTabSz="457200" rtl="0" eaLnBrk="1" latinLnBrk="0" hangingPunct="1">
+              <a:spcBef>
+                <a:spcPct val="20000"/>
+              </a:spcBef>
+              <a:spcAft>
+                <a:spcPts val="600"/>
+              </a:spcAft>
+              <a:buClr>
+                <a:schemeClr val="accent1"/>
+              </a:buClr>
+              <a:buSzPct val="92000"/>
+              <a:buFont typeface="Wingdings 2" panose="05020102010507070707" pitchFamily="18" charset="2"/>
+              <a:buChar char=""/>
+              <a:defRPr sz="1400" kern="1200">
+                <a:solidFill>
+                  <a:schemeClr val="tx1">
+                    <a:lumMod val="75000"/>
+                    <a:lumOff val="25000"/>
+                  </a:schemeClr>
+                </a:solidFill>
+                <a:latin typeface="+mn-lt"/>
+                <a:ea typeface="+mn-ea"/>
+                <a:cs typeface="+mn-cs"/>
+              </a:defRPr>
+            </a:lvl3pPr>
+            <a:lvl4pPr marL="1242000" indent="-234000" algn="l" defTabSz="457200" rtl="0" eaLnBrk="1" latinLnBrk="0" hangingPunct="1">
+              <a:spcBef>
+                <a:spcPct val="20000"/>
+              </a:spcBef>
+              <a:spcAft>
+                <a:spcPts val="600"/>
+              </a:spcAft>
+              <a:buClr>
+                <a:schemeClr val="accent1"/>
+              </a:buClr>
+              <a:buSzPct val="92000"/>
+              <a:buFont typeface="Wingdings 2" panose="05020102010507070707" pitchFamily="18" charset="2"/>
+              <a:buChar char=""/>
+              <a:defRPr sz="1200" kern="1200">
+                <a:solidFill>
+                  <a:schemeClr val="tx1">
+                    <a:lumMod val="75000"/>
+                    <a:lumOff val="25000"/>
+                  </a:schemeClr>
+                </a:solidFill>
+                <a:latin typeface="+mn-lt"/>
+                <a:ea typeface="+mn-ea"/>
+                <a:cs typeface="+mn-cs"/>
+              </a:defRPr>
+            </a:lvl4pPr>
+            <a:lvl5pPr marL="1602000" indent="-234000" algn="l" defTabSz="457200" rtl="0" eaLnBrk="1" latinLnBrk="0" hangingPunct="1">
+              <a:spcBef>
+                <a:spcPct val="20000"/>
+              </a:spcBef>
+              <a:spcAft>
+                <a:spcPts val="600"/>
+              </a:spcAft>
+              <a:buClr>
+                <a:schemeClr val="accent1"/>
+              </a:buClr>
+              <a:buSzPct val="92000"/>
+              <a:buFont typeface="Wingdings 2" panose="05020102010507070707" pitchFamily="18" charset="2"/>
+              <a:buChar char=""/>
+              <a:defRPr sz="1200" kern="1200">
+                <a:solidFill>
+                  <a:schemeClr val="tx1">
+                    <a:lumMod val="75000"/>
+                    <a:lumOff val="25000"/>
+                  </a:schemeClr>
+                </a:solidFill>
+                <a:latin typeface="+mn-lt"/>
+                <a:ea typeface="+mn-ea"/>
+                <a:cs typeface="+mn-cs"/>
+              </a:defRPr>
+            </a:lvl5pPr>
+            <a:lvl6pPr marL="1900000" indent="-228600" algn="l" defTabSz="457200" rtl="0" eaLnBrk="1" latinLnBrk="0" hangingPunct="1">
+              <a:spcBef>
+                <a:spcPct val="20000"/>
+              </a:spcBef>
+              <a:spcAft>
+                <a:spcPts val="600"/>
+              </a:spcAft>
+              <a:buClr>
+                <a:schemeClr val="accent2"/>
+              </a:buClr>
+              <a:buSzPct val="92000"/>
+              <a:buFont typeface="Wingdings 2" panose="05020102010507070707" pitchFamily="18" charset="2"/>
+              <a:buChar char=""/>
+              <a:defRPr sz="1200" kern="1200">
+                <a:solidFill>
+                  <a:schemeClr val="tx2"/>
+                </a:solidFill>
+                <a:latin typeface="+mn-lt"/>
+                <a:ea typeface="+mn-ea"/>
+                <a:cs typeface="+mn-cs"/>
+              </a:defRPr>
+            </a:lvl6pPr>
+            <a:lvl7pPr marL="2200000" indent="-228600" algn="l" defTabSz="457200" rtl="0" eaLnBrk="1" latinLnBrk="0" hangingPunct="1">
+              <a:spcBef>
+                <a:spcPct val="20000"/>
+              </a:spcBef>
+              <a:spcAft>
+                <a:spcPts val="600"/>
+              </a:spcAft>
+              <a:buClr>
+                <a:schemeClr val="accent2"/>
+              </a:buClr>
+              <a:buSzPct val="92000"/>
+              <a:buFont typeface="Wingdings 2" panose="05020102010507070707" pitchFamily="18" charset="2"/>
+              <a:buChar char=""/>
+              <a:defRPr sz="1200" kern="1200">
+                <a:solidFill>
+                  <a:schemeClr val="tx2"/>
+                </a:solidFill>
+                <a:latin typeface="+mn-lt"/>
+                <a:ea typeface="+mn-ea"/>
+                <a:cs typeface="+mn-cs"/>
+              </a:defRPr>
+            </a:lvl7pPr>
+            <a:lvl8pPr marL="2500000" indent="-228600" algn="l" defTabSz="457200" rtl="0" eaLnBrk="1" latinLnBrk="0" hangingPunct="1">
+              <a:spcBef>
+                <a:spcPct val="20000"/>
+              </a:spcBef>
+              <a:spcAft>
+                <a:spcPts val="600"/>
+              </a:spcAft>
+              <a:buClr>
+                <a:schemeClr val="accent2"/>
+              </a:buClr>
+              <a:buSzPct val="92000"/>
+              <a:buFont typeface="Wingdings 2" panose="05020102010507070707" pitchFamily="18" charset="2"/>
+              <a:buChar char=""/>
+              <a:defRPr sz="1200" kern="1200">
+                <a:solidFill>
+                  <a:schemeClr val="tx2"/>
+                </a:solidFill>
+                <a:latin typeface="+mn-lt"/>
+                <a:ea typeface="+mn-ea"/>
+                <a:cs typeface="+mn-cs"/>
+              </a:defRPr>
+            </a:lvl8pPr>
+            <a:lvl9pPr marL="2800000" indent="-228600" algn="l" defTabSz="457200" rtl="0" eaLnBrk="1" latinLnBrk="0" hangingPunct="1">
+              <a:spcBef>
+                <a:spcPct val="20000"/>
+              </a:spcBef>
+              <a:spcAft>
+                <a:spcPts val="600"/>
+              </a:spcAft>
+              <a:buClr>
+                <a:schemeClr val="accent2"/>
+              </a:buClr>
+              <a:buSzPct val="92000"/>
+              <a:buFont typeface="Wingdings 2" panose="05020102010507070707" pitchFamily="18" charset="2"/>
+              <a:buChar char=""/>
+              <a:defRPr sz="1200" kern="1200">
+                <a:solidFill>
+                  <a:schemeClr val="tx2"/>
+                </a:solidFill>
+                <a:latin typeface="+mn-lt"/>
+                <a:ea typeface="+mn-ea"/>
+                <a:cs typeface="+mn-cs"/>
+              </a:defRPr>
+            </a:lvl9pPr>
+          </a:lstStyle>
+          <a:p>
+            <a:pPr marL="285750" indent="-285750">
+              <a:buFont typeface="Arial" panose="020B0604020202020204" pitchFamily="34" charset="0"/>
+              <a:buChar char="•"/>
+            </a:pPr>
+            <a:r>
+              <a:rPr lang="en-US" dirty="0"/>
+              <a:t>The majority of MRI volumes are acquired in the Right Anterior Superior </a:t>
+            </a:r>
+            <a:r>
+              <a:rPr lang="en-US" b="1" dirty="0"/>
+              <a:t>(RAS) </a:t>
+            </a:r>
+            <a:r>
+              <a:rPr lang="en-US" dirty="0"/>
+              <a:t>orientation, for about the 60% out of the total</a:t>
+            </a:r>
+          </a:p>
+          <a:p>
+            <a:pPr marL="285750" indent="-285750">
+              <a:buFont typeface="Arial" panose="020B0604020202020204" pitchFamily="34" charset="0"/>
+              <a:buChar char="•"/>
+            </a:pPr>
+            <a:r>
+              <a:rPr lang="en-US" dirty="0"/>
+              <a:t>Nevertheless, a significative Left Anterior Superior </a:t>
+            </a:r>
+            <a:r>
+              <a:rPr lang="en-US" b="1" dirty="0"/>
+              <a:t>(LAS) </a:t>
+            </a:r>
+            <a:r>
+              <a:rPr lang="en-US" dirty="0"/>
+              <a:t>cluster of volumes (about 39%) is observed</a:t>
+            </a:r>
+          </a:p>
+          <a:p>
+            <a:pPr marL="285750" indent="-285750">
+              <a:buFont typeface="Arial" panose="020B0604020202020204" pitchFamily="34" charset="0"/>
+              <a:buChar char="•"/>
+            </a:pPr>
+            <a:r>
+              <a:rPr lang="en-US" dirty="0"/>
+              <a:t>Other orientation spaces are detected through extremely rare</a:t>
+            </a:r>
+          </a:p>
+          <a:p>
+            <a:pPr marL="324000" lvl="1" indent="0">
+              <a:buNone/>
+            </a:pPr>
+            <a:endParaRPr lang="en-US" dirty="0"/>
+          </a:p>
+        </p:txBody>
+      </p:sp>
+      <p:pic>
+        <p:nvPicPr>
+          <p:cNvPr id="18" name="Picture 17">
+            <a:extLst>
+              <a:ext uri="{FF2B5EF4-FFF2-40B4-BE49-F238E27FC236}">
+                <a16:creationId xmlns:a16="http://schemas.microsoft.com/office/drawing/2014/main" id="{C0DF507A-4F14-7015-A0C5-ADC371D81DC4}"/>
+              </a:ext>
+            </a:extLst>
+          </p:cNvPr>
+          <p:cNvPicPr>
+            <a:picLocks noChangeAspect="1"/>
+          </p:cNvPicPr>
+          <p:nvPr/>
+        </p:nvPicPr>
+        <p:blipFill>
+          <a:blip r:embed="rId4"/>
+          <a:stretch>
+            <a:fillRect/>
+          </a:stretch>
+        </p:blipFill>
+        <p:spPr>
+          <a:xfrm>
+            <a:off x="6095999" y="1421704"/>
+            <a:ext cx="4877680" cy="3206663"/>
+          </a:xfrm>
+          <a:prstGeom prst="rect">
+            <a:avLst/>
+          </a:prstGeom>
+        </p:spPr>
+      </p:pic>
+      <p:sp>
+        <p:nvSpPr>
+          <p:cNvPr id="21" name="Content Placeholder 3">
+            <a:extLst>
+              <a:ext uri="{FF2B5EF4-FFF2-40B4-BE49-F238E27FC236}">
+                <a16:creationId xmlns:a16="http://schemas.microsoft.com/office/drawing/2014/main" id="{3957BF73-1C74-41B9-9CD4-3B2839CADF2D}"/>
+              </a:ext>
+            </a:extLst>
+          </p:cNvPr>
+          <p:cNvSpPr txBox="1">
+            <a:spLocks/>
+          </p:cNvSpPr>
+          <p:nvPr/>
+        </p:nvSpPr>
+        <p:spPr>
+          <a:xfrm>
+            <a:off x="6100144" y="4565736"/>
+            <a:ext cx="5257905" cy="1939521"/>
           </a:xfrm>
           <a:prstGeom prst="rect">
             <a:avLst/>
@@ -12189,15 +14167,7 @@
             </a:pPr>
             <a:r>
               <a:rPr lang="en-US" dirty="0"/>
-              <a:t>The majority of MRI volumes are acquired in the Right Anterior Superior </a:t>
-            </a:r>
-            <a:r>
-              <a:rPr lang="en-US" b="1" dirty="0"/>
-              <a:t>(RAS) </a:t>
-            </a:r>
-            <a:r>
-              <a:rPr lang="en-US" dirty="0"/>
-              <a:t>orientation, for about the 60% out of the total</a:t>
+              <a:t>Voxel values are highly heterogeneous across volumes</a:t>
             </a:r>
           </a:p>
           <a:p>
@@ -12207,32 +14177,8 @@
             </a:pPr>
             <a:r>
               <a:rPr lang="en-US" dirty="0"/>
-              <a:t>Nevertheless, a significative Left Anterior Superior </a:t>
-            </a:r>
-            <a:r>
-              <a:rPr lang="en-US" b="1" dirty="0"/>
-              <a:t>(LAS) </a:t>
-            </a:r>
-            <a:r>
-              <a:rPr lang="en-US" dirty="0"/>
-              <a:t>cluster of volumes (about 39%) is observed</a:t>
-            </a:r>
-          </a:p>
-          <a:p>
-            <a:pPr marL="285750" indent="-285750">
-              <a:buFont typeface="Arial" panose="020B0604020202020204" pitchFamily="34" charset="0"/>
-              <a:buChar char="•"/>
-            </a:pPr>
-            <a:r>
-              <a:rPr lang="en-US" dirty="0"/>
-              <a:t>Other orientation spaces are detected through extremely rare</a:t>
-            </a:r>
-          </a:p>
-          <a:p>
-            <a:pPr marL="324000" lvl="1" indent="0">
-              <a:buNone/>
-            </a:pPr>
-            <a:endParaRPr lang="en-US" dirty="0"/>
+              <a:t>While most of the volumes have a mean intensity below 87, out of a third of them show values up to 20k (the graph above is truncated at 1000)</a:t>
+            </a:r>
           </a:p>
         </p:txBody>
       </p:sp>
@@ -12393,7 +14339,7 @@
         </p:spPr>
         <p:txBody>
           <a:bodyPr>
-            <a:normAutofit fontScale="92500" lnSpcReduction="10000"/>
+            <a:normAutofit fontScale="92500" lnSpcReduction="20000"/>
           </a:bodyPr>
           <a:lstStyle>
             <a:lvl1pPr marL="306000" indent="-306000" algn="l" defTabSz="457200" rtl="0" eaLnBrk="1" latinLnBrk="0" hangingPunct="1">
@@ -12627,7 +14573,15 @@
             </a:pPr>
             <a:r>
               <a:rPr lang="en-US" dirty="0"/>
-              <a:t>Even if the majority of volumes highlight a shape centered towards 188 x 256 x 256, heavy right tails up to 1008 voxels (Y and Z dim) are detected</a:t>
+              <a:t>Even if the majority of volumes highlight a shape centered towards 188 x 256 x 256, </a:t>
+            </a:r>
+            <a:r>
+              <a:rPr lang="en-US" b="1" dirty="0"/>
+              <a:t>heavy right tails</a:t>
+            </a:r>
+            <a:r>
+              <a:rPr lang="en-US" dirty="0"/>
+              <a:t> up to 1008 voxels (Y and Z dim) are detected</a:t>
             </a:r>
           </a:p>
           <a:p>
@@ -12897,8 +14851,12 @@
               <a:buChar char="•"/>
             </a:pPr>
             <a:r>
+              <a:rPr lang="en-US" b="1" dirty="0"/>
+              <a:t>Anisotropic</a:t>
+            </a:r>
+            <a:r>
               <a:rPr lang="en-US" dirty="0"/>
-              <a:t>Anisotropic resolutions are shown as well: extreme cases reveal voxel sizes up to 6 mm</a:t>
+              <a:t> resolutions are shown as well: extreme cases reveal voxel sizes up to 6 mm</a:t>
             </a:r>
           </a:p>
           <a:p>
@@ -12927,7 +14885,13 @@
   <p:cSld>
     <p:spTree>
       <p:nvGrpSpPr>
-        <p:cNvPr id="1" name=""/>
+        <p:cNvPr id="1" name="">
+          <a:extLst>
+            <a:ext uri="{FF2B5EF4-FFF2-40B4-BE49-F238E27FC236}">
+              <a16:creationId xmlns:a16="http://schemas.microsoft.com/office/drawing/2014/main" id="{25E1BC6A-F9EA-6B66-4579-12C27667A60F}"/>
+            </a:ext>
+          </a:extLst>
+        </p:cNvPr>
         <p:cNvGrpSpPr/>
         <p:nvPr/>
       </p:nvGrpSpPr>
@@ -12941,10 +14905,10 @@
       </p:grpSpPr>
       <p:sp>
         <p:nvSpPr>
-          <p:cNvPr id="2" name="Title 1">
+          <p:cNvPr id="31" name="Title 30">
             <a:extLst>
               <a:ext uri="{FF2B5EF4-FFF2-40B4-BE49-F238E27FC236}">
-                <a16:creationId xmlns:a16="http://schemas.microsoft.com/office/drawing/2014/main" id="{51866CF7-69F4-F432-4747-28EF15528DB9}"/>
+                <a16:creationId xmlns:a16="http://schemas.microsoft.com/office/drawing/2014/main" id="{7D84F1A4-3142-5A0A-213E-75DB142B9C5C}"/>
               </a:ext>
             </a:extLst>
           </p:cNvPr>
@@ -12952,53 +14916,203 @@
             <a:spLocks noGrp="1"/>
           </p:cNvSpPr>
           <p:nvPr>
-            <p:ph type="ctrTitle"/>
+            <p:ph type="title"/>
           </p:nvPr>
         </p:nvSpPr>
-        <p:spPr/>
+        <p:spPr>
+          <a:xfrm>
+            <a:off x="462150" y="1888272"/>
+            <a:ext cx="3672970" cy="2125911"/>
+          </a:xfrm>
+        </p:spPr>
         <p:txBody>
           <a:bodyPr/>
           <a:lstStyle/>
           <a:p>
+            <a:pPr algn="ctr"/>
             <a:r>
               <a:rPr lang="en-US" dirty="0"/>
-              <a:t>Overcoming nervousness</a:t>
-            </a:r>
-          </a:p>
-        </p:txBody>
-      </p:sp>
-      <p:sp>
-        <p:nvSpPr>
-          <p:cNvPr id="3" name="Subtitle 2">
+              <a:t>Project workflow</a:t>
+            </a:r>
+          </a:p>
+        </p:txBody>
+      </p:sp>
+      <p:pic>
+        <p:nvPicPr>
+          <p:cNvPr id="8" name="Picture Placeholder 7">
             <a:extLst>
               <a:ext uri="{FF2B5EF4-FFF2-40B4-BE49-F238E27FC236}">
-                <a16:creationId xmlns:a16="http://schemas.microsoft.com/office/drawing/2014/main" id="{44082E89-DB15-6D26-7098-DA9792B0B085}"/>
+                <a16:creationId xmlns:a16="http://schemas.microsoft.com/office/drawing/2014/main" id="{AFC9849E-731E-D411-0D76-A98355D67105}"/>
               </a:ext>
             </a:extLst>
           </p:cNvPr>
-          <p:cNvSpPr>
-            <a:spLocks noGrp="1"/>
-          </p:cNvSpPr>
+          <p:cNvPicPr>
+            <a:picLocks noGrp="1" noChangeAspect="1"/>
+          </p:cNvPicPr>
           <p:nvPr>
-            <p:ph type="subTitle" idx="1"/>
+            <p:ph type="pic" sz="quarter" idx="13"/>
           </p:nvPr>
-        </p:nvSpPr>
-        <p:spPr/>
-        <p:txBody>
-          <a:bodyPr/>
-          <a:lstStyle/>
-          <a:p>
-            <a:r>
-              <a:rPr lang="en-US" dirty="0"/>
-              <a:t>Confidence-building strategies</a:t>
-            </a:r>
-          </a:p>
-        </p:txBody>
-      </p:sp>
+        </p:nvPicPr>
+        <p:blipFill>
+          <a:blip r:embed="rId3"/>
+          <a:srcRect l="6081" r="6081"/>
+          <a:stretch>
+            <a:fillRect/>
+          </a:stretch>
+        </p:blipFill>
+        <p:spPr>
+          <a:custGeom>
+            <a:avLst/>
+            <a:gdLst>
+              <a:gd name="connsiteX0" fmla="*/ 3803282 w 7497880"/>
+              <a:gd name="connsiteY0" fmla="*/ 0 h 5687344"/>
+              <a:gd name="connsiteX1" fmla="*/ 7497880 w 7497880"/>
+              <a:gd name="connsiteY1" fmla="*/ 0 h 5687344"/>
+              <a:gd name="connsiteX2" fmla="*/ 7497880 w 7497880"/>
+              <a:gd name="connsiteY2" fmla="*/ 4581885 h 5687344"/>
+              <a:gd name="connsiteX3" fmla="*/ 3803282 w 7497880"/>
+              <a:gd name="connsiteY3" fmla="*/ 4581885 h 5687344"/>
+              <a:gd name="connsiteX4" fmla="*/ 0 w 7497880"/>
+              <a:gd name="connsiteY4" fmla="*/ 0 h 5687344"/>
+              <a:gd name="connsiteX5" fmla="*/ 3699373 w 7497880"/>
+              <a:gd name="connsiteY5" fmla="*/ 0 h 5687344"/>
+              <a:gd name="connsiteX6" fmla="*/ 3699373 w 7497880"/>
+              <a:gd name="connsiteY6" fmla="*/ 4581885 h 5687344"/>
+              <a:gd name="connsiteX7" fmla="*/ 2 w 7497880"/>
+              <a:gd name="connsiteY7" fmla="*/ 4581885 h 5687344"/>
+              <a:gd name="connsiteX8" fmla="*/ 2 w 7497880"/>
+              <a:gd name="connsiteY8" fmla="*/ 4679200 h 5687344"/>
+              <a:gd name="connsiteX9" fmla="*/ 3699373 w 7497880"/>
+              <a:gd name="connsiteY9" fmla="*/ 4679200 h 5687344"/>
+              <a:gd name="connsiteX10" fmla="*/ 3699373 w 7497880"/>
+              <a:gd name="connsiteY10" fmla="*/ 5679350 h 5687344"/>
+              <a:gd name="connsiteX11" fmla="*/ 3803282 w 7497880"/>
+              <a:gd name="connsiteY11" fmla="*/ 5679350 h 5687344"/>
+              <a:gd name="connsiteX12" fmla="*/ 3803282 w 7497880"/>
+              <a:gd name="connsiteY12" fmla="*/ 4679200 h 5687344"/>
+              <a:gd name="connsiteX13" fmla="*/ 7497880 w 7497880"/>
+              <a:gd name="connsiteY13" fmla="*/ 4679200 h 5687344"/>
+              <a:gd name="connsiteX14" fmla="*/ 7497880 w 7497880"/>
+              <a:gd name="connsiteY14" fmla="*/ 5687344 h 5687344"/>
+              <a:gd name="connsiteX15" fmla="*/ 0 w 7497880"/>
+              <a:gd name="connsiteY15" fmla="*/ 5687344 h 5687344"/>
+            </a:gdLst>
+            <a:ahLst/>
+            <a:cxnLst>
+              <a:cxn ang="0">
+                <a:pos x="connsiteX0" y="connsiteY0"/>
+              </a:cxn>
+              <a:cxn ang="0">
+                <a:pos x="connsiteX1" y="connsiteY1"/>
+              </a:cxn>
+              <a:cxn ang="0">
+                <a:pos x="connsiteX2" y="connsiteY2"/>
+              </a:cxn>
+              <a:cxn ang="0">
+                <a:pos x="connsiteX3" y="connsiteY3"/>
+              </a:cxn>
+              <a:cxn ang="0">
+                <a:pos x="connsiteX4" y="connsiteY4"/>
+              </a:cxn>
+              <a:cxn ang="0">
+                <a:pos x="connsiteX5" y="connsiteY5"/>
+              </a:cxn>
+              <a:cxn ang="0">
+                <a:pos x="connsiteX6" y="connsiteY6"/>
+              </a:cxn>
+              <a:cxn ang="0">
+                <a:pos x="connsiteX7" y="connsiteY7"/>
+              </a:cxn>
+              <a:cxn ang="0">
+                <a:pos x="connsiteX8" y="connsiteY8"/>
+              </a:cxn>
+              <a:cxn ang="0">
+                <a:pos x="connsiteX9" y="connsiteY9"/>
+              </a:cxn>
+              <a:cxn ang="0">
+                <a:pos x="connsiteX10" y="connsiteY10"/>
+              </a:cxn>
+              <a:cxn ang="0">
+                <a:pos x="connsiteX11" y="connsiteY11"/>
+              </a:cxn>
+              <a:cxn ang="0">
+                <a:pos x="connsiteX12" y="connsiteY12"/>
+              </a:cxn>
+              <a:cxn ang="0">
+                <a:pos x="connsiteX13" y="connsiteY13"/>
+              </a:cxn>
+              <a:cxn ang="0">
+                <a:pos x="connsiteX14" y="connsiteY14"/>
+              </a:cxn>
+              <a:cxn ang="0">
+                <a:pos x="connsiteX15" y="connsiteY15"/>
+              </a:cxn>
+            </a:cxnLst>
+            <a:rect l="l" t="t" r="r" b="b"/>
+            <a:pathLst>
+              <a:path w="7497880" h="5687344">
+                <a:moveTo>
+                  <a:pt x="3803282" y="0"/>
+                </a:moveTo>
+                <a:lnTo>
+                  <a:pt x="7497880" y="0"/>
+                </a:lnTo>
+                <a:lnTo>
+                  <a:pt x="7497880" y="4581885"/>
+                </a:lnTo>
+                <a:lnTo>
+                  <a:pt x="3803282" y="4581885"/>
+                </a:lnTo>
+                <a:close/>
+                <a:moveTo>
+                  <a:pt x="0" y="0"/>
+                </a:moveTo>
+                <a:lnTo>
+                  <a:pt x="3699373" y="0"/>
+                </a:lnTo>
+                <a:lnTo>
+                  <a:pt x="3699373" y="4581885"/>
+                </a:lnTo>
+                <a:lnTo>
+                  <a:pt x="2" y="4581885"/>
+                </a:lnTo>
+                <a:lnTo>
+                  <a:pt x="2" y="4679200"/>
+                </a:lnTo>
+                <a:lnTo>
+                  <a:pt x="3699373" y="4679200"/>
+                </a:lnTo>
+                <a:lnTo>
+                  <a:pt x="3699373" y="5679350"/>
+                </a:lnTo>
+                <a:lnTo>
+                  <a:pt x="3803282" y="5679350"/>
+                </a:lnTo>
+                <a:lnTo>
+                  <a:pt x="3803282" y="4679200"/>
+                </a:lnTo>
+                <a:lnTo>
+                  <a:pt x="7497880" y="4679200"/>
+                </a:lnTo>
+                <a:lnTo>
+                  <a:pt x="7497880" y="5687344"/>
+                </a:lnTo>
+                <a:lnTo>
+                  <a:pt x="0" y="5687344"/>
+                </a:lnTo>
+                <a:close/>
+              </a:path>
+            </a:pathLst>
+          </a:custGeom>
+          <a:solidFill>
+            <a:srgbClr val="E6C46D"/>
+          </a:solidFill>
+        </p:spPr>
+      </p:pic>
     </p:spTree>
     <p:extLst>
       <p:ext uri="{BB962C8B-B14F-4D97-AF65-F5344CB8AC3E}">
-        <p14:creationId xmlns:p14="http://schemas.microsoft.com/office/powerpoint/2010/main" val="1605306264"/>
+        <p14:creationId xmlns:p14="http://schemas.microsoft.com/office/powerpoint/2010/main" val="4049152739"/>
       </p:ext>
     </p:extLst>
   </p:cSld>
@@ -13027,10 +15141,858 @@
       </p:grpSpPr>
       <p:sp>
         <p:nvSpPr>
-          <p:cNvPr id="19" name="Title 1">
+          <p:cNvPr id="29" name="Rectangle 28">
             <a:extLst>
               <a:ext uri="{FF2B5EF4-FFF2-40B4-BE49-F238E27FC236}">
-                <a16:creationId xmlns:a16="http://schemas.microsoft.com/office/drawing/2014/main" id="{C903843E-1FAB-AFBB-BDC9-440FCC8CFB12}"/>
+                <a16:creationId xmlns:a16="http://schemas.microsoft.com/office/drawing/2014/main" id="{8017D95E-53A8-299D-E729-14266734C7D3}"/>
+              </a:ext>
+            </a:extLst>
+          </p:cNvPr>
+          <p:cNvSpPr/>
+          <p:nvPr/>
+        </p:nvSpPr>
+        <p:spPr>
+          <a:xfrm>
+            <a:off x="8385096" y="3590829"/>
+            <a:ext cx="1480344" cy="2571750"/>
+          </a:xfrm>
+          <a:prstGeom prst="rect">
+            <a:avLst/>
+          </a:prstGeom>
+          <a:solidFill>
+            <a:schemeClr val="bg1">
+              <a:lumMod val="95000"/>
+            </a:schemeClr>
+          </a:solidFill>
+          <a:ln>
+            <a:noFill/>
+          </a:ln>
+        </p:spPr>
+        <p:style>
+          <a:lnRef idx="2">
+            <a:schemeClr val="accent1">
+              <a:shade val="15000"/>
+            </a:schemeClr>
+          </a:lnRef>
+          <a:fillRef idx="1">
+            <a:schemeClr val="accent1"/>
+          </a:fillRef>
+          <a:effectRef idx="0">
+            <a:schemeClr val="accent1"/>
+          </a:effectRef>
+          <a:fontRef idx="minor">
+            <a:schemeClr val="lt1"/>
+          </a:fontRef>
+        </p:style>
+        <p:txBody>
+          <a:bodyPr rtlCol="0" anchor="ctr"/>
+          <a:lstStyle/>
+          <a:p>
+            <a:r>
+              <a:rPr lang="en-US" sz="1400" dirty="0">
+                <a:solidFill>
+                  <a:schemeClr val="bg2">
+                    <a:lumMod val="50000"/>
+                  </a:schemeClr>
+                </a:solidFill>
+              </a:rPr>
+              <a:t>Voxel values across volumes are transformed into </a:t>
+            </a:r>
+            <a:r>
+              <a:rPr lang="en-US" sz="1400" b="1" dirty="0">
+                <a:solidFill>
+                  <a:schemeClr val="bg2">
+                    <a:lumMod val="50000"/>
+                  </a:schemeClr>
+                </a:solidFill>
+              </a:rPr>
+              <a:t>z-scores</a:t>
+            </a:r>
+          </a:p>
+        </p:txBody>
+      </p:sp>
+      <p:sp>
+        <p:nvSpPr>
+          <p:cNvPr id="27" name="Rectangle 26">
+            <a:extLst>
+              <a:ext uri="{FF2B5EF4-FFF2-40B4-BE49-F238E27FC236}">
+                <a16:creationId xmlns:a16="http://schemas.microsoft.com/office/drawing/2014/main" id="{98A125D1-AF3A-0DC1-2A54-59EB066AC4CD}"/>
+              </a:ext>
+            </a:extLst>
+          </p:cNvPr>
+          <p:cNvSpPr/>
+          <p:nvPr/>
+        </p:nvSpPr>
+        <p:spPr>
+          <a:xfrm>
+            <a:off x="6643286" y="3590829"/>
+            <a:ext cx="1480344" cy="2571750"/>
+          </a:xfrm>
+          <a:prstGeom prst="rect">
+            <a:avLst/>
+          </a:prstGeom>
+          <a:solidFill>
+            <a:schemeClr val="bg1">
+              <a:lumMod val="95000"/>
+            </a:schemeClr>
+          </a:solidFill>
+          <a:ln>
+            <a:noFill/>
+          </a:ln>
+        </p:spPr>
+        <p:style>
+          <a:lnRef idx="2">
+            <a:schemeClr val="accent1">
+              <a:shade val="15000"/>
+            </a:schemeClr>
+          </a:lnRef>
+          <a:fillRef idx="1">
+            <a:schemeClr val="accent1"/>
+          </a:fillRef>
+          <a:effectRef idx="0">
+            <a:schemeClr val="accent1"/>
+          </a:effectRef>
+          <a:fontRef idx="minor">
+            <a:schemeClr val="lt1"/>
+          </a:fontRef>
+        </p:style>
+        <p:txBody>
+          <a:bodyPr rtlCol="0" anchor="ctr"/>
+          <a:lstStyle/>
+          <a:p>
+            <a:r>
+              <a:rPr lang="en-US" sz="1400" b="1" dirty="0">
+                <a:solidFill>
+                  <a:schemeClr val="bg2">
+                    <a:lumMod val="50000"/>
+                  </a:schemeClr>
+                </a:solidFill>
+              </a:rPr>
+              <a:t>Unnecessary background </a:t>
+            </a:r>
+            <a:r>
+              <a:rPr lang="en-US" sz="1400" dirty="0">
+                <a:solidFill>
+                  <a:schemeClr val="bg2">
+                    <a:lumMod val="50000"/>
+                  </a:schemeClr>
+                </a:solidFill>
+              </a:rPr>
+              <a:t>is removed to preserve anatomical context (max margin = 10 voxels)</a:t>
+            </a:r>
+          </a:p>
+        </p:txBody>
+      </p:sp>
+      <p:sp>
+        <p:nvSpPr>
+          <p:cNvPr id="25" name="Rectangle 24">
+            <a:extLst>
+              <a:ext uri="{FF2B5EF4-FFF2-40B4-BE49-F238E27FC236}">
+                <a16:creationId xmlns:a16="http://schemas.microsoft.com/office/drawing/2014/main" id="{575D5292-915F-A885-9527-EE9733AF1CB5}"/>
+              </a:ext>
+            </a:extLst>
+          </p:cNvPr>
+          <p:cNvSpPr/>
+          <p:nvPr/>
+        </p:nvSpPr>
+        <p:spPr>
+          <a:xfrm>
+            <a:off x="4961838" y="3590829"/>
+            <a:ext cx="1428750" cy="2571750"/>
+          </a:xfrm>
+          <a:prstGeom prst="rect">
+            <a:avLst/>
+          </a:prstGeom>
+          <a:solidFill>
+            <a:schemeClr val="bg1">
+              <a:lumMod val="95000"/>
+            </a:schemeClr>
+          </a:solidFill>
+          <a:ln>
+            <a:noFill/>
+          </a:ln>
+        </p:spPr>
+        <p:style>
+          <a:lnRef idx="2">
+            <a:schemeClr val="accent1">
+              <a:shade val="15000"/>
+            </a:schemeClr>
+          </a:lnRef>
+          <a:fillRef idx="1">
+            <a:schemeClr val="accent1"/>
+          </a:fillRef>
+          <a:effectRef idx="0">
+            <a:schemeClr val="accent1"/>
+          </a:effectRef>
+          <a:fontRef idx="minor">
+            <a:schemeClr val="lt1"/>
+          </a:fontRef>
+        </p:style>
+        <p:txBody>
+          <a:bodyPr rtlCol="0" anchor="ctr"/>
+          <a:lstStyle/>
+          <a:p>
+            <a:r>
+              <a:rPr lang="en-US" sz="1400" dirty="0">
+                <a:solidFill>
+                  <a:schemeClr val="bg2">
+                    <a:lumMod val="50000"/>
+                  </a:schemeClr>
+                </a:solidFill>
+              </a:rPr>
+              <a:t>Volumes are resampled to a homogeneous </a:t>
+            </a:r>
+            <a:r>
+              <a:rPr lang="en-US" sz="1400" b="1" dirty="0">
+                <a:solidFill>
+                  <a:schemeClr val="bg2">
+                    <a:lumMod val="50000"/>
+                  </a:schemeClr>
+                </a:solidFill>
+              </a:rPr>
+              <a:t>voxel space of 1mm </a:t>
+            </a:r>
+            <a:r>
+              <a:rPr lang="en-US" sz="1400" dirty="0">
+                <a:solidFill>
+                  <a:schemeClr val="bg2">
+                    <a:lumMod val="50000"/>
+                  </a:schemeClr>
+                </a:solidFill>
+              </a:rPr>
+              <a:t>per dimension</a:t>
+            </a:r>
+          </a:p>
+        </p:txBody>
+      </p:sp>
+      <p:sp>
+        <p:nvSpPr>
+          <p:cNvPr id="23" name="Rectangle 22">
+            <a:extLst>
+              <a:ext uri="{FF2B5EF4-FFF2-40B4-BE49-F238E27FC236}">
+                <a16:creationId xmlns:a16="http://schemas.microsoft.com/office/drawing/2014/main" id="{4FA8B95F-928C-2B36-BEF9-6FDE297BF3E3}"/>
+              </a:ext>
+            </a:extLst>
+          </p:cNvPr>
+          <p:cNvSpPr/>
+          <p:nvPr/>
+        </p:nvSpPr>
+        <p:spPr>
+          <a:xfrm>
+            <a:off x="3258165" y="3590829"/>
+            <a:ext cx="1450975" cy="2571750"/>
+          </a:xfrm>
+          <a:prstGeom prst="rect">
+            <a:avLst/>
+          </a:prstGeom>
+          <a:solidFill>
+            <a:schemeClr val="bg1">
+              <a:lumMod val="95000"/>
+            </a:schemeClr>
+          </a:solidFill>
+          <a:ln>
+            <a:noFill/>
+          </a:ln>
+        </p:spPr>
+        <p:style>
+          <a:lnRef idx="2">
+            <a:schemeClr val="accent1">
+              <a:shade val="15000"/>
+            </a:schemeClr>
+          </a:lnRef>
+          <a:fillRef idx="1">
+            <a:schemeClr val="accent1"/>
+          </a:fillRef>
+          <a:effectRef idx="0">
+            <a:schemeClr val="accent1"/>
+          </a:effectRef>
+          <a:fontRef idx="minor">
+            <a:schemeClr val="lt1"/>
+          </a:fontRef>
+        </p:style>
+        <p:txBody>
+          <a:bodyPr rtlCol="0" anchor="ctr"/>
+          <a:lstStyle/>
+          <a:p>
+            <a:r>
+              <a:rPr lang="en-US" sz="1400" dirty="0">
+                <a:solidFill>
+                  <a:schemeClr val="bg2">
+                    <a:lumMod val="50000"/>
+                  </a:schemeClr>
+                </a:solidFill>
+              </a:rPr>
+              <a:t>All brain volumes are aligned to </a:t>
+            </a:r>
+            <a:r>
+              <a:rPr lang="en-US" sz="1400" b="1" dirty="0">
+                <a:solidFill>
+                  <a:schemeClr val="bg2">
+                    <a:lumMod val="50000"/>
+                  </a:schemeClr>
+                </a:solidFill>
+              </a:rPr>
+              <a:t>RAS</a:t>
+            </a:r>
+            <a:r>
+              <a:rPr lang="en-US" sz="1400" dirty="0">
+                <a:solidFill>
+                  <a:schemeClr val="bg2">
+                    <a:lumMod val="50000"/>
+                  </a:schemeClr>
+                </a:solidFill>
+              </a:rPr>
+              <a:t> orientation space</a:t>
+            </a:r>
+          </a:p>
+        </p:txBody>
+      </p:sp>
+      <p:sp>
+        <p:nvSpPr>
+          <p:cNvPr id="21" name="Rectangle 20">
+            <a:extLst>
+              <a:ext uri="{FF2B5EF4-FFF2-40B4-BE49-F238E27FC236}">
+                <a16:creationId xmlns:a16="http://schemas.microsoft.com/office/drawing/2014/main" id="{6F9592E0-D1E3-40A8-B398-4022F5F3C83E}"/>
+              </a:ext>
+            </a:extLst>
+          </p:cNvPr>
+          <p:cNvSpPr/>
+          <p:nvPr/>
+        </p:nvSpPr>
+        <p:spPr>
+          <a:xfrm>
+            <a:off x="1648617" y="3590829"/>
+            <a:ext cx="1450975" cy="2571750"/>
+          </a:xfrm>
+          <a:prstGeom prst="rect">
+            <a:avLst/>
+          </a:prstGeom>
+          <a:solidFill>
+            <a:schemeClr val="bg1">
+              <a:lumMod val="95000"/>
+            </a:schemeClr>
+          </a:solidFill>
+          <a:ln>
+            <a:noFill/>
+          </a:ln>
+        </p:spPr>
+        <p:style>
+          <a:lnRef idx="2">
+            <a:schemeClr val="accent1">
+              <a:shade val="15000"/>
+            </a:schemeClr>
+          </a:lnRef>
+          <a:fillRef idx="1">
+            <a:schemeClr val="accent1"/>
+          </a:fillRef>
+          <a:effectRef idx="0">
+            <a:schemeClr val="accent1"/>
+          </a:effectRef>
+          <a:fontRef idx="minor">
+            <a:schemeClr val="lt1"/>
+          </a:fontRef>
+        </p:style>
+        <p:txBody>
+          <a:bodyPr rtlCol="0" anchor="ctr"/>
+          <a:lstStyle/>
+          <a:p>
+            <a:r>
+              <a:rPr lang="en-US" sz="1400" dirty="0">
+                <a:solidFill>
+                  <a:schemeClr val="bg2">
+                    <a:lumMod val="50000"/>
+                  </a:schemeClr>
+                </a:solidFill>
+              </a:rPr>
+              <a:t>Volumes with max/min </a:t>
+            </a:r>
+            <a:r>
+              <a:rPr lang="en-US" sz="1400" b="1" dirty="0">
+                <a:solidFill>
+                  <a:schemeClr val="bg2">
+                    <a:lumMod val="50000"/>
+                  </a:schemeClr>
+                </a:solidFill>
+              </a:rPr>
+              <a:t>zoom ratio greater than 1.5 </a:t>
+            </a:r>
+            <a:r>
+              <a:rPr lang="en-US" sz="1400" dirty="0">
+                <a:solidFill>
+                  <a:schemeClr val="bg2">
+                    <a:lumMod val="50000"/>
+                  </a:schemeClr>
+                </a:solidFill>
+              </a:rPr>
+              <a:t>are considered as anisotropic</a:t>
+            </a:r>
+          </a:p>
+          <a:p>
+            <a:endParaRPr lang="en-US" sz="1400" dirty="0">
+              <a:solidFill>
+                <a:schemeClr val="bg2">
+                  <a:lumMod val="50000"/>
+                </a:schemeClr>
+              </a:solidFill>
+            </a:endParaRPr>
+          </a:p>
+          <a:p>
+            <a:r>
+              <a:rPr lang="en-US" sz="1400" dirty="0">
+                <a:solidFill>
+                  <a:schemeClr val="bg2">
+                    <a:lumMod val="50000"/>
+                  </a:schemeClr>
+                </a:solidFill>
+              </a:rPr>
+              <a:t>136 out of 1453 are discarded </a:t>
+            </a:r>
+          </a:p>
+        </p:txBody>
+      </p:sp>
+      <p:sp>
+        <p:nvSpPr>
+          <p:cNvPr id="41" name="Rectangle: Rounded Corners 40">
+            <a:extLst>
+              <a:ext uri="{FF2B5EF4-FFF2-40B4-BE49-F238E27FC236}">
+                <a16:creationId xmlns:a16="http://schemas.microsoft.com/office/drawing/2014/main" id="{D0862EDC-79D3-89ED-38EC-958E05D5628F}"/>
+              </a:ext>
+            </a:extLst>
+          </p:cNvPr>
+          <p:cNvSpPr/>
+          <p:nvPr/>
+        </p:nvSpPr>
+        <p:spPr>
+          <a:xfrm>
+            <a:off x="1612900" y="2536824"/>
+            <a:ext cx="8492331" cy="1228433"/>
+          </a:xfrm>
+          <a:prstGeom prst="roundRect">
+            <a:avLst/>
+          </a:prstGeom>
+          <a:solidFill>
+            <a:srgbClr val="CCCCFF"/>
+          </a:solidFill>
+          <a:ln>
+            <a:noFill/>
+          </a:ln>
+        </p:spPr>
+        <p:style>
+          <a:lnRef idx="2">
+            <a:schemeClr val="accent1">
+              <a:shade val="15000"/>
+            </a:schemeClr>
+          </a:lnRef>
+          <a:fillRef idx="1">
+            <a:schemeClr val="accent1"/>
+          </a:fillRef>
+          <a:effectRef idx="0">
+            <a:schemeClr val="accent1"/>
+          </a:effectRef>
+          <a:fontRef idx="minor">
+            <a:schemeClr val="lt1"/>
+          </a:fontRef>
+        </p:style>
+        <p:txBody>
+          <a:bodyPr rtlCol="0" anchor="ctr"/>
+          <a:lstStyle/>
+          <a:p>
+            <a:pPr algn="ctr"/>
+            <a:endParaRPr lang="en-US"/>
+          </a:p>
+        </p:txBody>
+      </p:sp>
+      <p:sp>
+        <p:nvSpPr>
+          <p:cNvPr id="4" name="Parallelogram 3">
+            <a:extLst>
+              <a:ext uri="{FF2B5EF4-FFF2-40B4-BE49-F238E27FC236}">
+                <a16:creationId xmlns:a16="http://schemas.microsoft.com/office/drawing/2014/main" id="{1A3F7FDC-3571-A500-0D16-BE574968AE08}"/>
+              </a:ext>
+            </a:extLst>
+          </p:cNvPr>
+          <p:cNvSpPr/>
+          <p:nvPr/>
+        </p:nvSpPr>
+        <p:spPr>
+          <a:xfrm>
+            <a:off x="1679673" y="2762250"/>
+            <a:ext cx="1428750" cy="762000"/>
+          </a:xfrm>
+          <a:prstGeom prst="parallelogram">
+            <a:avLst/>
+          </a:prstGeom>
+          <a:solidFill>
+            <a:srgbClr val="00B0F0"/>
+          </a:solidFill>
+          <a:ln>
+            <a:noFill/>
+          </a:ln>
+        </p:spPr>
+        <p:style>
+          <a:lnRef idx="1">
+            <a:schemeClr val="accent5"/>
+          </a:lnRef>
+          <a:fillRef idx="3">
+            <a:schemeClr val="accent5"/>
+          </a:fillRef>
+          <a:effectRef idx="2">
+            <a:schemeClr val="accent5"/>
+          </a:effectRef>
+          <a:fontRef idx="minor">
+            <a:schemeClr val="lt1"/>
+          </a:fontRef>
+        </p:style>
+        <p:txBody>
+          <a:bodyPr rtlCol="0" anchor="ctr"/>
+          <a:lstStyle/>
+          <a:p>
+            <a:pPr algn="ctr"/>
+            <a:r>
+              <a:rPr lang="en-US" dirty="0"/>
+              <a:t>Dataset cleaning</a:t>
+            </a:r>
+          </a:p>
+        </p:txBody>
+      </p:sp>
+      <p:sp>
+        <p:nvSpPr>
+          <p:cNvPr id="9" name="Parallelogram 8">
+            <a:extLst>
+              <a:ext uri="{FF2B5EF4-FFF2-40B4-BE49-F238E27FC236}">
+                <a16:creationId xmlns:a16="http://schemas.microsoft.com/office/drawing/2014/main" id="{1F139D3F-3215-FD9E-9BC7-87F62C5A1CFB}"/>
+              </a:ext>
+            </a:extLst>
+          </p:cNvPr>
+          <p:cNvSpPr/>
+          <p:nvPr/>
+        </p:nvSpPr>
+        <p:spPr>
+          <a:xfrm>
+            <a:off x="3320755" y="2762250"/>
+            <a:ext cx="1428750" cy="762000"/>
+          </a:xfrm>
+          <a:prstGeom prst="parallelogram">
+            <a:avLst/>
+          </a:prstGeom>
+          <a:solidFill>
+            <a:srgbClr val="00B0F0"/>
+          </a:solidFill>
+          <a:ln>
+            <a:noFill/>
+          </a:ln>
+        </p:spPr>
+        <p:style>
+          <a:lnRef idx="1">
+            <a:schemeClr val="accent5"/>
+          </a:lnRef>
+          <a:fillRef idx="3">
+            <a:schemeClr val="accent5"/>
+          </a:fillRef>
+          <a:effectRef idx="2">
+            <a:schemeClr val="accent5"/>
+          </a:effectRef>
+          <a:fontRef idx="minor">
+            <a:schemeClr val="lt1"/>
+          </a:fontRef>
+        </p:style>
+        <p:txBody>
+          <a:bodyPr rtlCol="0" anchor="ctr"/>
+          <a:lstStyle/>
+          <a:p>
+            <a:pPr algn="ctr"/>
+            <a:r>
+              <a:rPr lang="en-US" sz="1200" dirty="0"/>
+              <a:t>Orientation space normalization</a:t>
+            </a:r>
+          </a:p>
+        </p:txBody>
+      </p:sp>
+      <p:sp>
+        <p:nvSpPr>
+          <p:cNvPr id="11" name="Parallelogram 10">
+            <a:extLst>
+              <a:ext uri="{FF2B5EF4-FFF2-40B4-BE49-F238E27FC236}">
+                <a16:creationId xmlns:a16="http://schemas.microsoft.com/office/drawing/2014/main" id="{9FD8CA88-F530-E2B9-F9C6-47520599A9D4}"/>
+              </a:ext>
+            </a:extLst>
+          </p:cNvPr>
+          <p:cNvSpPr/>
+          <p:nvPr/>
+        </p:nvSpPr>
+        <p:spPr>
+          <a:xfrm>
+            <a:off x="4961838" y="2762250"/>
+            <a:ext cx="1428750" cy="762000"/>
+          </a:xfrm>
+          <a:prstGeom prst="parallelogram">
+            <a:avLst/>
+          </a:prstGeom>
+          <a:solidFill>
+            <a:srgbClr val="00B0F0"/>
+          </a:solidFill>
+          <a:ln>
+            <a:noFill/>
+          </a:ln>
+        </p:spPr>
+        <p:style>
+          <a:lnRef idx="1">
+            <a:schemeClr val="accent5"/>
+          </a:lnRef>
+          <a:fillRef idx="3">
+            <a:schemeClr val="accent5"/>
+          </a:fillRef>
+          <a:effectRef idx="2">
+            <a:schemeClr val="accent5"/>
+          </a:effectRef>
+          <a:fontRef idx="minor">
+            <a:schemeClr val="lt1"/>
+          </a:fontRef>
+        </p:style>
+        <p:txBody>
+          <a:bodyPr rtlCol="0" anchor="ctr"/>
+          <a:lstStyle/>
+          <a:p>
+            <a:pPr algn="ctr"/>
+            <a:r>
+              <a:rPr lang="en-US" sz="1200" dirty="0"/>
+              <a:t>Pixel space normalization</a:t>
+            </a:r>
+          </a:p>
+        </p:txBody>
+      </p:sp>
+      <p:sp>
+        <p:nvSpPr>
+          <p:cNvPr id="13" name="Parallelogram 12">
+            <a:extLst>
+              <a:ext uri="{FF2B5EF4-FFF2-40B4-BE49-F238E27FC236}">
+                <a16:creationId xmlns:a16="http://schemas.microsoft.com/office/drawing/2014/main" id="{91F84383-0B59-E108-0A17-CA167B2A5569}"/>
+              </a:ext>
+            </a:extLst>
+          </p:cNvPr>
+          <p:cNvSpPr/>
+          <p:nvPr/>
+        </p:nvSpPr>
+        <p:spPr>
+          <a:xfrm>
+            <a:off x="6673467" y="2755781"/>
+            <a:ext cx="1428750" cy="762000"/>
+          </a:xfrm>
+          <a:prstGeom prst="parallelogram">
+            <a:avLst/>
+          </a:prstGeom>
+          <a:solidFill>
+            <a:srgbClr val="00B0F0"/>
+          </a:solidFill>
+          <a:ln>
+            <a:noFill/>
+          </a:ln>
+        </p:spPr>
+        <p:style>
+          <a:lnRef idx="1">
+            <a:schemeClr val="accent5"/>
+          </a:lnRef>
+          <a:fillRef idx="3">
+            <a:schemeClr val="accent5"/>
+          </a:fillRef>
+          <a:effectRef idx="2">
+            <a:schemeClr val="accent5"/>
+          </a:effectRef>
+          <a:fontRef idx="minor">
+            <a:schemeClr val="lt1"/>
+          </a:fontRef>
+        </p:style>
+        <p:txBody>
+          <a:bodyPr rtlCol="0" anchor="ctr"/>
+          <a:lstStyle/>
+          <a:p>
+            <a:pPr algn="ctr"/>
+            <a:r>
+              <a:rPr lang="en-US" sz="1400" dirty="0"/>
+              <a:t>Foreground cropping</a:t>
+            </a:r>
+          </a:p>
+        </p:txBody>
+      </p:sp>
+      <p:sp>
+        <p:nvSpPr>
+          <p:cNvPr id="15" name="Parallelogram 14">
+            <a:extLst>
+              <a:ext uri="{FF2B5EF4-FFF2-40B4-BE49-F238E27FC236}">
+                <a16:creationId xmlns:a16="http://schemas.microsoft.com/office/drawing/2014/main" id="{D78E4F48-F647-49BC-1382-9DBBFC9074CE}"/>
+              </a:ext>
+            </a:extLst>
+          </p:cNvPr>
+          <p:cNvSpPr/>
+          <p:nvPr/>
+        </p:nvSpPr>
+        <p:spPr>
+          <a:xfrm>
+            <a:off x="8385096" y="2755781"/>
+            <a:ext cx="1428750" cy="762000"/>
+          </a:xfrm>
+          <a:prstGeom prst="parallelogram">
+            <a:avLst/>
+          </a:prstGeom>
+          <a:solidFill>
+            <a:srgbClr val="00B0F0"/>
+          </a:solidFill>
+          <a:ln>
+            <a:noFill/>
+          </a:ln>
+        </p:spPr>
+        <p:style>
+          <a:lnRef idx="1">
+            <a:schemeClr val="accent5"/>
+          </a:lnRef>
+          <a:fillRef idx="3">
+            <a:schemeClr val="accent5"/>
+          </a:fillRef>
+          <a:effectRef idx="2">
+            <a:schemeClr val="accent5"/>
+          </a:effectRef>
+          <a:fontRef idx="minor">
+            <a:schemeClr val="lt1"/>
+          </a:fontRef>
+        </p:style>
+        <p:txBody>
+          <a:bodyPr rtlCol="0" anchor="ctr"/>
+          <a:lstStyle/>
+          <a:p>
+            <a:pPr algn="ctr"/>
+            <a:r>
+              <a:rPr lang="en-US" sz="1200" dirty="0"/>
+              <a:t>Intensity normalization</a:t>
+            </a:r>
+          </a:p>
+        </p:txBody>
+      </p:sp>
+      <p:sp>
+        <p:nvSpPr>
+          <p:cNvPr id="36" name="Parallelogram 35">
+            <a:extLst>
+              <a:ext uri="{FF2B5EF4-FFF2-40B4-BE49-F238E27FC236}">
+                <a16:creationId xmlns:a16="http://schemas.microsoft.com/office/drawing/2014/main" id="{C7EFD75B-4072-4A27-11C0-A6EE1BBE387F}"/>
+              </a:ext>
+            </a:extLst>
+          </p:cNvPr>
+          <p:cNvSpPr/>
+          <p:nvPr/>
+        </p:nvSpPr>
+        <p:spPr>
+          <a:xfrm>
+            <a:off x="35426" y="2749550"/>
+            <a:ext cx="1215676" cy="762000"/>
+          </a:xfrm>
+          <a:prstGeom prst="parallelogram">
+            <a:avLst/>
+          </a:prstGeom>
+          <a:solidFill>
+            <a:schemeClr val="accent6">
+              <a:lumMod val="60000"/>
+              <a:lumOff val="40000"/>
+            </a:schemeClr>
+          </a:solidFill>
+          <a:ln>
+            <a:noFill/>
+          </a:ln>
+        </p:spPr>
+        <p:style>
+          <a:lnRef idx="1">
+            <a:schemeClr val="accent5"/>
+          </a:lnRef>
+          <a:fillRef idx="3">
+            <a:schemeClr val="accent5"/>
+          </a:fillRef>
+          <a:effectRef idx="2">
+            <a:schemeClr val="accent5"/>
+          </a:effectRef>
+          <a:fontRef idx="minor">
+            <a:schemeClr val="lt1"/>
+          </a:fontRef>
+        </p:style>
+        <p:txBody>
+          <a:bodyPr rtlCol="0" anchor="ctr"/>
+          <a:lstStyle/>
+          <a:p>
+            <a:pPr algn="ctr"/>
+            <a:r>
+              <a:rPr lang="en-US" dirty="0">
+                <a:solidFill>
+                  <a:schemeClr val="bg1"/>
+                </a:solidFill>
+              </a:rPr>
+              <a:t>Raw data</a:t>
+            </a:r>
+          </a:p>
+        </p:txBody>
+      </p:sp>
+      <p:sp>
+        <p:nvSpPr>
+          <p:cNvPr id="38" name="Parallelogram 37">
+            <a:extLst>
+              <a:ext uri="{FF2B5EF4-FFF2-40B4-BE49-F238E27FC236}">
+                <a16:creationId xmlns:a16="http://schemas.microsoft.com/office/drawing/2014/main" id="{633B071D-298E-DEC8-D332-6F02F5819E15}"/>
+              </a:ext>
+            </a:extLst>
+          </p:cNvPr>
+          <p:cNvSpPr/>
+          <p:nvPr/>
+        </p:nvSpPr>
+        <p:spPr>
+          <a:xfrm>
+            <a:off x="10453687" y="2749550"/>
+            <a:ext cx="1584324" cy="762000"/>
+          </a:xfrm>
+          <a:prstGeom prst="parallelogram">
+            <a:avLst/>
+          </a:prstGeom>
+          <a:solidFill>
+            <a:schemeClr val="accent6">
+              <a:lumMod val="60000"/>
+              <a:lumOff val="40000"/>
+            </a:schemeClr>
+          </a:solidFill>
+          <a:ln>
+            <a:noFill/>
+          </a:ln>
+        </p:spPr>
+        <p:style>
+          <a:lnRef idx="1">
+            <a:schemeClr val="accent5"/>
+          </a:lnRef>
+          <a:fillRef idx="3">
+            <a:schemeClr val="accent5"/>
+          </a:fillRef>
+          <a:effectRef idx="2">
+            <a:schemeClr val="accent5"/>
+          </a:effectRef>
+          <a:fontRef idx="minor">
+            <a:schemeClr val="lt1"/>
+          </a:fontRef>
+        </p:style>
+        <p:txBody>
+          <a:bodyPr rtlCol="0" anchor="ctr"/>
+          <a:lstStyle/>
+          <a:p>
+            <a:pPr algn="ctr"/>
+            <a:r>
+              <a:rPr lang="en-US" sz="1400" dirty="0">
+                <a:solidFill>
+                  <a:schemeClr val="bg1"/>
+                </a:solidFill>
+              </a:rPr>
+              <a:t>Preprocessed data</a:t>
+            </a:r>
+          </a:p>
+        </p:txBody>
+      </p:sp>
+      <p:sp>
+        <p:nvSpPr>
+          <p:cNvPr id="42" name="Title 1">
+            <a:extLst>
+              <a:ext uri="{FF2B5EF4-FFF2-40B4-BE49-F238E27FC236}">
+                <a16:creationId xmlns:a16="http://schemas.microsoft.com/office/drawing/2014/main" id="{CD629814-5E16-2C5F-563E-A1F970BB03A0}"/>
               </a:ext>
             </a:extLst>
           </p:cNvPr>
@@ -13042,46 +16004,567 @@
           </p:nvPr>
         </p:nvSpPr>
         <p:spPr>
-          <a:noFill/>
+          <a:xfrm>
+            <a:off x="1226740" y="95727"/>
+            <a:ext cx="9264649" cy="938530"/>
+          </a:xfrm>
         </p:spPr>
         <p:txBody>
           <a:bodyPr/>
           <a:lstStyle/>
           <a:p>
             <a:r>
-              <a:rPr lang="en-US" dirty="0"/>
-              <a:t>Selecting visual aids</a:t>
-            </a:r>
-          </a:p>
-        </p:txBody>
-      </p:sp>
-      <p:sp>
-        <p:nvSpPr>
-          <p:cNvPr id="20" name="Subtitle 2">
+              <a:rPr lang="en-US" sz="2800" dirty="0"/>
+              <a:t>DETERMINISTIC preprocessing STEPS</a:t>
+            </a:r>
+          </a:p>
+        </p:txBody>
+      </p:sp>
+      <p:pic>
+        <p:nvPicPr>
+          <p:cNvPr id="44" name="Picture 43">
             <a:extLst>
               <a:ext uri="{FF2B5EF4-FFF2-40B4-BE49-F238E27FC236}">
-                <a16:creationId xmlns:a16="http://schemas.microsoft.com/office/drawing/2014/main" id="{826664CC-F0B7-D2E1-A321-E97944F52EA3}"/>
+                <a16:creationId xmlns:a16="http://schemas.microsoft.com/office/drawing/2014/main" id="{C116E495-D86A-9724-8F7B-1B6FC39A945C}"/>
               </a:ext>
             </a:extLst>
           </p:cNvPr>
-          <p:cNvSpPr>
-            <a:spLocks noGrp="1"/>
-          </p:cNvSpPr>
-          <p:nvPr>
-            <p:ph type="subTitle" idx="1"/>
-          </p:nvPr>
-        </p:nvSpPr>
+          <p:cNvPicPr>
+            <a:picLocks noChangeAspect="1"/>
+          </p:cNvPicPr>
+          <p:nvPr/>
+        </p:nvPicPr>
+        <p:blipFill>
+          <a:blip r:embed="rId3"/>
+          <a:stretch>
+            <a:fillRect/>
+          </a:stretch>
+        </p:blipFill>
         <p:spPr>
-          <a:noFill/>
+          <a:xfrm>
+            <a:off x="2886267" y="781724"/>
+            <a:ext cx="1038429" cy="1501616"/>
+          </a:xfrm>
+          <a:prstGeom prst="rect">
+            <a:avLst/>
+          </a:prstGeom>
         </p:spPr>
-        <p:txBody>
-          <a:bodyPr anchor="t"/>
+      </p:pic>
+      <p:pic>
+        <p:nvPicPr>
+          <p:cNvPr id="46" name="Picture 45">
+            <a:extLst>
+              <a:ext uri="{FF2B5EF4-FFF2-40B4-BE49-F238E27FC236}">
+                <a16:creationId xmlns:a16="http://schemas.microsoft.com/office/drawing/2014/main" id="{F3CEE33B-7B65-A6D8-1C42-DAB08C93AD05}"/>
+              </a:ext>
+            </a:extLst>
+          </p:cNvPr>
+          <p:cNvPicPr>
+            <a:picLocks noChangeAspect="1"/>
+          </p:cNvPicPr>
+          <p:nvPr/>
+        </p:nvPicPr>
+        <p:blipFill>
+          <a:blip r:embed="rId4"/>
+          <a:stretch>
+            <a:fillRect/>
+          </a:stretch>
+        </p:blipFill>
+        <p:spPr>
+          <a:xfrm>
+            <a:off x="3585815" y="1114583"/>
+            <a:ext cx="1071731" cy="1501617"/>
+          </a:xfrm>
+          <a:prstGeom prst="rect">
+            <a:avLst/>
+          </a:prstGeom>
+        </p:spPr>
+      </p:pic>
+      <p:pic>
+        <p:nvPicPr>
+          <p:cNvPr id="55" name="Picture 54">
+            <a:extLst>
+              <a:ext uri="{FF2B5EF4-FFF2-40B4-BE49-F238E27FC236}">
+                <a16:creationId xmlns:a16="http://schemas.microsoft.com/office/drawing/2014/main" id="{0D3AE2B5-F68B-0940-FF1F-E6AD43D3E674}"/>
+              </a:ext>
+            </a:extLst>
+          </p:cNvPr>
+          <p:cNvPicPr>
+            <a:picLocks noChangeAspect="1"/>
+          </p:cNvPicPr>
+          <p:nvPr/>
+        </p:nvPicPr>
+        <p:blipFill>
+          <a:blip r:embed="rId5"/>
+          <a:stretch>
+            <a:fillRect/>
+          </a:stretch>
+        </p:blipFill>
+        <p:spPr>
+          <a:xfrm>
+            <a:off x="4942453" y="1198538"/>
+            <a:ext cx="613797" cy="1139082"/>
+          </a:xfrm>
+          <a:prstGeom prst="rect">
+            <a:avLst/>
+          </a:prstGeom>
+        </p:spPr>
+      </p:pic>
+      <p:pic>
+        <p:nvPicPr>
+          <p:cNvPr id="58" name="Picture 57">
+            <a:extLst>
+              <a:ext uri="{FF2B5EF4-FFF2-40B4-BE49-F238E27FC236}">
+                <a16:creationId xmlns:a16="http://schemas.microsoft.com/office/drawing/2014/main" id="{7EA85472-B4EE-11B8-5D8B-F0C0291417A5}"/>
+              </a:ext>
+            </a:extLst>
+          </p:cNvPr>
+          <p:cNvPicPr>
+            <a:picLocks noChangeAspect="1"/>
+          </p:cNvPicPr>
+          <p:nvPr/>
+        </p:nvPicPr>
+        <p:blipFill>
+          <a:blip r:embed="rId6"/>
+          <a:stretch>
+            <a:fillRect/>
+          </a:stretch>
+        </p:blipFill>
+        <p:spPr>
+          <a:xfrm>
+            <a:off x="5334880" y="1468238"/>
+            <a:ext cx="816166" cy="1124744"/>
+          </a:xfrm>
+          <a:prstGeom prst="rect">
+            <a:avLst/>
+          </a:prstGeom>
+        </p:spPr>
+      </p:pic>
+      <p:sp>
+        <p:nvSpPr>
+          <p:cNvPr id="60" name="Arrow: Curved Right 59">
+            <a:extLst>
+              <a:ext uri="{FF2B5EF4-FFF2-40B4-BE49-F238E27FC236}">
+                <a16:creationId xmlns:a16="http://schemas.microsoft.com/office/drawing/2014/main" id="{0681B8F4-0122-D31B-CDAD-2EBC4AC303D1}"/>
+              </a:ext>
+            </a:extLst>
+          </p:cNvPr>
+          <p:cNvSpPr/>
+          <p:nvPr/>
+        </p:nvSpPr>
+        <p:spPr>
+          <a:xfrm rot="17797009">
+            <a:off x="3517243" y="2076366"/>
+            <a:ext cx="144541" cy="339261"/>
+          </a:xfrm>
+          <a:prstGeom prst="curvedRightArrow">
+            <a:avLst/>
+          </a:prstGeom>
+        </p:spPr>
+        <p:style>
+          <a:lnRef idx="2">
+            <a:schemeClr val="accent1">
+              <a:shade val="15000"/>
+            </a:schemeClr>
+          </a:lnRef>
+          <a:fillRef idx="1">
+            <a:schemeClr val="accent1"/>
+          </a:fillRef>
+          <a:effectRef idx="0">
+            <a:schemeClr val="accent1"/>
+          </a:effectRef>
+          <a:fontRef idx="minor">
+            <a:schemeClr val="lt1"/>
+          </a:fontRef>
+        </p:style>
+        <p:txBody>
+          <a:bodyPr rtlCol="0" anchor="ctr"/>
           <a:lstStyle/>
           <a:p>
-            <a:r>
-              <a:rPr lang="en-US" dirty="0"/>
-              <a:t>Enhancing your presentation</a:t>
-            </a:r>
+            <a:pPr algn="ctr"/>
+            <a:endParaRPr lang="en-US">
+              <a:solidFill>
+                <a:schemeClr val="tx1"/>
+              </a:solidFill>
+            </a:endParaRPr>
+          </a:p>
+        </p:txBody>
+      </p:sp>
+      <p:sp>
+        <p:nvSpPr>
+          <p:cNvPr id="62" name="Arrow: Curved Right 61">
+            <a:extLst>
+              <a:ext uri="{FF2B5EF4-FFF2-40B4-BE49-F238E27FC236}">
+                <a16:creationId xmlns:a16="http://schemas.microsoft.com/office/drawing/2014/main" id="{A92D642A-F583-3ACC-5766-EAA31B2A05EA}"/>
+              </a:ext>
+            </a:extLst>
+          </p:cNvPr>
+          <p:cNvSpPr/>
+          <p:nvPr/>
+        </p:nvSpPr>
+        <p:spPr>
+          <a:xfrm rot="17797009">
+            <a:off x="5292994" y="2207710"/>
+            <a:ext cx="154145" cy="339261"/>
+          </a:xfrm>
+          <a:prstGeom prst="curvedRightArrow">
+            <a:avLst/>
+          </a:prstGeom>
+        </p:spPr>
+        <p:style>
+          <a:lnRef idx="2">
+            <a:schemeClr val="accent1">
+              <a:shade val="15000"/>
+            </a:schemeClr>
+          </a:lnRef>
+          <a:fillRef idx="1">
+            <a:schemeClr val="accent1"/>
+          </a:fillRef>
+          <a:effectRef idx="0">
+            <a:schemeClr val="accent1"/>
+          </a:effectRef>
+          <a:fontRef idx="minor">
+            <a:schemeClr val="lt1"/>
+          </a:fontRef>
+        </p:style>
+        <p:txBody>
+          <a:bodyPr rtlCol="0" anchor="ctr"/>
+          <a:lstStyle/>
+          <a:p>
+            <a:pPr algn="ctr"/>
+            <a:endParaRPr lang="en-US">
+              <a:solidFill>
+                <a:schemeClr val="tx1"/>
+              </a:solidFill>
+            </a:endParaRPr>
+          </a:p>
+        </p:txBody>
+      </p:sp>
+      <p:pic>
+        <p:nvPicPr>
+          <p:cNvPr id="64" name="Picture 63">
+            <a:extLst>
+              <a:ext uri="{FF2B5EF4-FFF2-40B4-BE49-F238E27FC236}">
+                <a16:creationId xmlns:a16="http://schemas.microsoft.com/office/drawing/2014/main" id="{832F3940-7210-9BD7-56FF-EE23B9A30AF8}"/>
+              </a:ext>
+            </a:extLst>
+          </p:cNvPr>
+          <p:cNvPicPr>
+            <a:picLocks noChangeAspect="1"/>
+          </p:cNvPicPr>
+          <p:nvPr/>
+        </p:nvPicPr>
+        <p:blipFill>
+          <a:blip r:embed="rId7"/>
+          <a:stretch>
+            <a:fillRect/>
+          </a:stretch>
+        </p:blipFill>
+        <p:spPr>
+          <a:xfrm>
+            <a:off x="6630461" y="1399090"/>
+            <a:ext cx="750817" cy="855688"/>
+          </a:xfrm>
+          <a:prstGeom prst="rect">
+            <a:avLst/>
+          </a:prstGeom>
+        </p:spPr>
+      </p:pic>
+      <p:pic>
+        <p:nvPicPr>
+          <p:cNvPr id="66" name="Picture 65">
+            <a:extLst>
+              <a:ext uri="{FF2B5EF4-FFF2-40B4-BE49-F238E27FC236}">
+                <a16:creationId xmlns:a16="http://schemas.microsoft.com/office/drawing/2014/main" id="{F6B266B4-3D0B-3088-C446-8F6C39986654}"/>
+              </a:ext>
+            </a:extLst>
+          </p:cNvPr>
+          <p:cNvPicPr>
+            <a:picLocks noChangeAspect="1"/>
+          </p:cNvPicPr>
+          <p:nvPr/>
+        </p:nvPicPr>
+        <p:blipFill>
+          <a:blip r:embed="rId8"/>
+          <a:stretch>
+            <a:fillRect/>
+          </a:stretch>
+        </p:blipFill>
+        <p:spPr>
+          <a:xfrm>
+            <a:off x="7402278" y="1730736"/>
+            <a:ext cx="621541" cy="791507"/>
+          </a:xfrm>
+          <a:prstGeom prst="rect">
+            <a:avLst/>
+          </a:prstGeom>
+        </p:spPr>
+      </p:pic>
+      <p:sp>
+        <p:nvSpPr>
+          <p:cNvPr id="68" name="Arrow: Curved Right 67">
+            <a:extLst>
+              <a:ext uri="{FF2B5EF4-FFF2-40B4-BE49-F238E27FC236}">
+                <a16:creationId xmlns:a16="http://schemas.microsoft.com/office/drawing/2014/main" id="{99422F4B-12AA-D5CF-A15E-3350B0A80FAA}"/>
+              </a:ext>
+            </a:extLst>
+          </p:cNvPr>
+          <p:cNvSpPr/>
+          <p:nvPr/>
+        </p:nvSpPr>
+        <p:spPr>
+          <a:xfrm rot="17797009">
+            <a:off x="7081424" y="2244633"/>
+            <a:ext cx="154145" cy="339261"/>
+          </a:xfrm>
+          <a:prstGeom prst="curvedRightArrow">
+            <a:avLst/>
+          </a:prstGeom>
+        </p:spPr>
+        <p:style>
+          <a:lnRef idx="2">
+            <a:schemeClr val="accent1">
+              <a:shade val="15000"/>
+            </a:schemeClr>
+          </a:lnRef>
+          <a:fillRef idx="1">
+            <a:schemeClr val="accent1"/>
+          </a:fillRef>
+          <a:effectRef idx="0">
+            <a:schemeClr val="accent1"/>
+          </a:effectRef>
+          <a:fontRef idx="minor">
+            <a:schemeClr val="lt1"/>
+          </a:fontRef>
+        </p:style>
+        <p:txBody>
+          <a:bodyPr rtlCol="0" anchor="ctr"/>
+          <a:lstStyle/>
+          <a:p>
+            <a:pPr algn="ctr"/>
+            <a:endParaRPr lang="en-US">
+              <a:solidFill>
+                <a:schemeClr val="tx1"/>
+              </a:solidFill>
+            </a:endParaRPr>
+          </a:p>
+        </p:txBody>
+      </p:sp>
+      <p:pic>
+        <p:nvPicPr>
+          <p:cNvPr id="70" name="Picture 69">
+            <a:extLst>
+              <a:ext uri="{FF2B5EF4-FFF2-40B4-BE49-F238E27FC236}">
+                <a16:creationId xmlns:a16="http://schemas.microsoft.com/office/drawing/2014/main" id="{29EA13E3-FEC6-7CD0-F389-51590969E7C8}"/>
+              </a:ext>
+            </a:extLst>
+          </p:cNvPr>
+          <p:cNvPicPr>
+            <a:picLocks noChangeAspect="1"/>
+          </p:cNvPicPr>
+          <p:nvPr/>
+        </p:nvPicPr>
+        <p:blipFill>
+          <a:blip r:embed="rId9"/>
+          <a:stretch>
+            <a:fillRect/>
+          </a:stretch>
+        </p:blipFill>
+        <p:spPr>
+          <a:xfrm>
+            <a:off x="8366621" y="1009650"/>
+            <a:ext cx="939112" cy="1290637"/>
+          </a:xfrm>
+          <a:prstGeom prst="rect">
+            <a:avLst/>
+          </a:prstGeom>
+        </p:spPr>
+      </p:pic>
+      <p:pic>
+        <p:nvPicPr>
+          <p:cNvPr id="74" name="Picture 73">
+            <a:extLst>
+              <a:ext uri="{FF2B5EF4-FFF2-40B4-BE49-F238E27FC236}">
+                <a16:creationId xmlns:a16="http://schemas.microsoft.com/office/drawing/2014/main" id="{B20B43FA-B16E-2A0C-B5B2-BE3231AED38C}"/>
+              </a:ext>
+            </a:extLst>
+          </p:cNvPr>
+          <p:cNvPicPr>
+            <a:picLocks noChangeAspect="1"/>
+          </p:cNvPicPr>
+          <p:nvPr/>
+        </p:nvPicPr>
+        <p:blipFill>
+          <a:blip r:embed="rId10"/>
+          <a:stretch>
+            <a:fillRect/>
+          </a:stretch>
+        </p:blipFill>
+        <p:spPr>
+          <a:xfrm>
+            <a:off x="9099471" y="1593115"/>
+            <a:ext cx="786664" cy="909637"/>
+          </a:xfrm>
+          <a:prstGeom prst="rect">
+            <a:avLst/>
+          </a:prstGeom>
+        </p:spPr>
+      </p:pic>
+      <p:sp>
+        <p:nvSpPr>
+          <p:cNvPr id="76" name="Arrow: Curved Right 75">
+            <a:extLst>
+              <a:ext uri="{FF2B5EF4-FFF2-40B4-BE49-F238E27FC236}">
+                <a16:creationId xmlns:a16="http://schemas.microsoft.com/office/drawing/2014/main" id="{24820C6D-0B66-5D83-59F2-C369CA9D212E}"/>
+              </a:ext>
+            </a:extLst>
+          </p:cNvPr>
+          <p:cNvSpPr/>
+          <p:nvPr/>
+        </p:nvSpPr>
+        <p:spPr>
+          <a:xfrm rot="17797009">
+            <a:off x="8877354" y="2154146"/>
+            <a:ext cx="154145" cy="339261"/>
+          </a:xfrm>
+          <a:prstGeom prst="curvedRightArrow">
+            <a:avLst/>
+          </a:prstGeom>
+        </p:spPr>
+        <p:style>
+          <a:lnRef idx="2">
+            <a:schemeClr val="accent1">
+              <a:shade val="15000"/>
+            </a:schemeClr>
+          </a:lnRef>
+          <a:fillRef idx="1">
+            <a:schemeClr val="accent1"/>
+          </a:fillRef>
+          <a:effectRef idx="0">
+            <a:schemeClr val="accent1"/>
+          </a:effectRef>
+          <a:fontRef idx="minor">
+            <a:schemeClr val="lt1"/>
+          </a:fontRef>
+        </p:style>
+        <p:txBody>
+          <a:bodyPr rtlCol="0" anchor="ctr"/>
+          <a:lstStyle/>
+          <a:p>
+            <a:pPr algn="ctr"/>
+            <a:endParaRPr lang="en-US">
+              <a:solidFill>
+                <a:schemeClr val="tx1"/>
+              </a:solidFill>
+            </a:endParaRPr>
+          </a:p>
+        </p:txBody>
+      </p:sp>
+      <p:sp>
+        <p:nvSpPr>
+          <p:cNvPr id="77" name="Arrow: Right 76">
+            <a:extLst>
+              <a:ext uri="{FF2B5EF4-FFF2-40B4-BE49-F238E27FC236}">
+                <a16:creationId xmlns:a16="http://schemas.microsoft.com/office/drawing/2014/main" id="{8E4BAB60-F5BC-D749-4A5D-3FFA1F3CD8F5}"/>
+              </a:ext>
+            </a:extLst>
+          </p:cNvPr>
+          <p:cNvSpPr/>
+          <p:nvPr/>
+        </p:nvSpPr>
+        <p:spPr>
+          <a:xfrm>
+            <a:off x="1269603" y="3065315"/>
+            <a:ext cx="280195" cy="171450"/>
+          </a:xfrm>
+          <a:prstGeom prst="rightArrow">
+            <a:avLst/>
+          </a:prstGeom>
+          <a:solidFill>
+            <a:schemeClr val="accent1">
+              <a:lumMod val="75000"/>
+            </a:schemeClr>
+          </a:solidFill>
+          <a:ln>
+            <a:noFill/>
+          </a:ln>
+        </p:spPr>
+        <p:style>
+          <a:lnRef idx="2">
+            <a:schemeClr val="accent1">
+              <a:shade val="15000"/>
+            </a:schemeClr>
+          </a:lnRef>
+          <a:fillRef idx="1">
+            <a:schemeClr val="accent1"/>
+          </a:fillRef>
+          <a:effectRef idx="0">
+            <a:schemeClr val="accent1"/>
+          </a:effectRef>
+          <a:fontRef idx="minor">
+            <a:schemeClr val="lt1"/>
+          </a:fontRef>
+        </p:style>
+        <p:txBody>
+          <a:bodyPr rtlCol="0" anchor="ctr"/>
+          <a:lstStyle/>
+          <a:p>
+            <a:pPr algn="ctr"/>
+            <a:endParaRPr lang="en-US"/>
+          </a:p>
+        </p:txBody>
+      </p:sp>
+      <p:sp>
+        <p:nvSpPr>
+          <p:cNvPr id="79" name="Arrow: Right 78">
+            <a:extLst>
+              <a:ext uri="{FF2B5EF4-FFF2-40B4-BE49-F238E27FC236}">
+                <a16:creationId xmlns:a16="http://schemas.microsoft.com/office/drawing/2014/main" id="{F2F26BF4-5FF7-935D-41A3-DB5D55474F47}"/>
+              </a:ext>
+            </a:extLst>
+          </p:cNvPr>
+          <p:cNvSpPr/>
+          <p:nvPr/>
+        </p:nvSpPr>
+        <p:spPr>
+          <a:xfrm>
+            <a:off x="10153648" y="3065315"/>
+            <a:ext cx="280195" cy="171450"/>
+          </a:xfrm>
+          <a:prstGeom prst="rightArrow">
+            <a:avLst/>
+          </a:prstGeom>
+          <a:solidFill>
+            <a:schemeClr val="accent1">
+              <a:lumMod val="75000"/>
+            </a:schemeClr>
+          </a:solidFill>
+          <a:ln>
+            <a:noFill/>
+          </a:ln>
+        </p:spPr>
+        <p:style>
+          <a:lnRef idx="2">
+            <a:schemeClr val="accent1">
+              <a:shade val="15000"/>
+            </a:schemeClr>
+          </a:lnRef>
+          <a:fillRef idx="1">
+            <a:schemeClr val="accent1"/>
+          </a:fillRef>
+          <a:effectRef idx="0">
+            <a:schemeClr val="accent1"/>
+          </a:effectRef>
+          <a:fontRef idx="minor">
+            <a:schemeClr val="lt1"/>
+          </a:fontRef>
+        </p:style>
+        <p:txBody>
+          <a:bodyPr rtlCol="0" anchor="ctr"/>
+          <a:lstStyle/>
+          <a:p>
+            <a:pPr algn="ctr"/>
+            <a:endParaRPr lang="en-US"/>
           </a:p>
         </p:txBody>
       </p:sp>
@@ -13103,7 +16586,13 @@
   <p:cSld>
     <p:spTree>
       <p:nvGrpSpPr>
-        <p:cNvPr id="1" name=""/>
+        <p:cNvPr id="1" name="">
+          <a:extLst>
+            <a:ext uri="{FF2B5EF4-FFF2-40B4-BE49-F238E27FC236}">
+              <a16:creationId xmlns:a16="http://schemas.microsoft.com/office/drawing/2014/main" id="{E5C5D8A8-3BF9-F805-008B-796B1E722CAD}"/>
+            </a:ext>
+          </a:extLst>
+        </p:cNvPr>
         <p:cNvGrpSpPr/>
         <p:nvPr/>
       </p:nvGrpSpPr>
@@ -13117,10 +16606,267 @@
       </p:grpSpPr>
       <p:sp>
         <p:nvSpPr>
-          <p:cNvPr id="11" name="Title 10">
+          <p:cNvPr id="121" name="Rectangle 120">
             <a:extLst>
               <a:ext uri="{FF2B5EF4-FFF2-40B4-BE49-F238E27FC236}">
-                <a16:creationId xmlns:a16="http://schemas.microsoft.com/office/drawing/2014/main" id="{FF0FD1A0-C075-EE18-B3AE-363C242D0BCE}"/>
+                <a16:creationId xmlns:a16="http://schemas.microsoft.com/office/drawing/2014/main" id="{960D02D1-1B7C-5902-7C58-6F007BC5B630}"/>
+              </a:ext>
+            </a:extLst>
+          </p:cNvPr>
+          <p:cNvSpPr/>
+          <p:nvPr/>
+        </p:nvSpPr>
+        <p:spPr>
+          <a:xfrm>
+            <a:off x="2266952" y="4185842"/>
+            <a:ext cx="1784348" cy="1034175"/>
+          </a:xfrm>
+          <a:prstGeom prst="rect">
+            <a:avLst/>
+          </a:prstGeom>
+          <a:solidFill>
+            <a:schemeClr val="bg1">
+              <a:lumMod val="95000"/>
+            </a:schemeClr>
+          </a:solidFill>
+          <a:ln>
+            <a:noFill/>
+          </a:ln>
+        </p:spPr>
+        <p:style>
+          <a:lnRef idx="2">
+            <a:schemeClr val="accent1">
+              <a:shade val="15000"/>
+            </a:schemeClr>
+          </a:lnRef>
+          <a:fillRef idx="1">
+            <a:schemeClr val="accent1"/>
+          </a:fillRef>
+          <a:effectRef idx="0">
+            <a:schemeClr val="accent1"/>
+          </a:effectRef>
+          <a:fontRef idx="minor">
+            <a:schemeClr val="lt1"/>
+          </a:fontRef>
+        </p:style>
+        <p:txBody>
+          <a:bodyPr rtlCol="0" anchor="ctr"/>
+          <a:lstStyle/>
+          <a:p>
+            <a:endParaRPr lang="en-US" sz="1400" dirty="0">
+              <a:solidFill>
+                <a:schemeClr val="bg2">
+                  <a:lumMod val="50000"/>
+                </a:schemeClr>
+              </a:solidFill>
+            </a:endParaRPr>
+          </a:p>
+          <a:p>
+            <a:endParaRPr lang="en-US" sz="1400" dirty="0">
+              <a:solidFill>
+                <a:schemeClr val="bg2">
+                  <a:lumMod val="50000"/>
+                </a:schemeClr>
+              </a:solidFill>
+            </a:endParaRPr>
+          </a:p>
+          <a:p>
+            <a:endParaRPr lang="en-US" sz="1400" dirty="0">
+              <a:solidFill>
+                <a:schemeClr val="bg2">
+                  <a:lumMod val="50000"/>
+                </a:schemeClr>
+              </a:solidFill>
+            </a:endParaRPr>
+          </a:p>
+          <a:p>
+            <a:pPr marL="285750" indent="-285750">
+              <a:buFont typeface="Arial" panose="020B0604020202020204" pitchFamily="34" charset="0"/>
+              <a:buChar char="•"/>
+            </a:pPr>
+            <a:r>
+              <a:rPr lang="en-US" sz="1100" dirty="0">
+                <a:solidFill>
+                  <a:schemeClr val="bg2">
+                    <a:lumMod val="50000"/>
+                  </a:schemeClr>
+                </a:solidFill>
+              </a:rPr>
+              <a:t>train: 80%</a:t>
+            </a:r>
+          </a:p>
+          <a:p>
+            <a:pPr marL="285750" indent="-285750">
+              <a:buFont typeface="Arial" panose="020B0604020202020204" pitchFamily="34" charset="0"/>
+              <a:buChar char="•"/>
+            </a:pPr>
+            <a:r>
+              <a:rPr lang="en-US" sz="1100" dirty="0" err="1">
+                <a:solidFill>
+                  <a:schemeClr val="bg2">
+                    <a:lumMod val="50000"/>
+                  </a:schemeClr>
+                </a:solidFill>
+              </a:rPr>
+              <a:t>val</a:t>
+            </a:r>
+            <a:r>
+              <a:rPr lang="en-US" sz="1100" dirty="0">
+                <a:solidFill>
+                  <a:schemeClr val="bg2">
+                    <a:lumMod val="50000"/>
+                  </a:schemeClr>
+                </a:solidFill>
+              </a:rPr>
+              <a:t>: 10%</a:t>
+            </a:r>
+          </a:p>
+          <a:p>
+            <a:pPr marL="285750" indent="-285750">
+              <a:buFont typeface="Arial" panose="020B0604020202020204" pitchFamily="34" charset="0"/>
+              <a:buChar char="•"/>
+            </a:pPr>
+            <a:r>
+              <a:rPr lang="en-US" sz="1100" dirty="0">
+                <a:solidFill>
+                  <a:schemeClr val="bg2">
+                    <a:lumMod val="50000"/>
+                  </a:schemeClr>
+                </a:solidFill>
+              </a:rPr>
+              <a:t>test: 10%</a:t>
+            </a:r>
+          </a:p>
+          <a:p>
+            <a:endParaRPr lang="en-US" sz="1400" dirty="0">
+              <a:solidFill>
+                <a:schemeClr val="bg2">
+                  <a:lumMod val="50000"/>
+                </a:schemeClr>
+              </a:solidFill>
+            </a:endParaRPr>
+          </a:p>
+        </p:txBody>
+      </p:sp>
+      <p:sp>
+        <p:nvSpPr>
+          <p:cNvPr id="4" name="Parallelogram 3">
+            <a:extLst>
+              <a:ext uri="{FF2B5EF4-FFF2-40B4-BE49-F238E27FC236}">
+                <a16:creationId xmlns:a16="http://schemas.microsoft.com/office/drawing/2014/main" id="{40E190B0-559B-DEF2-4E77-F0420E290F14}"/>
+              </a:ext>
+            </a:extLst>
+          </p:cNvPr>
+          <p:cNvSpPr/>
+          <p:nvPr/>
+        </p:nvSpPr>
+        <p:spPr>
+          <a:xfrm>
+            <a:off x="4872860" y="2358015"/>
+            <a:ext cx="1428750" cy="762000"/>
+          </a:xfrm>
+          <a:prstGeom prst="parallelogram">
+            <a:avLst/>
+          </a:prstGeom>
+          <a:solidFill>
+            <a:srgbClr val="00B0F0"/>
+          </a:solidFill>
+          <a:ln>
+            <a:noFill/>
+          </a:ln>
+        </p:spPr>
+        <p:style>
+          <a:lnRef idx="1">
+            <a:schemeClr val="accent5"/>
+          </a:lnRef>
+          <a:fillRef idx="3">
+            <a:schemeClr val="accent5"/>
+          </a:fillRef>
+          <a:effectRef idx="2">
+            <a:schemeClr val="accent5"/>
+          </a:effectRef>
+          <a:fontRef idx="minor">
+            <a:schemeClr val="lt1"/>
+          </a:fontRef>
+        </p:style>
+        <p:txBody>
+          <a:bodyPr rtlCol="0" anchor="ctr"/>
+          <a:lstStyle/>
+          <a:p>
+            <a:pPr algn="ctr"/>
+            <a:r>
+              <a:rPr lang="en-US" sz="1400" dirty="0"/>
+              <a:t>Random cropping</a:t>
+            </a:r>
+          </a:p>
+        </p:txBody>
+      </p:sp>
+      <p:sp>
+        <p:nvSpPr>
+          <p:cNvPr id="38" name="Parallelogram 37">
+            <a:extLst>
+              <a:ext uri="{FF2B5EF4-FFF2-40B4-BE49-F238E27FC236}">
+                <a16:creationId xmlns:a16="http://schemas.microsoft.com/office/drawing/2014/main" id="{3D449C02-C12A-E522-3BBD-352B4B269407}"/>
+              </a:ext>
+            </a:extLst>
+          </p:cNvPr>
+          <p:cNvSpPr/>
+          <p:nvPr/>
+        </p:nvSpPr>
+        <p:spPr>
+          <a:xfrm>
+            <a:off x="138459" y="4321929"/>
+            <a:ext cx="1584324" cy="762000"/>
+          </a:xfrm>
+          <a:prstGeom prst="parallelogram">
+            <a:avLst/>
+          </a:prstGeom>
+          <a:solidFill>
+            <a:schemeClr val="accent6">
+              <a:lumMod val="60000"/>
+              <a:lumOff val="40000"/>
+            </a:schemeClr>
+          </a:solidFill>
+          <a:ln>
+            <a:noFill/>
+          </a:ln>
+        </p:spPr>
+        <p:style>
+          <a:lnRef idx="1">
+            <a:schemeClr val="accent5"/>
+          </a:lnRef>
+          <a:fillRef idx="3">
+            <a:schemeClr val="accent5"/>
+          </a:fillRef>
+          <a:effectRef idx="2">
+            <a:schemeClr val="accent5"/>
+          </a:effectRef>
+          <a:fontRef idx="minor">
+            <a:schemeClr val="lt1"/>
+          </a:fontRef>
+        </p:style>
+        <p:txBody>
+          <a:bodyPr rtlCol="0" anchor="ctr"/>
+          <a:lstStyle/>
+          <a:p>
+            <a:pPr algn="ctr"/>
+            <a:r>
+              <a:rPr lang="en-US" sz="1400" dirty="0">
+                <a:solidFill>
+                  <a:schemeClr val="bg1"/>
+                </a:solidFill>
+              </a:rPr>
+              <a:t>Preprocessed data</a:t>
+            </a:r>
+          </a:p>
+        </p:txBody>
+      </p:sp>
+      <p:sp>
+        <p:nvSpPr>
+          <p:cNvPr id="42" name="Title 1">
+            <a:extLst>
+              <a:ext uri="{FF2B5EF4-FFF2-40B4-BE49-F238E27FC236}">
+                <a16:creationId xmlns:a16="http://schemas.microsoft.com/office/drawing/2014/main" id="{652A0FCA-F8D2-1967-56E2-8B43DDC82E23}"/>
               </a:ext>
             </a:extLst>
           </p:cNvPr>
@@ -13128,141 +16874,904 @@
             <a:spLocks noGrp="1"/>
           </p:cNvSpPr>
           <p:nvPr>
-            <p:ph type="title"/>
+            <p:ph type="ctrTitle"/>
           </p:nvPr>
         </p:nvSpPr>
-        <p:spPr/>
+        <p:spPr>
+          <a:xfrm>
+            <a:off x="1226740" y="165234"/>
+            <a:ext cx="9264649" cy="938530"/>
+          </a:xfrm>
+        </p:spPr>
         <p:txBody>
           <a:bodyPr/>
           <a:lstStyle/>
           <a:p>
             <a:r>
-              <a:rPr lang="en-US" dirty="0"/>
-              <a:t>Effective delivery techniques</a:t>
-            </a:r>
-          </a:p>
-        </p:txBody>
-      </p:sp>
-      <p:sp>
-        <p:nvSpPr>
-          <p:cNvPr id="34" name="Content Placeholder 33">
+              <a:rPr lang="en-US" sz="2800" dirty="0"/>
+              <a:t>NET DATA PREPARATION &amp; MODEL INPUT</a:t>
+            </a:r>
+          </a:p>
+        </p:txBody>
+      </p:sp>
+      <p:sp>
+        <p:nvSpPr>
+          <p:cNvPr id="17" name="Parallelogram 16">
             <a:extLst>
               <a:ext uri="{FF2B5EF4-FFF2-40B4-BE49-F238E27FC236}">
-                <a16:creationId xmlns:a16="http://schemas.microsoft.com/office/drawing/2014/main" id="{C69167C3-302B-24DE-9CF7-D85D5D5DD20A}"/>
+                <a16:creationId xmlns:a16="http://schemas.microsoft.com/office/drawing/2014/main" id="{467DD7EE-7359-41F7-E99C-7FCCA8E615C6}"/>
               </a:ext>
             </a:extLst>
           </p:cNvPr>
-          <p:cNvSpPr>
-            <a:spLocks noGrp="1"/>
-          </p:cNvSpPr>
-          <p:nvPr>
-            <p:ph sz="half" idx="13"/>
-          </p:nvPr>
-        </p:nvSpPr>
-        <p:spPr/>
-        <p:txBody>
-          <a:bodyPr/>
+          <p:cNvSpPr/>
+          <p:nvPr/>
+        </p:nvSpPr>
+        <p:spPr>
+          <a:xfrm>
+            <a:off x="2368963" y="5665506"/>
+            <a:ext cx="1584324" cy="762000"/>
+          </a:xfrm>
+          <a:prstGeom prst="parallelogram">
+            <a:avLst/>
+          </a:prstGeom>
+          <a:solidFill>
+            <a:schemeClr val="accent6">
+              <a:lumMod val="60000"/>
+              <a:lumOff val="40000"/>
+            </a:schemeClr>
+          </a:solidFill>
+          <a:ln>
+            <a:noFill/>
+          </a:ln>
+        </p:spPr>
+        <p:style>
+          <a:lnRef idx="1">
+            <a:schemeClr val="accent5"/>
+          </a:lnRef>
+          <a:fillRef idx="3">
+            <a:schemeClr val="accent5"/>
+          </a:fillRef>
+          <a:effectRef idx="2">
+            <a:schemeClr val="accent5"/>
+          </a:effectRef>
+          <a:fontRef idx="minor">
+            <a:schemeClr val="lt1"/>
+          </a:fontRef>
+        </p:style>
+        <p:txBody>
+          <a:bodyPr rtlCol="0" anchor="ctr"/>
           <a:lstStyle/>
           <a:p>
-            <a:r>
-              <a:rPr lang="en-US" dirty="0"/>
-              <a:t>This is a powerful tool in public speaking. It involves varying pitch, tone, and volume to convey emotion, emphasize points, and maintain interest. </a:t>
-            </a:r>
-          </a:p>
-          <a:p>
-            <a:r>
-              <a:rPr lang="en-US" dirty="0"/>
-              <a:t>Pitch variation</a:t>
-            </a:r>
-          </a:p>
-          <a:p>
-            <a:r>
-              <a:rPr lang="en-US" dirty="0"/>
-              <a:t>Tone inflection</a:t>
-            </a:r>
-          </a:p>
-          <a:p>
-            <a:r>
-              <a:rPr lang="en-US" dirty="0"/>
-              <a:t>Volume control</a:t>
-            </a:r>
-          </a:p>
-          <a:p>
-            <a:endParaRPr lang="en-US" dirty="0"/>
-          </a:p>
-        </p:txBody>
-      </p:sp>
-      <p:sp>
-        <p:nvSpPr>
-          <p:cNvPr id="20" name="Content Placeholder 3">
+            <a:pPr algn="ctr"/>
+            <a:r>
+              <a:rPr lang="en-US" sz="1400" dirty="0" err="1">
+                <a:solidFill>
+                  <a:schemeClr val="bg1"/>
+                </a:solidFill>
+              </a:rPr>
+              <a:t>val</a:t>
+            </a:r>
+            <a:r>
+              <a:rPr lang="en-US" sz="1400" dirty="0">
+                <a:solidFill>
+                  <a:schemeClr val="bg1"/>
+                </a:solidFill>
+              </a:rPr>
+              <a:t>/test data</a:t>
+            </a:r>
+          </a:p>
+        </p:txBody>
+      </p:sp>
+      <p:sp>
+        <p:nvSpPr>
+          <p:cNvPr id="24" name="Parallelogram 23">
             <a:extLst>
               <a:ext uri="{FF2B5EF4-FFF2-40B4-BE49-F238E27FC236}">
-                <a16:creationId xmlns:a16="http://schemas.microsoft.com/office/drawing/2014/main" id="{7C987B03-58AE-7E8A-A1C7-83569FBBCD1F}"/>
+                <a16:creationId xmlns:a16="http://schemas.microsoft.com/office/drawing/2014/main" id="{A6A24DCF-9885-84C1-D5B9-836C3CA6983D}"/>
               </a:ext>
             </a:extLst>
           </p:cNvPr>
-          <p:cNvSpPr>
-            <a:spLocks noGrp="1"/>
-          </p:cNvSpPr>
-          <p:nvPr>
-            <p:ph sz="half" idx="2"/>
-          </p:nvPr>
+          <p:cNvSpPr/>
+          <p:nvPr/>
         </p:nvSpPr>
         <p:spPr>
-          <a:noFill/>
+          <a:xfrm>
+            <a:off x="2368963" y="2368900"/>
+            <a:ext cx="1584324" cy="762000"/>
+          </a:xfrm>
+          <a:prstGeom prst="parallelogram">
+            <a:avLst/>
+          </a:prstGeom>
+          <a:solidFill>
+            <a:schemeClr val="accent6">
+              <a:lumMod val="60000"/>
+              <a:lumOff val="40000"/>
+            </a:schemeClr>
+          </a:solidFill>
+          <a:ln>
+            <a:noFill/>
+          </a:ln>
         </p:spPr>
-        <p:txBody>
-          <a:bodyPr>
-            <a:normAutofit/>
-          </a:bodyPr>
+        <p:style>
+          <a:lnRef idx="1">
+            <a:schemeClr val="accent5"/>
+          </a:lnRef>
+          <a:fillRef idx="3">
+            <a:schemeClr val="accent5"/>
+          </a:fillRef>
+          <a:effectRef idx="2">
+            <a:schemeClr val="accent5"/>
+          </a:effectRef>
+          <a:fontRef idx="minor">
+            <a:schemeClr val="lt1"/>
+          </a:fontRef>
+        </p:style>
+        <p:txBody>
+          <a:bodyPr rtlCol="0" anchor="ctr"/>
           <a:lstStyle/>
           <a:p>
-            <a:r>
-              <a:rPr lang="en-US" dirty="0"/>
-              <a:t>Effective body language enhances your message, </a:t>
-            </a:r>
-            <a:br>
-              <a:rPr lang="en-US" dirty="0"/>
-            </a:br>
-            <a:r>
-              <a:rPr lang="en-US" dirty="0"/>
-              <a:t>making it more impactful and memorable.</a:t>
-            </a:r>
-          </a:p>
-          <a:p>
-            <a:pPr lvl="1"/>
-            <a:r>
-              <a:rPr lang="en-US" dirty="0"/>
-              <a:t>Meaningful eye contact</a:t>
-            </a:r>
-          </a:p>
-          <a:p>
-            <a:pPr lvl="1"/>
-            <a:r>
-              <a:rPr lang="en-US" dirty="0"/>
-              <a:t>Purposeful gestures</a:t>
-            </a:r>
-          </a:p>
-          <a:p>
-            <a:pPr lvl="1"/>
-            <a:r>
-              <a:rPr lang="en-US" dirty="0"/>
-              <a:t>Maintain good posture</a:t>
-            </a:r>
-          </a:p>
-          <a:p>
-            <a:pPr lvl="1"/>
-            <a:r>
-              <a:rPr lang="en-US" dirty="0"/>
-              <a:t>Control your expressions</a:t>
-            </a:r>
-          </a:p>
-        </p:txBody>
-      </p:sp>
+            <a:pPr algn="ctr"/>
+            <a:r>
+              <a:rPr lang="en-US" sz="1400" dirty="0">
+                <a:solidFill>
+                  <a:schemeClr val="bg1"/>
+                </a:solidFill>
+              </a:rPr>
+              <a:t>train data</a:t>
+            </a:r>
+          </a:p>
+        </p:txBody>
+      </p:sp>
+      <p:sp>
+        <p:nvSpPr>
+          <p:cNvPr id="31" name="Rectangle 30">
+            <a:extLst>
+              <a:ext uri="{FF2B5EF4-FFF2-40B4-BE49-F238E27FC236}">
+                <a16:creationId xmlns:a16="http://schemas.microsoft.com/office/drawing/2014/main" id="{3DBE5F5E-DCCF-27CB-7FB2-F3FFC6BC7097}"/>
+              </a:ext>
+            </a:extLst>
+          </p:cNvPr>
+          <p:cNvSpPr/>
+          <p:nvPr/>
+        </p:nvSpPr>
+        <p:spPr>
+          <a:xfrm>
+            <a:off x="4510919" y="3114452"/>
+            <a:ext cx="2189932" cy="1418927"/>
+          </a:xfrm>
+          <a:prstGeom prst="rect">
+            <a:avLst/>
+          </a:prstGeom>
+          <a:solidFill>
+            <a:schemeClr val="bg1">
+              <a:lumMod val="95000"/>
+            </a:schemeClr>
+          </a:solidFill>
+          <a:ln>
+            <a:noFill/>
+          </a:ln>
+        </p:spPr>
+        <p:style>
+          <a:lnRef idx="2">
+            <a:schemeClr val="accent1">
+              <a:shade val="15000"/>
+            </a:schemeClr>
+          </a:lnRef>
+          <a:fillRef idx="1">
+            <a:schemeClr val="accent1"/>
+          </a:fillRef>
+          <a:effectRef idx="0">
+            <a:schemeClr val="accent1"/>
+          </a:effectRef>
+          <a:fontRef idx="minor">
+            <a:schemeClr val="lt1"/>
+          </a:fontRef>
+        </p:style>
+        <p:txBody>
+          <a:bodyPr rtlCol="0" anchor="ctr"/>
+          <a:lstStyle/>
+          <a:p>
+            <a:pPr marL="171450" indent="-171450">
+              <a:buFont typeface="Arial" panose="020B0604020202020204" pitchFamily="34" charset="0"/>
+              <a:buChar char="•"/>
+            </a:pPr>
+            <a:r>
+              <a:rPr lang="en-US" sz="1100" dirty="0">
+                <a:solidFill>
+                  <a:schemeClr val="bg2">
+                    <a:lumMod val="50000"/>
+                  </a:schemeClr>
+                </a:solidFill>
+              </a:rPr>
+              <a:t>Random </a:t>
+            </a:r>
+            <a:r>
+              <a:rPr lang="en-US" sz="1100" b="1" dirty="0">
+                <a:solidFill>
+                  <a:schemeClr val="bg2">
+                    <a:lumMod val="50000"/>
+                  </a:schemeClr>
+                </a:solidFill>
+              </a:rPr>
+              <a:t>extraction of 3D patches</a:t>
+            </a:r>
+            <a:r>
+              <a:rPr lang="en-US" sz="1100" dirty="0">
+                <a:solidFill>
+                  <a:schemeClr val="bg2">
+                    <a:lumMod val="50000"/>
+                  </a:schemeClr>
+                </a:solidFill>
+              </a:rPr>
+              <a:t> (128×128×64 voxels) from images for memory </a:t>
+            </a:r>
+            <a:r>
+              <a:rPr lang="en-US" sz="1100" dirty="0" err="1">
+                <a:solidFill>
+                  <a:schemeClr val="bg2">
+                    <a:lumMod val="50000"/>
+                  </a:schemeClr>
+                </a:solidFill>
+              </a:rPr>
+              <a:t>porpouses</a:t>
+            </a:r>
+            <a:endParaRPr lang="en-US" sz="1100" dirty="0">
+              <a:solidFill>
+                <a:schemeClr val="bg2">
+                  <a:lumMod val="50000"/>
+                </a:schemeClr>
+              </a:solidFill>
+            </a:endParaRPr>
+          </a:p>
+          <a:p>
+            <a:pPr marL="171450" indent="-171450">
+              <a:buFont typeface="Arial" panose="020B0604020202020204" pitchFamily="34" charset="0"/>
+              <a:buChar char="•"/>
+            </a:pPr>
+            <a:r>
+              <a:rPr lang="en-US" sz="1100" dirty="0">
+                <a:solidFill>
+                  <a:schemeClr val="bg2">
+                    <a:lumMod val="50000"/>
+                  </a:schemeClr>
+                </a:solidFill>
+              </a:rPr>
+              <a:t>1:1 positive-to-negative ratio is taken into account to increase representation of target regions.</a:t>
+            </a:r>
+          </a:p>
+        </p:txBody>
+      </p:sp>
+      <p:sp>
+        <p:nvSpPr>
+          <p:cNvPr id="53" name="Parallelogram 52">
+            <a:extLst>
+              <a:ext uri="{FF2B5EF4-FFF2-40B4-BE49-F238E27FC236}">
+                <a16:creationId xmlns:a16="http://schemas.microsoft.com/office/drawing/2014/main" id="{E82A2873-EBEF-CD31-592D-575EA100AFCB}"/>
+              </a:ext>
+            </a:extLst>
+          </p:cNvPr>
+          <p:cNvSpPr/>
+          <p:nvPr/>
+        </p:nvSpPr>
+        <p:spPr>
+          <a:xfrm>
+            <a:off x="8824094" y="3739431"/>
+            <a:ext cx="1997885" cy="1109979"/>
+          </a:xfrm>
+          <a:prstGeom prst="parallelogram">
+            <a:avLst/>
+          </a:prstGeom>
+          <a:solidFill>
+            <a:srgbClr val="00B0F0"/>
+          </a:solidFill>
+          <a:ln>
+            <a:noFill/>
+          </a:ln>
+        </p:spPr>
+        <p:style>
+          <a:lnRef idx="1">
+            <a:schemeClr val="accent5"/>
+          </a:lnRef>
+          <a:fillRef idx="3">
+            <a:schemeClr val="accent5"/>
+          </a:fillRef>
+          <a:effectRef idx="2">
+            <a:schemeClr val="accent5"/>
+          </a:effectRef>
+          <a:fontRef idx="minor">
+            <a:schemeClr val="lt1"/>
+          </a:fontRef>
+        </p:style>
+        <p:txBody>
+          <a:bodyPr rtlCol="0" anchor="ctr"/>
+          <a:lstStyle/>
+          <a:p>
+            <a:pPr algn="ctr"/>
+            <a:r>
+              <a:rPr lang="en-US" sz="1600" dirty="0"/>
+              <a:t>U-NET training loop</a:t>
+            </a:r>
+          </a:p>
+        </p:txBody>
+      </p:sp>
+      <p:sp>
+        <p:nvSpPr>
+          <p:cNvPr id="57" name="Rectangle: Rounded Corners 56">
+            <a:extLst>
+              <a:ext uri="{FF2B5EF4-FFF2-40B4-BE49-F238E27FC236}">
+                <a16:creationId xmlns:a16="http://schemas.microsoft.com/office/drawing/2014/main" id="{E5BAEE51-2A0B-2A21-58CF-50F280B302A1}"/>
+              </a:ext>
+            </a:extLst>
+          </p:cNvPr>
+          <p:cNvSpPr/>
+          <p:nvPr/>
+        </p:nvSpPr>
+        <p:spPr>
+          <a:xfrm>
+            <a:off x="2368963" y="4228575"/>
+            <a:ext cx="1584324" cy="431637"/>
+          </a:xfrm>
+          <a:prstGeom prst="roundRect">
+            <a:avLst/>
+          </a:prstGeom>
+          <a:solidFill>
+            <a:srgbClr val="969FA7"/>
+          </a:solidFill>
+          <a:ln>
+            <a:noFill/>
+          </a:ln>
+        </p:spPr>
+        <p:style>
+          <a:lnRef idx="2">
+            <a:schemeClr val="accent1">
+              <a:shade val="15000"/>
+            </a:schemeClr>
+          </a:lnRef>
+          <a:fillRef idx="1">
+            <a:schemeClr val="accent1"/>
+          </a:fillRef>
+          <a:effectRef idx="0">
+            <a:schemeClr val="accent1"/>
+          </a:effectRef>
+          <a:fontRef idx="minor">
+            <a:schemeClr val="lt1"/>
+          </a:fontRef>
+        </p:style>
+        <p:txBody>
+          <a:bodyPr rtlCol="0" anchor="ctr"/>
+          <a:lstStyle/>
+          <a:p>
+            <a:pPr algn="ctr"/>
+            <a:r>
+              <a:rPr lang="en-US" sz="1400" dirty="0"/>
+              <a:t>Train/</a:t>
+            </a:r>
+            <a:r>
+              <a:rPr lang="en-US" sz="1400" dirty="0" err="1"/>
+              <a:t>val</a:t>
+            </a:r>
+            <a:r>
+              <a:rPr lang="en-US" sz="1400" dirty="0"/>
+              <a:t>/test split</a:t>
+            </a:r>
+          </a:p>
+        </p:txBody>
+      </p:sp>
+      <p:cxnSp>
+        <p:nvCxnSpPr>
+          <p:cNvPr id="61" name="Straight Arrow Connector 60">
+            <a:extLst>
+              <a:ext uri="{FF2B5EF4-FFF2-40B4-BE49-F238E27FC236}">
+                <a16:creationId xmlns:a16="http://schemas.microsoft.com/office/drawing/2014/main" id="{3B74D1EB-D297-8B68-4C85-DD2F3E24734F}"/>
+              </a:ext>
+            </a:extLst>
+          </p:cNvPr>
+          <p:cNvCxnSpPr>
+            <a:cxnSpLocks/>
+            <a:stCxn id="57" idx="0"/>
+            <a:endCxn id="24" idx="4"/>
+          </p:cNvCxnSpPr>
+          <p:nvPr/>
+        </p:nvCxnSpPr>
+        <p:spPr>
+          <a:xfrm flipV="1">
+            <a:off x="3161125" y="3130900"/>
+            <a:ext cx="0" cy="1097675"/>
+          </a:xfrm>
+          <a:prstGeom prst="straightConnector1">
+            <a:avLst/>
+          </a:prstGeom>
+          <a:ln>
+            <a:tailEnd type="triangle"/>
+          </a:ln>
+        </p:spPr>
+        <p:style>
+          <a:lnRef idx="1">
+            <a:schemeClr val="accent1"/>
+          </a:lnRef>
+          <a:fillRef idx="0">
+            <a:schemeClr val="accent1"/>
+          </a:fillRef>
+          <a:effectRef idx="0">
+            <a:schemeClr val="accent1"/>
+          </a:effectRef>
+          <a:fontRef idx="minor">
+            <a:schemeClr val="tx1"/>
+          </a:fontRef>
+        </p:style>
+      </p:cxnSp>
+      <p:cxnSp>
+        <p:nvCxnSpPr>
+          <p:cNvPr id="71" name="Straight Arrow Connector 70">
+            <a:extLst>
+              <a:ext uri="{FF2B5EF4-FFF2-40B4-BE49-F238E27FC236}">
+                <a16:creationId xmlns:a16="http://schemas.microsoft.com/office/drawing/2014/main" id="{E94087FF-4143-BF84-DFBD-BF8E1F1276AD}"/>
+              </a:ext>
+            </a:extLst>
+          </p:cNvPr>
+          <p:cNvCxnSpPr>
+            <a:cxnSpLocks/>
+            <a:endCxn id="17" idx="0"/>
+          </p:cNvCxnSpPr>
+          <p:nvPr/>
+        </p:nvCxnSpPr>
+        <p:spPr>
+          <a:xfrm>
+            <a:off x="3161125" y="5416550"/>
+            <a:ext cx="0" cy="248956"/>
+          </a:xfrm>
+          <a:prstGeom prst="straightConnector1">
+            <a:avLst/>
+          </a:prstGeom>
+          <a:ln>
+            <a:tailEnd type="triangle"/>
+          </a:ln>
+        </p:spPr>
+        <p:style>
+          <a:lnRef idx="1">
+            <a:schemeClr val="accent1"/>
+          </a:lnRef>
+          <a:fillRef idx="0">
+            <a:schemeClr val="accent1"/>
+          </a:fillRef>
+          <a:effectRef idx="0">
+            <a:schemeClr val="accent1"/>
+          </a:effectRef>
+          <a:fontRef idx="minor">
+            <a:schemeClr val="tx1"/>
+          </a:fontRef>
+        </p:style>
+      </p:cxnSp>
+      <p:cxnSp>
+        <p:nvCxnSpPr>
+          <p:cNvPr id="73" name="Straight Arrow Connector 72">
+            <a:extLst>
+              <a:ext uri="{FF2B5EF4-FFF2-40B4-BE49-F238E27FC236}">
+                <a16:creationId xmlns:a16="http://schemas.microsoft.com/office/drawing/2014/main" id="{58306E90-E602-9C9D-C1A3-75B12A4DCFBC}"/>
+              </a:ext>
+            </a:extLst>
+          </p:cNvPr>
+          <p:cNvCxnSpPr>
+            <a:cxnSpLocks/>
+            <a:endCxn id="121" idx="1"/>
+          </p:cNvCxnSpPr>
+          <p:nvPr/>
+        </p:nvCxnSpPr>
+        <p:spPr>
+          <a:xfrm flipV="1">
+            <a:off x="1657179" y="4702930"/>
+            <a:ext cx="609773" cy="2961"/>
+          </a:xfrm>
+          <a:prstGeom prst="straightConnector1">
+            <a:avLst/>
+          </a:prstGeom>
+          <a:ln>
+            <a:tailEnd type="triangle"/>
+          </a:ln>
+        </p:spPr>
+        <p:style>
+          <a:lnRef idx="1">
+            <a:schemeClr val="accent1"/>
+          </a:lnRef>
+          <a:fillRef idx="0">
+            <a:schemeClr val="accent1"/>
+          </a:fillRef>
+          <a:effectRef idx="0">
+            <a:schemeClr val="accent1"/>
+          </a:effectRef>
+          <a:fontRef idx="minor">
+            <a:schemeClr val="tx1"/>
+          </a:fontRef>
+        </p:style>
+      </p:cxnSp>
+      <p:cxnSp>
+        <p:nvCxnSpPr>
+          <p:cNvPr id="81" name="Straight Arrow Connector 80">
+            <a:extLst>
+              <a:ext uri="{FF2B5EF4-FFF2-40B4-BE49-F238E27FC236}">
+                <a16:creationId xmlns:a16="http://schemas.microsoft.com/office/drawing/2014/main" id="{0A57EA45-8733-44A5-67BC-9411395DE54A}"/>
+              </a:ext>
+            </a:extLst>
+          </p:cNvPr>
+          <p:cNvCxnSpPr>
+            <a:cxnSpLocks/>
+            <a:endCxn id="4" idx="5"/>
+          </p:cNvCxnSpPr>
+          <p:nvPr/>
+        </p:nvCxnSpPr>
+        <p:spPr>
+          <a:xfrm>
+            <a:off x="3868371" y="2739015"/>
+            <a:ext cx="1099739" cy="0"/>
+          </a:xfrm>
+          <a:prstGeom prst="straightConnector1">
+            <a:avLst/>
+          </a:prstGeom>
+          <a:ln>
+            <a:tailEnd type="triangle"/>
+          </a:ln>
+        </p:spPr>
+        <p:style>
+          <a:lnRef idx="1">
+            <a:schemeClr val="accent1"/>
+          </a:lnRef>
+          <a:fillRef idx="0">
+            <a:schemeClr val="accent1"/>
+          </a:fillRef>
+          <a:effectRef idx="0">
+            <a:schemeClr val="accent1"/>
+          </a:effectRef>
+          <a:fontRef idx="minor">
+            <a:schemeClr val="tx1"/>
+          </a:fontRef>
+        </p:style>
+      </p:cxnSp>
+      <p:pic>
+        <p:nvPicPr>
+          <p:cNvPr id="99" name="Picture 98">
+            <a:extLst>
+              <a:ext uri="{FF2B5EF4-FFF2-40B4-BE49-F238E27FC236}">
+                <a16:creationId xmlns:a16="http://schemas.microsoft.com/office/drawing/2014/main" id="{7DF78F0D-612E-7A27-BB07-AE350EB10B31}"/>
+              </a:ext>
+            </a:extLst>
+          </p:cNvPr>
+          <p:cNvPicPr>
+            <a:picLocks noChangeAspect="1"/>
+          </p:cNvPicPr>
+          <p:nvPr/>
+        </p:nvPicPr>
+        <p:blipFill>
+          <a:blip r:embed="rId3"/>
+          <a:stretch>
+            <a:fillRect/>
+          </a:stretch>
+        </p:blipFill>
+        <p:spPr>
+          <a:xfrm>
+            <a:off x="9100437" y="2774952"/>
+            <a:ext cx="1610992" cy="711895"/>
+          </a:xfrm>
+          <a:prstGeom prst="rect">
+            <a:avLst/>
+          </a:prstGeom>
+        </p:spPr>
+      </p:pic>
+      <p:sp>
+        <p:nvSpPr>
+          <p:cNvPr id="101" name="Rectangle: Rounded Corners 100">
+            <a:extLst>
+              <a:ext uri="{FF2B5EF4-FFF2-40B4-BE49-F238E27FC236}">
+                <a16:creationId xmlns:a16="http://schemas.microsoft.com/office/drawing/2014/main" id="{F895A95E-BC54-8DE1-B116-F1B560E08D2F}"/>
+              </a:ext>
+            </a:extLst>
+          </p:cNvPr>
+          <p:cNvSpPr/>
+          <p:nvPr/>
+        </p:nvSpPr>
+        <p:spPr>
+          <a:xfrm>
+            <a:off x="6798864" y="5685862"/>
+            <a:ext cx="1584324" cy="673819"/>
+          </a:xfrm>
+          <a:prstGeom prst="roundRect">
+            <a:avLst/>
+          </a:prstGeom>
+          <a:solidFill>
+            <a:srgbClr val="969FA7"/>
+          </a:solidFill>
+          <a:ln>
+            <a:noFill/>
+          </a:ln>
+        </p:spPr>
+        <p:style>
+          <a:lnRef idx="2">
+            <a:schemeClr val="accent1">
+              <a:shade val="15000"/>
+            </a:schemeClr>
+          </a:lnRef>
+          <a:fillRef idx="1">
+            <a:schemeClr val="accent1"/>
+          </a:fillRef>
+          <a:effectRef idx="0">
+            <a:schemeClr val="accent1"/>
+          </a:effectRef>
+          <a:fontRef idx="minor">
+            <a:schemeClr val="lt1"/>
+          </a:fontRef>
+        </p:style>
+        <p:txBody>
+          <a:bodyPr rtlCol="0" anchor="ctr"/>
+          <a:lstStyle/>
+          <a:p>
+            <a:pPr algn="ctr"/>
+            <a:r>
+              <a:rPr lang="en-US" sz="1400" dirty="0" err="1"/>
+              <a:t>val</a:t>
+            </a:r>
+            <a:r>
+              <a:rPr lang="en-US" sz="1400" dirty="0"/>
+              <a:t>/test data loader building</a:t>
+            </a:r>
+          </a:p>
+        </p:txBody>
+      </p:sp>
+      <p:sp>
+        <p:nvSpPr>
+          <p:cNvPr id="103" name="Rectangle: Rounded Corners 102">
+            <a:extLst>
+              <a:ext uri="{FF2B5EF4-FFF2-40B4-BE49-F238E27FC236}">
+                <a16:creationId xmlns:a16="http://schemas.microsoft.com/office/drawing/2014/main" id="{BB5B6607-7042-953D-4683-B5F922C12B4F}"/>
+              </a:ext>
+            </a:extLst>
+          </p:cNvPr>
+          <p:cNvSpPr/>
+          <p:nvPr/>
+        </p:nvSpPr>
+        <p:spPr>
+          <a:xfrm>
+            <a:off x="6798864" y="2402105"/>
+            <a:ext cx="1584324" cy="673819"/>
+          </a:xfrm>
+          <a:prstGeom prst="roundRect">
+            <a:avLst/>
+          </a:prstGeom>
+          <a:solidFill>
+            <a:srgbClr val="969FA7"/>
+          </a:solidFill>
+          <a:ln>
+            <a:noFill/>
+          </a:ln>
+        </p:spPr>
+        <p:style>
+          <a:lnRef idx="2">
+            <a:schemeClr val="accent1">
+              <a:shade val="15000"/>
+            </a:schemeClr>
+          </a:lnRef>
+          <a:fillRef idx="1">
+            <a:schemeClr val="accent1"/>
+          </a:fillRef>
+          <a:effectRef idx="0">
+            <a:schemeClr val="accent1"/>
+          </a:effectRef>
+          <a:fontRef idx="minor">
+            <a:schemeClr val="lt1"/>
+          </a:fontRef>
+        </p:style>
+        <p:txBody>
+          <a:bodyPr rtlCol="0" anchor="ctr"/>
+          <a:lstStyle/>
+          <a:p>
+            <a:pPr algn="ctr"/>
+            <a:r>
+              <a:rPr lang="en-US" sz="1400" dirty="0"/>
+              <a:t>train data loader building</a:t>
+            </a:r>
+          </a:p>
+        </p:txBody>
+      </p:sp>
+      <p:cxnSp>
+        <p:nvCxnSpPr>
+          <p:cNvPr id="104" name="Straight Arrow Connector 103">
+            <a:extLst>
+              <a:ext uri="{FF2B5EF4-FFF2-40B4-BE49-F238E27FC236}">
+                <a16:creationId xmlns:a16="http://schemas.microsoft.com/office/drawing/2014/main" id="{86983314-1820-B309-9A97-9AA5B0D96F6A}"/>
+              </a:ext>
+            </a:extLst>
+          </p:cNvPr>
+          <p:cNvCxnSpPr>
+            <a:cxnSpLocks/>
+            <a:endCxn id="103" idx="1"/>
+          </p:cNvCxnSpPr>
+          <p:nvPr/>
+        </p:nvCxnSpPr>
+        <p:spPr>
+          <a:xfrm flipV="1">
+            <a:off x="6248994" y="2739015"/>
+            <a:ext cx="549870" cy="4885"/>
+          </a:xfrm>
+          <a:prstGeom prst="straightConnector1">
+            <a:avLst/>
+          </a:prstGeom>
+          <a:ln>
+            <a:tailEnd type="triangle"/>
+          </a:ln>
+        </p:spPr>
+        <p:style>
+          <a:lnRef idx="1">
+            <a:schemeClr val="accent1"/>
+          </a:lnRef>
+          <a:fillRef idx="0">
+            <a:schemeClr val="accent1"/>
+          </a:fillRef>
+          <a:effectRef idx="0">
+            <a:schemeClr val="accent1"/>
+          </a:effectRef>
+          <a:fontRef idx="minor">
+            <a:schemeClr val="tx1"/>
+          </a:fontRef>
+        </p:style>
+      </p:cxnSp>
+      <p:cxnSp>
+        <p:nvCxnSpPr>
+          <p:cNvPr id="106" name="Straight Arrow Connector 105">
+            <a:extLst>
+              <a:ext uri="{FF2B5EF4-FFF2-40B4-BE49-F238E27FC236}">
+                <a16:creationId xmlns:a16="http://schemas.microsoft.com/office/drawing/2014/main" id="{1E726E05-6710-77A0-D1B9-A5897B69FBEA}"/>
+              </a:ext>
+            </a:extLst>
+          </p:cNvPr>
+          <p:cNvCxnSpPr>
+            <a:cxnSpLocks/>
+            <a:stCxn id="17" idx="2"/>
+            <a:endCxn id="101" idx="1"/>
+          </p:cNvCxnSpPr>
+          <p:nvPr/>
+        </p:nvCxnSpPr>
+        <p:spPr>
+          <a:xfrm flipV="1">
+            <a:off x="3858037" y="6022772"/>
+            <a:ext cx="2940827" cy="23734"/>
+          </a:xfrm>
+          <a:prstGeom prst="straightConnector1">
+            <a:avLst/>
+          </a:prstGeom>
+          <a:ln>
+            <a:tailEnd type="triangle"/>
+          </a:ln>
+        </p:spPr>
+        <p:style>
+          <a:lnRef idx="1">
+            <a:schemeClr val="accent1"/>
+          </a:lnRef>
+          <a:fillRef idx="0">
+            <a:schemeClr val="accent1"/>
+          </a:fillRef>
+          <a:effectRef idx="0">
+            <a:schemeClr val="accent1"/>
+          </a:effectRef>
+          <a:fontRef idx="minor">
+            <a:schemeClr val="tx1"/>
+          </a:fontRef>
+        </p:style>
+      </p:cxnSp>
+      <p:cxnSp>
+        <p:nvCxnSpPr>
+          <p:cNvPr id="114" name="Connector: Elbow 113">
+            <a:extLst>
+              <a:ext uri="{FF2B5EF4-FFF2-40B4-BE49-F238E27FC236}">
+                <a16:creationId xmlns:a16="http://schemas.microsoft.com/office/drawing/2014/main" id="{12723689-F6E5-3C99-BAC5-6733123C3AED}"/>
+              </a:ext>
+            </a:extLst>
+          </p:cNvPr>
+          <p:cNvCxnSpPr>
+            <a:stCxn id="101" idx="0"/>
+            <a:endCxn id="53" idx="5"/>
+          </p:cNvCxnSpPr>
+          <p:nvPr/>
+        </p:nvCxnSpPr>
+        <p:spPr>
+          <a:xfrm rot="5400000" flipH="1" flipV="1">
+            <a:off x="7581213" y="4304235"/>
+            <a:ext cx="1391441" cy="1371815"/>
+          </a:xfrm>
+          <a:prstGeom prst="bentConnector2">
+            <a:avLst/>
+          </a:prstGeom>
+          <a:ln>
+            <a:tailEnd type="triangle"/>
+          </a:ln>
+        </p:spPr>
+        <p:style>
+          <a:lnRef idx="1">
+            <a:schemeClr val="accent1"/>
+          </a:lnRef>
+          <a:fillRef idx="0">
+            <a:schemeClr val="accent1"/>
+          </a:fillRef>
+          <a:effectRef idx="0">
+            <a:schemeClr val="accent1"/>
+          </a:effectRef>
+          <a:fontRef idx="minor">
+            <a:schemeClr val="tx1"/>
+          </a:fontRef>
+        </p:style>
+      </p:cxnSp>
+      <p:cxnSp>
+        <p:nvCxnSpPr>
+          <p:cNvPr id="116" name="Connector: Elbow 115">
+            <a:extLst>
+              <a:ext uri="{FF2B5EF4-FFF2-40B4-BE49-F238E27FC236}">
+                <a16:creationId xmlns:a16="http://schemas.microsoft.com/office/drawing/2014/main" id="{0225CEA6-F534-658B-4422-005EAF3DDEF1}"/>
+              </a:ext>
+            </a:extLst>
+          </p:cNvPr>
+          <p:cNvCxnSpPr>
+            <a:cxnSpLocks/>
+          </p:cNvCxnSpPr>
+          <p:nvPr/>
+        </p:nvCxnSpPr>
+        <p:spPr>
+          <a:xfrm rot="16200000" flipH="1">
+            <a:off x="7667684" y="2999265"/>
+            <a:ext cx="1218497" cy="1371815"/>
+          </a:xfrm>
+          <a:prstGeom prst="bentConnector2">
+            <a:avLst/>
+          </a:prstGeom>
+          <a:ln>
+            <a:tailEnd type="triangle"/>
+          </a:ln>
+        </p:spPr>
+        <p:style>
+          <a:lnRef idx="1">
+            <a:schemeClr val="accent1"/>
+          </a:lnRef>
+          <a:fillRef idx="0">
+            <a:schemeClr val="accent1"/>
+          </a:fillRef>
+          <a:effectRef idx="0">
+            <a:schemeClr val="accent1"/>
+          </a:effectRef>
+          <a:fontRef idx="minor">
+            <a:schemeClr val="tx1"/>
+          </a:fontRef>
+        </p:style>
+      </p:cxnSp>
+      <p:pic>
+        <p:nvPicPr>
+          <p:cNvPr id="128" name="Picture 127">
+            <a:extLst>
+              <a:ext uri="{FF2B5EF4-FFF2-40B4-BE49-F238E27FC236}">
+                <a16:creationId xmlns:a16="http://schemas.microsoft.com/office/drawing/2014/main" id="{3C018D5C-C1C7-3A54-2367-C75A36B448B9}"/>
+              </a:ext>
+            </a:extLst>
+          </p:cNvPr>
+          <p:cNvPicPr>
+            <a:picLocks noChangeAspect="1"/>
+          </p:cNvPicPr>
+          <p:nvPr/>
+        </p:nvPicPr>
+        <p:blipFill>
+          <a:blip r:embed="rId4"/>
+          <a:stretch>
+            <a:fillRect/>
+          </a:stretch>
+        </p:blipFill>
+        <p:spPr>
+          <a:xfrm>
+            <a:off x="5152780" y="1125132"/>
+            <a:ext cx="1096214" cy="1206179"/>
+          </a:xfrm>
+          <a:prstGeom prst="rect">
+            <a:avLst/>
+          </a:prstGeom>
+        </p:spPr>
+      </p:pic>
     </p:spTree>
     <p:extLst>
       <p:ext uri="{BB962C8B-B14F-4D97-AF65-F5344CB8AC3E}">
-        <p14:creationId xmlns:p14="http://schemas.microsoft.com/office/powerpoint/2010/main" val="837402205"/>
+        <p14:creationId xmlns:p14="http://schemas.microsoft.com/office/powerpoint/2010/main" val="1010221134"/>
       </p:ext>
     </p:extLst>
   </p:cSld>
@@ -13291,10 +17800,2348 @@
       </p:grpSpPr>
       <p:sp>
         <p:nvSpPr>
-          <p:cNvPr id="17" name="Title 16">
+          <p:cNvPr id="29" name="Rectangle 28">
             <a:extLst>
               <a:ext uri="{FF2B5EF4-FFF2-40B4-BE49-F238E27FC236}">
-                <a16:creationId xmlns:a16="http://schemas.microsoft.com/office/drawing/2014/main" id="{EBA544F6-BF8C-2C87-3906-146BEDB4C299}"/>
+                <a16:creationId xmlns:a16="http://schemas.microsoft.com/office/drawing/2014/main" id="{D68E536F-AEEF-CBBA-5914-4652585EEBF0}"/>
+              </a:ext>
+            </a:extLst>
+          </p:cNvPr>
+          <p:cNvSpPr/>
+          <p:nvPr/>
+        </p:nvSpPr>
+        <p:spPr>
+          <a:xfrm>
+            <a:off x="5226050" y="1416049"/>
+            <a:ext cx="6743700" cy="5285541"/>
+          </a:xfrm>
+          <a:prstGeom prst="rect">
+            <a:avLst/>
+          </a:prstGeom>
+          <a:solidFill>
+            <a:schemeClr val="bg1">
+              <a:lumMod val="95000"/>
+            </a:schemeClr>
+          </a:solidFill>
+          <a:ln>
+            <a:noFill/>
+          </a:ln>
+        </p:spPr>
+        <p:style>
+          <a:lnRef idx="2">
+            <a:schemeClr val="accent1">
+              <a:shade val="15000"/>
+            </a:schemeClr>
+          </a:lnRef>
+          <a:fillRef idx="1">
+            <a:schemeClr val="accent1"/>
+          </a:fillRef>
+          <a:effectRef idx="0">
+            <a:schemeClr val="accent1"/>
+          </a:effectRef>
+          <a:fontRef idx="minor">
+            <a:schemeClr val="lt1"/>
+          </a:fontRef>
+        </p:style>
+        <p:txBody>
+          <a:bodyPr rtlCol="0" anchor="ctr"/>
+          <a:lstStyle/>
+          <a:p>
+            <a:pPr algn="ctr"/>
+            <a:endParaRPr lang="en-US"/>
+          </a:p>
+        </p:txBody>
+      </p:sp>
+      <p:sp>
+        <p:nvSpPr>
+          <p:cNvPr id="8" name="Rectangle: Single Corner Snipped 7">
+            <a:extLst>
+              <a:ext uri="{FF2B5EF4-FFF2-40B4-BE49-F238E27FC236}">
+                <a16:creationId xmlns:a16="http://schemas.microsoft.com/office/drawing/2014/main" id="{C91880F7-7C0C-F770-70A6-401FCF918D75}"/>
+              </a:ext>
+            </a:extLst>
+          </p:cNvPr>
+          <p:cNvSpPr/>
+          <p:nvPr/>
+        </p:nvSpPr>
+        <p:spPr>
+          <a:xfrm flipH="1">
+            <a:off x="5600700" y="2301875"/>
+            <a:ext cx="1854200" cy="501650"/>
+          </a:xfrm>
+          <a:prstGeom prst="snip1Rect">
+            <a:avLst>
+              <a:gd name="adj" fmla="val 50000"/>
+            </a:avLst>
+          </a:prstGeom>
+          <a:solidFill>
+            <a:srgbClr val="0070C0"/>
+          </a:solidFill>
+          <a:ln>
+            <a:noFill/>
+          </a:ln>
+        </p:spPr>
+        <p:style>
+          <a:lnRef idx="2">
+            <a:schemeClr val="accent1">
+              <a:shade val="15000"/>
+            </a:schemeClr>
+          </a:lnRef>
+          <a:fillRef idx="1">
+            <a:schemeClr val="accent1"/>
+          </a:fillRef>
+          <a:effectRef idx="0">
+            <a:schemeClr val="accent1"/>
+          </a:effectRef>
+          <a:fontRef idx="minor">
+            <a:schemeClr val="lt1"/>
+          </a:fontRef>
+        </p:style>
+        <p:txBody>
+          <a:bodyPr rtlCol="0" anchor="t"/>
+          <a:lstStyle/>
+          <a:p>
+            <a:pPr algn="ctr"/>
+            <a:r>
+              <a:rPr lang="en-US" dirty="0"/>
+              <a:t>Encoder</a:t>
+            </a:r>
+          </a:p>
+        </p:txBody>
+      </p:sp>
+      <p:sp>
+        <p:nvSpPr>
+          <p:cNvPr id="9" name="Rectangle: Rounded Corners 8">
+            <a:extLst>
+              <a:ext uri="{FF2B5EF4-FFF2-40B4-BE49-F238E27FC236}">
+                <a16:creationId xmlns:a16="http://schemas.microsoft.com/office/drawing/2014/main" id="{D02AAF7D-E1D7-A741-262C-987409B6BC6E}"/>
+              </a:ext>
+            </a:extLst>
+          </p:cNvPr>
+          <p:cNvSpPr/>
+          <p:nvPr/>
+        </p:nvSpPr>
+        <p:spPr>
+          <a:xfrm>
+            <a:off x="5899150" y="2921000"/>
+            <a:ext cx="1854200" cy="501650"/>
+          </a:xfrm>
+          <a:prstGeom prst="roundRect">
+            <a:avLst/>
+          </a:prstGeom>
+          <a:solidFill>
+            <a:srgbClr val="00B0F0"/>
+          </a:solidFill>
+          <a:ln>
+            <a:noFill/>
+          </a:ln>
+        </p:spPr>
+        <p:style>
+          <a:lnRef idx="2">
+            <a:schemeClr val="accent1">
+              <a:shade val="15000"/>
+            </a:schemeClr>
+          </a:lnRef>
+          <a:fillRef idx="1">
+            <a:schemeClr val="accent1"/>
+          </a:fillRef>
+          <a:effectRef idx="0">
+            <a:schemeClr val="accent1"/>
+          </a:effectRef>
+          <a:fontRef idx="minor">
+            <a:schemeClr val="lt1"/>
+          </a:fontRef>
+        </p:style>
+        <p:txBody>
+          <a:bodyPr rtlCol="0" anchor="ctr"/>
+          <a:lstStyle/>
+          <a:p>
+            <a:pPr algn="ctr"/>
+            <a:r>
+              <a:rPr lang="en-US" dirty="0"/>
+              <a:t>Encod block1</a:t>
+            </a:r>
+          </a:p>
+          <a:p>
+            <a:pPr algn="ctr"/>
+            <a:r>
+              <a:rPr lang="en-US" sz="1100" dirty="0"/>
+              <a:t>32 filters</a:t>
+            </a:r>
+          </a:p>
+        </p:txBody>
+      </p:sp>
+      <p:sp>
+        <p:nvSpPr>
+          <p:cNvPr id="11" name="Rectangle: Rounded Corners 10">
+            <a:extLst>
+              <a:ext uri="{FF2B5EF4-FFF2-40B4-BE49-F238E27FC236}">
+                <a16:creationId xmlns:a16="http://schemas.microsoft.com/office/drawing/2014/main" id="{975E5EE0-BD3E-7559-9119-2AFD14CCB78B}"/>
+              </a:ext>
+            </a:extLst>
+          </p:cNvPr>
+          <p:cNvSpPr/>
+          <p:nvPr/>
+        </p:nvSpPr>
+        <p:spPr>
+          <a:xfrm>
+            <a:off x="6318250" y="3460750"/>
+            <a:ext cx="1854200" cy="501650"/>
+          </a:xfrm>
+          <a:prstGeom prst="roundRect">
+            <a:avLst/>
+          </a:prstGeom>
+          <a:solidFill>
+            <a:srgbClr val="00B0F0"/>
+          </a:solidFill>
+          <a:ln>
+            <a:noFill/>
+          </a:ln>
+        </p:spPr>
+        <p:style>
+          <a:lnRef idx="2">
+            <a:schemeClr val="accent1">
+              <a:shade val="15000"/>
+            </a:schemeClr>
+          </a:lnRef>
+          <a:fillRef idx="1">
+            <a:schemeClr val="accent1"/>
+          </a:fillRef>
+          <a:effectRef idx="0">
+            <a:schemeClr val="accent1"/>
+          </a:effectRef>
+          <a:fontRef idx="minor">
+            <a:schemeClr val="lt1"/>
+          </a:fontRef>
+        </p:style>
+        <p:txBody>
+          <a:bodyPr rtlCol="0" anchor="ctr"/>
+          <a:lstStyle/>
+          <a:p>
+            <a:pPr algn="ctr"/>
+            <a:endParaRPr lang="en-US" dirty="0"/>
+          </a:p>
+          <a:p>
+            <a:pPr algn="ctr"/>
+            <a:r>
+              <a:rPr lang="en-US" dirty="0"/>
+              <a:t>Encod block 2</a:t>
+            </a:r>
+          </a:p>
+          <a:p>
+            <a:pPr algn="ctr"/>
+            <a:r>
+              <a:rPr lang="en-US" sz="1100" dirty="0"/>
+              <a:t>64 filters</a:t>
+            </a:r>
+          </a:p>
+          <a:p>
+            <a:pPr algn="ctr"/>
+            <a:endParaRPr lang="en-US" dirty="0"/>
+          </a:p>
+        </p:txBody>
+      </p:sp>
+      <p:sp>
+        <p:nvSpPr>
+          <p:cNvPr id="13" name="Rectangle: Rounded Corners 12">
+            <a:extLst>
+              <a:ext uri="{FF2B5EF4-FFF2-40B4-BE49-F238E27FC236}">
+                <a16:creationId xmlns:a16="http://schemas.microsoft.com/office/drawing/2014/main" id="{DC22E278-1556-7A88-4E43-BF6AEBB3429E}"/>
+              </a:ext>
+            </a:extLst>
+          </p:cNvPr>
+          <p:cNvSpPr/>
+          <p:nvPr/>
+        </p:nvSpPr>
+        <p:spPr>
+          <a:xfrm>
+            <a:off x="6591300" y="4000500"/>
+            <a:ext cx="1854200" cy="501650"/>
+          </a:xfrm>
+          <a:prstGeom prst="roundRect">
+            <a:avLst/>
+          </a:prstGeom>
+          <a:solidFill>
+            <a:srgbClr val="00B0F0"/>
+          </a:solidFill>
+          <a:ln>
+            <a:noFill/>
+          </a:ln>
+        </p:spPr>
+        <p:style>
+          <a:lnRef idx="2">
+            <a:schemeClr val="accent1">
+              <a:shade val="15000"/>
+            </a:schemeClr>
+          </a:lnRef>
+          <a:fillRef idx="1">
+            <a:schemeClr val="accent1"/>
+          </a:fillRef>
+          <a:effectRef idx="0">
+            <a:schemeClr val="accent1"/>
+          </a:effectRef>
+          <a:fontRef idx="minor">
+            <a:schemeClr val="lt1"/>
+          </a:fontRef>
+        </p:style>
+        <p:txBody>
+          <a:bodyPr rtlCol="0" anchor="ctr"/>
+          <a:lstStyle/>
+          <a:p>
+            <a:pPr algn="ctr"/>
+            <a:r>
+              <a:rPr lang="en-US" dirty="0"/>
+              <a:t>Encod block3</a:t>
+            </a:r>
+          </a:p>
+          <a:p>
+            <a:pPr algn="ctr"/>
+            <a:r>
+              <a:rPr lang="en-US" sz="1100" dirty="0"/>
+              <a:t>128 filters</a:t>
+            </a:r>
+          </a:p>
+        </p:txBody>
+      </p:sp>
+      <p:sp>
+        <p:nvSpPr>
+          <p:cNvPr id="15" name="Rectangle: Rounded Corners 14">
+            <a:extLst>
+              <a:ext uri="{FF2B5EF4-FFF2-40B4-BE49-F238E27FC236}">
+                <a16:creationId xmlns:a16="http://schemas.microsoft.com/office/drawing/2014/main" id="{6E2BD86C-542B-D18C-9B33-8C334B880982}"/>
+              </a:ext>
+            </a:extLst>
+          </p:cNvPr>
+          <p:cNvSpPr/>
+          <p:nvPr/>
+        </p:nvSpPr>
+        <p:spPr>
+          <a:xfrm>
+            <a:off x="6826250" y="4540250"/>
+            <a:ext cx="1854200" cy="501650"/>
+          </a:xfrm>
+          <a:prstGeom prst="roundRect">
+            <a:avLst/>
+          </a:prstGeom>
+          <a:solidFill>
+            <a:srgbClr val="00B0F0"/>
+          </a:solidFill>
+          <a:ln>
+            <a:noFill/>
+          </a:ln>
+        </p:spPr>
+        <p:style>
+          <a:lnRef idx="2">
+            <a:schemeClr val="accent1">
+              <a:shade val="15000"/>
+            </a:schemeClr>
+          </a:lnRef>
+          <a:fillRef idx="1">
+            <a:schemeClr val="accent1"/>
+          </a:fillRef>
+          <a:effectRef idx="0">
+            <a:schemeClr val="accent1"/>
+          </a:effectRef>
+          <a:fontRef idx="minor">
+            <a:schemeClr val="lt1"/>
+          </a:fontRef>
+        </p:style>
+        <p:txBody>
+          <a:bodyPr rtlCol="0" anchor="ctr"/>
+          <a:lstStyle/>
+          <a:p>
+            <a:pPr algn="ctr"/>
+            <a:r>
+              <a:rPr lang="en-US" dirty="0"/>
+              <a:t>Encod block 4</a:t>
+            </a:r>
+          </a:p>
+          <a:p>
+            <a:pPr algn="ctr"/>
+            <a:r>
+              <a:rPr lang="en-US" sz="1100" dirty="0"/>
+              <a:t>256 filters</a:t>
+            </a:r>
+          </a:p>
+        </p:txBody>
+      </p:sp>
+      <p:sp>
+        <p:nvSpPr>
+          <p:cNvPr id="17" name="Rectangle: Rounded Corners 16">
+            <a:extLst>
+              <a:ext uri="{FF2B5EF4-FFF2-40B4-BE49-F238E27FC236}">
+                <a16:creationId xmlns:a16="http://schemas.microsoft.com/office/drawing/2014/main" id="{9C8A30C8-9EB6-FFAD-F935-7FFA98758988}"/>
+              </a:ext>
+            </a:extLst>
+          </p:cNvPr>
+          <p:cNvSpPr/>
+          <p:nvPr/>
+        </p:nvSpPr>
+        <p:spPr>
+          <a:xfrm>
+            <a:off x="7677150" y="5080000"/>
+            <a:ext cx="1854200" cy="501650"/>
+          </a:xfrm>
+          <a:prstGeom prst="roundRect">
+            <a:avLst/>
+          </a:prstGeom>
+          <a:solidFill>
+            <a:srgbClr val="00B0F0"/>
+          </a:solidFill>
+          <a:ln>
+            <a:noFill/>
+          </a:ln>
+        </p:spPr>
+        <p:style>
+          <a:lnRef idx="2">
+            <a:schemeClr val="accent1">
+              <a:shade val="15000"/>
+            </a:schemeClr>
+          </a:lnRef>
+          <a:fillRef idx="1">
+            <a:schemeClr val="accent1"/>
+          </a:fillRef>
+          <a:effectRef idx="0">
+            <a:schemeClr val="accent1"/>
+          </a:effectRef>
+          <a:fontRef idx="minor">
+            <a:schemeClr val="lt1"/>
+          </a:fontRef>
+        </p:style>
+        <p:txBody>
+          <a:bodyPr rtlCol="0" anchor="ctr"/>
+          <a:lstStyle/>
+          <a:p>
+            <a:pPr algn="ctr"/>
+            <a:r>
+              <a:rPr lang="en-US" dirty="0"/>
+              <a:t>Bottleneck</a:t>
+            </a:r>
+          </a:p>
+          <a:p>
+            <a:pPr algn="ctr"/>
+            <a:r>
+              <a:rPr lang="en-US" sz="1100" dirty="0"/>
+              <a:t>512 filters</a:t>
+            </a:r>
+          </a:p>
+        </p:txBody>
+      </p:sp>
+      <p:sp>
+        <p:nvSpPr>
+          <p:cNvPr id="19" name="Rectangle: Rounded Corners 18">
+            <a:extLst>
+              <a:ext uri="{FF2B5EF4-FFF2-40B4-BE49-F238E27FC236}">
+                <a16:creationId xmlns:a16="http://schemas.microsoft.com/office/drawing/2014/main" id="{E6509D80-8E4E-5913-35D8-BE6588E27E32}"/>
+              </a:ext>
+            </a:extLst>
+          </p:cNvPr>
+          <p:cNvSpPr/>
+          <p:nvPr/>
+        </p:nvSpPr>
+        <p:spPr>
+          <a:xfrm>
+            <a:off x="8769350" y="4540250"/>
+            <a:ext cx="1854200" cy="501650"/>
+          </a:xfrm>
+          <a:prstGeom prst="roundRect">
+            <a:avLst/>
+          </a:prstGeom>
+          <a:solidFill>
+            <a:schemeClr val="accent2">
+              <a:lumMod val="75000"/>
+            </a:schemeClr>
+          </a:solidFill>
+          <a:ln>
+            <a:noFill/>
+          </a:ln>
+        </p:spPr>
+        <p:style>
+          <a:lnRef idx="2">
+            <a:schemeClr val="accent1">
+              <a:shade val="15000"/>
+            </a:schemeClr>
+          </a:lnRef>
+          <a:fillRef idx="1">
+            <a:schemeClr val="accent1"/>
+          </a:fillRef>
+          <a:effectRef idx="0">
+            <a:schemeClr val="accent1"/>
+          </a:effectRef>
+          <a:fontRef idx="minor">
+            <a:schemeClr val="lt1"/>
+          </a:fontRef>
+        </p:style>
+        <p:txBody>
+          <a:bodyPr rtlCol="0" anchor="ctr"/>
+          <a:lstStyle/>
+          <a:p>
+            <a:pPr algn="ctr"/>
+            <a:r>
+              <a:rPr lang="en-US" dirty="0" err="1"/>
+              <a:t>Decod</a:t>
+            </a:r>
+            <a:r>
+              <a:rPr lang="en-US" dirty="0"/>
+              <a:t> block 4</a:t>
+            </a:r>
+          </a:p>
+          <a:p>
+            <a:pPr algn="ctr"/>
+            <a:r>
+              <a:rPr lang="en-US" sz="1100" dirty="0"/>
+              <a:t>Skip conn, 256 filters</a:t>
+            </a:r>
+          </a:p>
+        </p:txBody>
+      </p:sp>
+      <p:sp>
+        <p:nvSpPr>
+          <p:cNvPr id="21" name="Rectangle: Single Corner Snipped 20">
+            <a:extLst>
+              <a:ext uri="{FF2B5EF4-FFF2-40B4-BE49-F238E27FC236}">
+                <a16:creationId xmlns:a16="http://schemas.microsoft.com/office/drawing/2014/main" id="{E0A21C48-402F-6478-CC0B-1B287F0B76EC}"/>
+              </a:ext>
+            </a:extLst>
+          </p:cNvPr>
+          <p:cNvSpPr/>
+          <p:nvPr/>
+        </p:nvSpPr>
+        <p:spPr>
+          <a:xfrm>
+            <a:off x="9988550" y="2301875"/>
+            <a:ext cx="1854200" cy="501650"/>
+          </a:xfrm>
+          <a:prstGeom prst="snip1Rect">
+            <a:avLst>
+              <a:gd name="adj" fmla="val 50000"/>
+            </a:avLst>
+          </a:prstGeom>
+          <a:solidFill>
+            <a:schemeClr val="accent2">
+              <a:lumMod val="75000"/>
+            </a:schemeClr>
+          </a:solidFill>
+          <a:ln>
+            <a:noFill/>
+          </a:ln>
+        </p:spPr>
+        <p:style>
+          <a:lnRef idx="2">
+            <a:schemeClr val="accent1">
+              <a:shade val="15000"/>
+            </a:schemeClr>
+          </a:lnRef>
+          <a:fillRef idx="1">
+            <a:schemeClr val="accent1"/>
+          </a:fillRef>
+          <a:effectRef idx="0">
+            <a:schemeClr val="accent1"/>
+          </a:effectRef>
+          <a:fontRef idx="minor">
+            <a:schemeClr val="lt1"/>
+          </a:fontRef>
+        </p:style>
+        <p:txBody>
+          <a:bodyPr rtlCol="0" anchor="t"/>
+          <a:lstStyle/>
+          <a:p>
+            <a:pPr algn="ctr"/>
+            <a:r>
+              <a:rPr lang="en-US" dirty="0"/>
+              <a:t>Decoder</a:t>
+            </a:r>
+          </a:p>
+        </p:txBody>
+      </p:sp>
+      <p:sp>
+        <p:nvSpPr>
+          <p:cNvPr id="23" name="Rectangle: Rounded Corners 22">
+            <a:extLst>
+              <a:ext uri="{FF2B5EF4-FFF2-40B4-BE49-F238E27FC236}">
+                <a16:creationId xmlns:a16="http://schemas.microsoft.com/office/drawing/2014/main" id="{92EDC5E5-F6CD-C982-C1AA-AA84CBA960FD}"/>
+              </a:ext>
+            </a:extLst>
+          </p:cNvPr>
+          <p:cNvSpPr/>
+          <p:nvPr/>
+        </p:nvSpPr>
+        <p:spPr>
+          <a:xfrm>
+            <a:off x="8997950" y="4000500"/>
+            <a:ext cx="1854200" cy="501650"/>
+          </a:xfrm>
+          <a:prstGeom prst="roundRect">
+            <a:avLst/>
+          </a:prstGeom>
+          <a:solidFill>
+            <a:schemeClr val="accent2">
+              <a:lumMod val="75000"/>
+            </a:schemeClr>
+          </a:solidFill>
+          <a:ln>
+            <a:noFill/>
+          </a:ln>
+        </p:spPr>
+        <p:style>
+          <a:lnRef idx="2">
+            <a:schemeClr val="accent1">
+              <a:shade val="15000"/>
+            </a:schemeClr>
+          </a:lnRef>
+          <a:fillRef idx="1">
+            <a:schemeClr val="accent1"/>
+          </a:fillRef>
+          <a:effectRef idx="0">
+            <a:schemeClr val="accent1"/>
+          </a:effectRef>
+          <a:fontRef idx="minor">
+            <a:schemeClr val="lt1"/>
+          </a:fontRef>
+        </p:style>
+        <p:txBody>
+          <a:bodyPr rtlCol="0" anchor="ctr"/>
+          <a:lstStyle/>
+          <a:p>
+            <a:pPr algn="ctr"/>
+            <a:r>
+              <a:rPr lang="en-US" dirty="0" err="1"/>
+              <a:t>Decod</a:t>
+            </a:r>
+            <a:r>
+              <a:rPr lang="en-US" dirty="0"/>
+              <a:t> block 3</a:t>
+            </a:r>
+          </a:p>
+          <a:p>
+            <a:pPr algn="ctr"/>
+            <a:r>
+              <a:rPr lang="en-US" sz="1100" dirty="0"/>
+              <a:t>Skip conn, 128 filters</a:t>
+            </a:r>
+          </a:p>
+        </p:txBody>
+      </p:sp>
+      <p:sp>
+        <p:nvSpPr>
+          <p:cNvPr id="25" name="Rectangle: Rounded Corners 24">
+            <a:extLst>
+              <a:ext uri="{FF2B5EF4-FFF2-40B4-BE49-F238E27FC236}">
+                <a16:creationId xmlns:a16="http://schemas.microsoft.com/office/drawing/2014/main" id="{A64F1A1A-6988-6267-61B3-9481D15DC20B}"/>
+              </a:ext>
+            </a:extLst>
+          </p:cNvPr>
+          <p:cNvSpPr/>
+          <p:nvPr/>
+        </p:nvSpPr>
+        <p:spPr>
+          <a:xfrm>
+            <a:off x="9359900" y="3460750"/>
+            <a:ext cx="1854200" cy="501650"/>
+          </a:xfrm>
+          <a:prstGeom prst="roundRect">
+            <a:avLst/>
+          </a:prstGeom>
+          <a:solidFill>
+            <a:schemeClr val="accent2">
+              <a:lumMod val="75000"/>
+            </a:schemeClr>
+          </a:solidFill>
+          <a:ln>
+            <a:noFill/>
+          </a:ln>
+        </p:spPr>
+        <p:style>
+          <a:lnRef idx="2">
+            <a:schemeClr val="accent1">
+              <a:shade val="15000"/>
+            </a:schemeClr>
+          </a:lnRef>
+          <a:fillRef idx="1">
+            <a:schemeClr val="accent1"/>
+          </a:fillRef>
+          <a:effectRef idx="0">
+            <a:schemeClr val="accent1"/>
+          </a:effectRef>
+          <a:fontRef idx="minor">
+            <a:schemeClr val="lt1"/>
+          </a:fontRef>
+        </p:style>
+        <p:txBody>
+          <a:bodyPr rtlCol="0" anchor="ctr"/>
+          <a:lstStyle/>
+          <a:p>
+            <a:pPr algn="ctr"/>
+            <a:r>
+              <a:rPr lang="en-US" dirty="0" err="1"/>
+              <a:t>Decod</a:t>
+            </a:r>
+            <a:r>
+              <a:rPr lang="en-US" dirty="0"/>
+              <a:t> block 2</a:t>
+            </a:r>
+          </a:p>
+          <a:p>
+            <a:pPr algn="ctr"/>
+            <a:r>
+              <a:rPr lang="en-US" sz="1100" dirty="0"/>
+              <a:t>Skip conn, 64 filters</a:t>
+            </a:r>
+          </a:p>
+        </p:txBody>
+      </p:sp>
+      <p:sp>
+        <p:nvSpPr>
+          <p:cNvPr id="27" name="Rectangle: Rounded Corners 26">
+            <a:extLst>
+              <a:ext uri="{FF2B5EF4-FFF2-40B4-BE49-F238E27FC236}">
+                <a16:creationId xmlns:a16="http://schemas.microsoft.com/office/drawing/2014/main" id="{B6E52219-91E9-7D54-5F3E-29DA4A84D011}"/>
+              </a:ext>
+            </a:extLst>
+          </p:cNvPr>
+          <p:cNvSpPr/>
+          <p:nvPr/>
+        </p:nvSpPr>
+        <p:spPr>
+          <a:xfrm>
+            <a:off x="9709150" y="2921000"/>
+            <a:ext cx="1854200" cy="501650"/>
+          </a:xfrm>
+          <a:prstGeom prst="roundRect">
+            <a:avLst/>
+          </a:prstGeom>
+          <a:solidFill>
+            <a:schemeClr val="accent2">
+              <a:lumMod val="75000"/>
+            </a:schemeClr>
+          </a:solidFill>
+          <a:ln>
+            <a:noFill/>
+          </a:ln>
+        </p:spPr>
+        <p:style>
+          <a:lnRef idx="2">
+            <a:schemeClr val="accent1">
+              <a:shade val="15000"/>
+            </a:schemeClr>
+          </a:lnRef>
+          <a:fillRef idx="1">
+            <a:schemeClr val="accent1"/>
+          </a:fillRef>
+          <a:effectRef idx="0">
+            <a:schemeClr val="accent1"/>
+          </a:effectRef>
+          <a:fontRef idx="minor">
+            <a:schemeClr val="lt1"/>
+          </a:fontRef>
+        </p:style>
+        <p:txBody>
+          <a:bodyPr rtlCol="0" anchor="ctr"/>
+          <a:lstStyle/>
+          <a:p>
+            <a:pPr algn="ctr"/>
+            <a:r>
+              <a:rPr lang="en-US" dirty="0" err="1"/>
+              <a:t>Decod</a:t>
+            </a:r>
+            <a:r>
+              <a:rPr lang="en-US" dirty="0"/>
+              <a:t> block 1</a:t>
+            </a:r>
+          </a:p>
+          <a:p>
+            <a:pPr algn="ctr"/>
+            <a:r>
+              <a:rPr lang="en-US" sz="1100" dirty="0"/>
+              <a:t>Skip conn, 32 filters</a:t>
+            </a:r>
+          </a:p>
+        </p:txBody>
+      </p:sp>
+      <p:graphicFrame>
+        <p:nvGraphicFramePr>
+          <p:cNvPr id="28" name="Table Placeholder 3">
+            <a:extLst>
+              <a:ext uri="{FF2B5EF4-FFF2-40B4-BE49-F238E27FC236}">
+                <a16:creationId xmlns:a16="http://schemas.microsoft.com/office/drawing/2014/main" id="{D75F9337-569D-812F-8F1B-AAF989624FF9}"/>
+              </a:ext>
+            </a:extLst>
+          </p:cNvPr>
+          <p:cNvGraphicFramePr>
+            <a:graphicFrameLocks/>
+          </p:cNvGraphicFramePr>
+          <p:nvPr>
+            <p:extLst>
+              <p:ext uri="{D42A27DB-BD31-4B8C-83A1-F6EECF244321}">
+                <p14:modId xmlns:p14="http://schemas.microsoft.com/office/powerpoint/2010/main" val="2860713607"/>
+              </p:ext>
+            </p:extLst>
+          </p:nvPr>
+        </p:nvGraphicFramePr>
+        <p:xfrm>
+          <a:off x="273050" y="3817295"/>
+          <a:ext cx="3835400" cy="2884296"/>
+        </p:xfrm>
+        <a:graphic>
+          <a:graphicData uri="http://schemas.openxmlformats.org/drawingml/2006/table">
+            <a:tbl>
+              <a:tblPr firstRow="1" bandRow="1">
+                <a:tableStyleId>{912C8C85-51F0-491E-9774-3900AFEF0FD7}</a:tableStyleId>
+              </a:tblPr>
+              <a:tblGrid>
+                <a:gridCol w="1257744">
+                  <a:extLst>
+                    <a:ext uri="{9D8B030D-6E8A-4147-A177-3AD203B41FA5}">
+                      <a16:colId xmlns:a16="http://schemas.microsoft.com/office/drawing/2014/main" val="2331295822"/>
+                    </a:ext>
+                  </a:extLst>
+                </a:gridCol>
+                <a:gridCol w="1257744">
+                  <a:extLst>
+                    <a:ext uri="{9D8B030D-6E8A-4147-A177-3AD203B41FA5}">
+                      <a16:colId xmlns:a16="http://schemas.microsoft.com/office/drawing/2014/main" val="2382218087"/>
+                    </a:ext>
+                  </a:extLst>
+                </a:gridCol>
+                <a:gridCol w="1319912">
+                  <a:extLst>
+                    <a:ext uri="{9D8B030D-6E8A-4147-A177-3AD203B41FA5}">
+                      <a16:colId xmlns:a16="http://schemas.microsoft.com/office/drawing/2014/main" val="3953468724"/>
+                    </a:ext>
+                  </a:extLst>
+                </a:gridCol>
+              </a:tblGrid>
+              <a:tr h="259817">
+                <a:tc>
+                  <a:txBody>
+                    <a:bodyPr/>
+                    <a:lstStyle/>
+                    <a:p>
+                      <a:pPr algn="ctr"/>
+                      <a:r>
+                        <a:rPr lang="en-US" sz="1200" dirty="0"/>
+                        <a:t>Object</a:t>
+                      </a:r>
+                    </a:p>
+                  </a:txBody>
+                  <a:tcPr anchor="ctr">
+                    <a:lnB w="12700" cap="flat" cmpd="sng" algn="ctr">
+                      <a:solidFill>
+                        <a:schemeClr val="tx1"/>
+                      </a:solidFill>
+                      <a:prstDash val="solid"/>
+                      <a:round/>
+                      <a:headEnd type="none" w="med" len="med"/>
+                      <a:tailEnd type="none" w="med" len="med"/>
+                    </a:lnB>
+                  </a:tcPr>
+                </a:tc>
+                <a:tc>
+                  <a:txBody>
+                    <a:bodyPr/>
+                    <a:lstStyle/>
+                    <a:p>
+                      <a:pPr algn="ctr"/>
+                      <a:r>
+                        <a:rPr lang="en-US" sz="1200" dirty="0"/>
+                        <a:t>Parameter</a:t>
+                      </a:r>
+                    </a:p>
+                  </a:txBody>
+                  <a:tcPr anchor="ctr">
+                    <a:lnB w="12700" cap="flat" cmpd="sng" algn="ctr">
+                      <a:solidFill>
+                        <a:schemeClr val="tx1"/>
+                      </a:solidFill>
+                      <a:prstDash val="solid"/>
+                      <a:round/>
+                      <a:headEnd type="none" w="med" len="med"/>
+                      <a:tailEnd type="none" w="med" len="med"/>
+                    </a:lnB>
+                  </a:tcPr>
+                </a:tc>
+                <a:tc>
+                  <a:txBody>
+                    <a:bodyPr/>
+                    <a:lstStyle/>
+                    <a:p>
+                      <a:pPr algn="ctr"/>
+                      <a:r>
+                        <a:rPr lang="en-US" sz="1200" dirty="0"/>
+                        <a:t>Value</a:t>
+                      </a:r>
+                    </a:p>
+                  </a:txBody>
+                  <a:tcPr anchor="ctr">
+                    <a:lnB w="12700" cap="flat" cmpd="sng" algn="ctr">
+                      <a:solidFill>
+                        <a:schemeClr val="tx1"/>
+                      </a:solidFill>
+                      <a:prstDash val="solid"/>
+                      <a:round/>
+                      <a:headEnd type="none" w="med" len="med"/>
+                      <a:tailEnd type="none" w="med" len="med"/>
+                    </a:lnB>
+                  </a:tcPr>
+                </a:tc>
+                <a:extLst>
+                  <a:ext uri="{0D108BD9-81ED-4DB2-BD59-A6C34878D82A}">
+                    <a16:rowId xmlns:a16="http://schemas.microsoft.com/office/drawing/2014/main" val="2857107962"/>
+                  </a:ext>
+                </a:extLst>
+              </a:tr>
+              <a:tr h="271623">
+                <a:tc rowSpan="4">
+                  <a:txBody>
+                    <a:bodyPr/>
+                    <a:lstStyle/>
+                    <a:p>
+                      <a:pPr algn="ctr"/>
+                      <a:r>
+                        <a:rPr lang="en-US" sz="1100" dirty="0"/>
+                        <a:t>Model</a:t>
+                      </a:r>
+                    </a:p>
+                  </a:txBody>
+                  <a:tcPr anchor="ctr">
+                    <a:lnL w="12700" cap="flat" cmpd="sng" algn="ctr">
+                      <a:solidFill>
+                        <a:schemeClr val="tx1"/>
+                      </a:solidFill>
+                      <a:prstDash val="solid"/>
+                      <a:round/>
+                      <a:headEnd type="none" w="med" len="med"/>
+                      <a:tailEnd type="none" w="med" len="med"/>
+                    </a:lnL>
+                    <a:lnR w="12700" cap="flat" cmpd="sng" algn="ctr">
+                      <a:solidFill>
+                        <a:schemeClr val="tx1"/>
+                      </a:solidFill>
+                      <a:prstDash val="solid"/>
+                      <a:round/>
+                      <a:headEnd type="none" w="med" len="med"/>
+                      <a:tailEnd type="none" w="med" len="med"/>
+                    </a:lnR>
+                    <a:lnT w="12700" cap="flat" cmpd="sng" algn="ctr">
+                      <a:solidFill>
+                        <a:schemeClr val="tx1"/>
+                      </a:solidFill>
+                      <a:prstDash val="solid"/>
+                      <a:round/>
+                      <a:headEnd type="none" w="med" len="med"/>
+                      <a:tailEnd type="none" w="med" len="med"/>
+                    </a:lnT>
+                    <a:lnB w="12700" cap="flat" cmpd="sng" algn="ctr">
+                      <a:solidFill>
+                        <a:schemeClr val="tx1"/>
+                      </a:solidFill>
+                      <a:prstDash val="solid"/>
+                      <a:round/>
+                      <a:headEnd type="none" w="med" len="med"/>
+                      <a:tailEnd type="none" w="med" len="med"/>
+                    </a:lnB>
+                  </a:tcPr>
+                </a:tc>
+                <a:tc>
+                  <a:txBody>
+                    <a:bodyPr/>
+                    <a:lstStyle/>
+                    <a:p>
+                      <a:pPr algn="ctr"/>
+                      <a:r>
+                        <a:rPr lang="en-US" sz="1100" dirty="0"/>
+                        <a:t>Feature maps</a:t>
+                      </a:r>
+                    </a:p>
+                  </a:txBody>
+                  <a:tcPr anchor="ctr">
+                    <a:lnL w="12700" cap="flat" cmpd="sng" algn="ctr">
+                      <a:solidFill>
+                        <a:schemeClr val="tx1"/>
+                      </a:solidFill>
+                      <a:prstDash val="solid"/>
+                      <a:round/>
+                      <a:headEnd type="none" w="med" len="med"/>
+                      <a:tailEnd type="none" w="med" len="med"/>
+                    </a:lnL>
+                    <a:lnR w="12700" cap="flat" cmpd="sng" algn="ctr">
+                      <a:solidFill>
+                        <a:schemeClr val="tx1"/>
+                      </a:solidFill>
+                      <a:prstDash val="solid"/>
+                      <a:round/>
+                      <a:headEnd type="none" w="med" len="med"/>
+                      <a:tailEnd type="none" w="med" len="med"/>
+                    </a:lnR>
+                    <a:lnT w="12700" cap="flat" cmpd="sng" algn="ctr">
+                      <a:solidFill>
+                        <a:schemeClr val="tx1"/>
+                      </a:solidFill>
+                      <a:prstDash val="solid"/>
+                      <a:round/>
+                      <a:headEnd type="none" w="med" len="med"/>
+                      <a:tailEnd type="none" w="med" len="med"/>
+                    </a:lnT>
+                    <a:lnB w="12700" cap="flat" cmpd="sng" algn="ctr">
+                      <a:solidFill>
+                        <a:schemeClr val="tx1"/>
+                      </a:solidFill>
+                      <a:prstDash val="solid"/>
+                      <a:round/>
+                      <a:headEnd type="none" w="med" len="med"/>
+                      <a:tailEnd type="none" w="med" len="med"/>
+                    </a:lnB>
+                  </a:tcPr>
+                </a:tc>
+                <a:tc>
+                  <a:txBody>
+                    <a:bodyPr/>
+                    <a:lstStyle/>
+                    <a:p>
+                      <a:pPr algn="ctr"/>
+                      <a:r>
+                        <a:rPr lang="en-US" sz="1100" dirty="0"/>
+                        <a:t>32,64,128,256,512</a:t>
+                      </a:r>
+                    </a:p>
+                  </a:txBody>
+                  <a:tcPr anchor="ctr">
+                    <a:lnL w="12700" cap="flat" cmpd="sng" algn="ctr">
+                      <a:solidFill>
+                        <a:schemeClr val="tx1"/>
+                      </a:solidFill>
+                      <a:prstDash val="solid"/>
+                      <a:round/>
+                      <a:headEnd type="none" w="med" len="med"/>
+                      <a:tailEnd type="none" w="med" len="med"/>
+                    </a:lnL>
+                    <a:lnR w="12700" cap="flat" cmpd="sng" algn="ctr">
+                      <a:solidFill>
+                        <a:schemeClr val="tx1"/>
+                      </a:solidFill>
+                      <a:prstDash val="solid"/>
+                      <a:round/>
+                      <a:headEnd type="none" w="med" len="med"/>
+                      <a:tailEnd type="none" w="med" len="med"/>
+                    </a:lnR>
+                    <a:lnT w="12700" cap="flat" cmpd="sng" algn="ctr">
+                      <a:solidFill>
+                        <a:schemeClr val="tx1"/>
+                      </a:solidFill>
+                      <a:prstDash val="solid"/>
+                      <a:round/>
+                      <a:headEnd type="none" w="med" len="med"/>
+                      <a:tailEnd type="none" w="med" len="med"/>
+                    </a:lnT>
+                    <a:lnB w="12700" cap="flat" cmpd="sng" algn="ctr">
+                      <a:solidFill>
+                        <a:schemeClr val="tx1"/>
+                      </a:solidFill>
+                      <a:prstDash val="solid"/>
+                      <a:round/>
+                      <a:headEnd type="none" w="med" len="med"/>
+                      <a:tailEnd type="none" w="med" len="med"/>
+                    </a:lnB>
+                  </a:tcPr>
+                </a:tc>
+                <a:extLst>
+                  <a:ext uri="{0D108BD9-81ED-4DB2-BD59-A6C34878D82A}">
+                    <a16:rowId xmlns:a16="http://schemas.microsoft.com/office/drawing/2014/main" val="1671386868"/>
+                  </a:ext>
+                </a:extLst>
+              </a:tr>
+              <a:tr h="259817">
+                <a:tc vMerge="1">
+                  <a:txBody>
+                    <a:bodyPr/>
+                    <a:lstStyle/>
+                    <a:p>
+                      <a:pPr algn="ctr"/>
+                      <a:endParaRPr lang="en-US" sz="1200" dirty="0"/>
+                    </a:p>
+                  </a:txBody>
+                  <a:tcPr anchor="ctr"/>
+                </a:tc>
+                <a:tc>
+                  <a:txBody>
+                    <a:bodyPr/>
+                    <a:lstStyle/>
+                    <a:p>
+                      <a:pPr algn="ctr"/>
+                      <a:r>
+                        <a:rPr lang="en-US" sz="1100" dirty="0"/>
+                        <a:t>Strides</a:t>
+                      </a:r>
+                    </a:p>
+                  </a:txBody>
+                  <a:tcPr anchor="ctr">
+                    <a:lnL w="12700" cap="flat" cmpd="sng" algn="ctr">
+                      <a:solidFill>
+                        <a:schemeClr val="tx1"/>
+                      </a:solidFill>
+                      <a:prstDash val="solid"/>
+                      <a:round/>
+                      <a:headEnd type="none" w="med" len="med"/>
+                      <a:tailEnd type="none" w="med" len="med"/>
+                    </a:lnL>
+                    <a:lnR w="12700" cap="flat" cmpd="sng" algn="ctr">
+                      <a:solidFill>
+                        <a:schemeClr val="tx1"/>
+                      </a:solidFill>
+                      <a:prstDash val="solid"/>
+                      <a:round/>
+                      <a:headEnd type="none" w="med" len="med"/>
+                      <a:tailEnd type="none" w="med" len="med"/>
+                    </a:lnR>
+                    <a:lnT w="12700" cap="flat" cmpd="sng" algn="ctr">
+                      <a:solidFill>
+                        <a:schemeClr val="tx1"/>
+                      </a:solidFill>
+                      <a:prstDash val="solid"/>
+                      <a:round/>
+                      <a:headEnd type="none" w="med" len="med"/>
+                      <a:tailEnd type="none" w="med" len="med"/>
+                    </a:lnT>
+                    <a:lnB w="12700" cap="flat" cmpd="sng" algn="ctr">
+                      <a:solidFill>
+                        <a:schemeClr val="tx1"/>
+                      </a:solidFill>
+                      <a:prstDash val="solid"/>
+                      <a:round/>
+                      <a:headEnd type="none" w="med" len="med"/>
+                      <a:tailEnd type="none" w="med" len="med"/>
+                    </a:lnB>
+                  </a:tcPr>
+                </a:tc>
+                <a:tc>
+                  <a:txBody>
+                    <a:bodyPr/>
+                    <a:lstStyle/>
+                    <a:p>
+                      <a:pPr algn="ctr"/>
+                      <a:r>
+                        <a:rPr lang="en-US" sz="1100" dirty="0"/>
+                        <a:t>2,2,2,2</a:t>
+                      </a:r>
+                    </a:p>
+                  </a:txBody>
+                  <a:tcPr anchor="ctr">
+                    <a:lnL w="12700" cap="flat" cmpd="sng" algn="ctr">
+                      <a:solidFill>
+                        <a:schemeClr val="tx1"/>
+                      </a:solidFill>
+                      <a:prstDash val="solid"/>
+                      <a:round/>
+                      <a:headEnd type="none" w="med" len="med"/>
+                      <a:tailEnd type="none" w="med" len="med"/>
+                    </a:lnL>
+                    <a:lnR w="12700" cap="flat" cmpd="sng" algn="ctr">
+                      <a:solidFill>
+                        <a:schemeClr val="tx1"/>
+                      </a:solidFill>
+                      <a:prstDash val="solid"/>
+                      <a:round/>
+                      <a:headEnd type="none" w="med" len="med"/>
+                      <a:tailEnd type="none" w="med" len="med"/>
+                    </a:lnR>
+                    <a:lnT w="12700" cap="flat" cmpd="sng" algn="ctr">
+                      <a:solidFill>
+                        <a:schemeClr val="tx1"/>
+                      </a:solidFill>
+                      <a:prstDash val="solid"/>
+                      <a:round/>
+                      <a:headEnd type="none" w="med" len="med"/>
+                      <a:tailEnd type="none" w="med" len="med"/>
+                    </a:lnT>
+                    <a:lnB w="12700" cap="flat" cmpd="sng" algn="ctr">
+                      <a:solidFill>
+                        <a:schemeClr val="tx1"/>
+                      </a:solidFill>
+                      <a:prstDash val="solid"/>
+                      <a:round/>
+                      <a:headEnd type="none" w="med" len="med"/>
+                      <a:tailEnd type="none" w="med" len="med"/>
+                    </a:lnB>
+                  </a:tcPr>
+                </a:tc>
+                <a:extLst>
+                  <a:ext uri="{0D108BD9-81ED-4DB2-BD59-A6C34878D82A}">
+                    <a16:rowId xmlns:a16="http://schemas.microsoft.com/office/drawing/2014/main" val="380626418"/>
+                  </a:ext>
+                </a:extLst>
+              </a:tr>
+              <a:tr h="259817">
+                <a:tc vMerge="1">
+                  <a:txBody>
+                    <a:bodyPr/>
+                    <a:lstStyle/>
+                    <a:p>
+                      <a:pPr algn="ctr"/>
+                      <a:endParaRPr lang="en-US" sz="1200" dirty="0"/>
+                    </a:p>
+                  </a:txBody>
+                  <a:tcPr anchor="ctr"/>
+                </a:tc>
+                <a:tc>
+                  <a:txBody>
+                    <a:bodyPr/>
+                    <a:lstStyle/>
+                    <a:p>
+                      <a:pPr algn="ctr"/>
+                      <a:r>
+                        <a:rPr lang="en-US" sz="1100" dirty="0"/>
+                        <a:t>Residual units</a:t>
+                      </a:r>
+                    </a:p>
+                  </a:txBody>
+                  <a:tcPr anchor="ctr">
+                    <a:lnL w="12700" cap="flat" cmpd="sng" algn="ctr">
+                      <a:solidFill>
+                        <a:schemeClr val="tx1"/>
+                      </a:solidFill>
+                      <a:prstDash val="solid"/>
+                      <a:round/>
+                      <a:headEnd type="none" w="med" len="med"/>
+                      <a:tailEnd type="none" w="med" len="med"/>
+                    </a:lnL>
+                    <a:lnR w="12700" cap="flat" cmpd="sng" algn="ctr">
+                      <a:solidFill>
+                        <a:schemeClr val="tx1"/>
+                      </a:solidFill>
+                      <a:prstDash val="solid"/>
+                      <a:round/>
+                      <a:headEnd type="none" w="med" len="med"/>
+                      <a:tailEnd type="none" w="med" len="med"/>
+                    </a:lnR>
+                    <a:lnT w="12700" cap="flat" cmpd="sng" algn="ctr">
+                      <a:solidFill>
+                        <a:schemeClr val="tx1"/>
+                      </a:solidFill>
+                      <a:prstDash val="solid"/>
+                      <a:round/>
+                      <a:headEnd type="none" w="med" len="med"/>
+                      <a:tailEnd type="none" w="med" len="med"/>
+                    </a:lnT>
+                    <a:lnB w="12700" cap="flat" cmpd="sng" algn="ctr">
+                      <a:solidFill>
+                        <a:schemeClr val="tx1"/>
+                      </a:solidFill>
+                      <a:prstDash val="solid"/>
+                      <a:round/>
+                      <a:headEnd type="none" w="med" len="med"/>
+                      <a:tailEnd type="none" w="med" len="med"/>
+                    </a:lnB>
+                  </a:tcPr>
+                </a:tc>
+                <a:tc>
+                  <a:txBody>
+                    <a:bodyPr/>
+                    <a:lstStyle/>
+                    <a:p>
+                      <a:pPr algn="ctr"/>
+                      <a:r>
+                        <a:rPr lang="en-US" sz="1100" dirty="0"/>
+                        <a:t>4</a:t>
+                      </a:r>
+                    </a:p>
+                  </a:txBody>
+                  <a:tcPr anchor="ctr">
+                    <a:lnL w="12700" cap="flat" cmpd="sng" algn="ctr">
+                      <a:solidFill>
+                        <a:schemeClr val="tx1"/>
+                      </a:solidFill>
+                      <a:prstDash val="solid"/>
+                      <a:round/>
+                      <a:headEnd type="none" w="med" len="med"/>
+                      <a:tailEnd type="none" w="med" len="med"/>
+                    </a:lnL>
+                    <a:lnR w="12700" cap="flat" cmpd="sng" algn="ctr">
+                      <a:solidFill>
+                        <a:schemeClr val="tx1"/>
+                      </a:solidFill>
+                      <a:prstDash val="solid"/>
+                      <a:round/>
+                      <a:headEnd type="none" w="med" len="med"/>
+                      <a:tailEnd type="none" w="med" len="med"/>
+                    </a:lnR>
+                    <a:lnT w="12700" cap="flat" cmpd="sng" algn="ctr">
+                      <a:solidFill>
+                        <a:schemeClr val="tx1"/>
+                      </a:solidFill>
+                      <a:prstDash val="solid"/>
+                      <a:round/>
+                      <a:headEnd type="none" w="med" len="med"/>
+                      <a:tailEnd type="none" w="med" len="med"/>
+                    </a:lnT>
+                    <a:lnB w="12700" cap="flat" cmpd="sng" algn="ctr">
+                      <a:solidFill>
+                        <a:schemeClr val="tx1"/>
+                      </a:solidFill>
+                      <a:prstDash val="solid"/>
+                      <a:round/>
+                      <a:headEnd type="none" w="med" len="med"/>
+                      <a:tailEnd type="none" w="med" len="med"/>
+                    </a:lnB>
+                  </a:tcPr>
+                </a:tc>
+                <a:extLst>
+                  <a:ext uri="{0D108BD9-81ED-4DB2-BD59-A6C34878D82A}">
+                    <a16:rowId xmlns:a16="http://schemas.microsoft.com/office/drawing/2014/main" val="2132482967"/>
+                  </a:ext>
+                </a:extLst>
+              </a:tr>
+              <a:tr h="259817">
+                <a:tc vMerge="1">
+                  <a:txBody>
+                    <a:bodyPr/>
+                    <a:lstStyle/>
+                    <a:p>
+                      <a:pPr algn="ctr"/>
+                      <a:endParaRPr lang="en-US" sz="1200" dirty="0"/>
+                    </a:p>
+                  </a:txBody>
+                  <a:tcPr anchor="ctr"/>
+                </a:tc>
+                <a:tc>
+                  <a:txBody>
+                    <a:bodyPr/>
+                    <a:lstStyle/>
+                    <a:p>
+                      <a:pPr algn="ctr"/>
+                      <a:r>
+                        <a:rPr lang="en-US" sz="1100" dirty="0"/>
+                        <a:t>Dropout</a:t>
+                      </a:r>
+                    </a:p>
+                  </a:txBody>
+                  <a:tcPr anchor="ctr">
+                    <a:lnL w="12700" cap="flat" cmpd="sng" algn="ctr">
+                      <a:solidFill>
+                        <a:schemeClr val="tx1"/>
+                      </a:solidFill>
+                      <a:prstDash val="solid"/>
+                      <a:round/>
+                      <a:headEnd type="none" w="med" len="med"/>
+                      <a:tailEnd type="none" w="med" len="med"/>
+                    </a:lnL>
+                    <a:lnR w="12700" cap="flat" cmpd="sng" algn="ctr">
+                      <a:solidFill>
+                        <a:schemeClr val="tx1"/>
+                      </a:solidFill>
+                      <a:prstDash val="solid"/>
+                      <a:round/>
+                      <a:headEnd type="none" w="med" len="med"/>
+                      <a:tailEnd type="none" w="med" len="med"/>
+                    </a:lnR>
+                    <a:lnT w="12700" cap="flat" cmpd="sng" algn="ctr">
+                      <a:solidFill>
+                        <a:schemeClr val="tx1"/>
+                      </a:solidFill>
+                      <a:prstDash val="solid"/>
+                      <a:round/>
+                      <a:headEnd type="none" w="med" len="med"/>
+                      <a:tailEnd type="none" w="med" len="med"/>
+                    </a:lnT>
+                    <a:lnB w="12700" cap="flat" cmpd="sng" algn="ctr">
+                      <a:solidFill>
+                        <a:schemeClr val="tx1"/>
+                      </a:solidFill>
+                      <a:prstDash val="solid"/>
+                      <a:round/>
+                      <a:headEnd type="none" w="med" len="med"/>
+                      <a:tailEnd type="none" w="med" len="med"/>
+                    </a:lnB>
+                  </a:tcPr>
+                </a:tc>
+                <a:tc>
+                  <a:txBody>
+                    <a:bodyPr/>
+                    <a:lstStyle/>
+                    <a:p>
+                      <a:pPr algn="ctr"/>
+                      <a:r>
+                        <a:rPr lang="en-US" sz="1100" dirty="0"/>
+                        <a:t>0.2</a:t>
+                      </a:r>
+                    </a:p>
+                  </a:txBody>
+                  <a:tcPr anchor="ctr">
+                    <a:lnL w="12700" cap="flat" cmpd="sng" algn="ctr">
+                      <a:solidFill>
+                        <a:schemeClr val="tx1"/>
+                      </a:solidFill>
+                      <a:prstDash val="solid"/>
+                      <a:round/>
+                      <a:headEnd type="none" w="med" len="med"/>
+                      <a:tailEnd type="none" w="med" len="med"/>
+                    </a:lnL>
+                    <a:lnR w="12700" cap="flat" cmpd="sng" algn="ctr">
+                      <a:solidFill>
+                        <a:schemeClr val="tx1"/>
+                      </a:solidFill>
+                      <a:prstDash val="solid"/>
+                      <a:round/>
+                      <a:headEnd type="none" w="med" len="med"/>
+                      <a:tailEnd type="none" w="med" len="med"/>
+                    </a:lnR>
+                    <a:lnT w="12700" cap="flat" cmpd="sng" algn="ctr">
+                      <a:solidFill>
+                        <a:schemeClr val="tx1"/>
+                      </a:solidFill>
+                      <a:prstDash val="solid"/>
+                      <a:round/>
+                      <a:headEnd type="none" w="med" len="med"/>
+                      <a:tailEnd type="none" w="med" len="med"/>
+                    </a:lnT>
+                    <a:lnB w="12700" cap="flat" cmpd="sng" algn="ctr">
+                      <a:solidFill>
+                        <a:schemeClr val="tx1"/>
+                      </a:solidFill>
+                      <a:prstDash val="solid"/>
+                      <a:round/>
+                      <a:headEnd type="none" w="med" len="med"/>
+                      <a:tailEnd type="none" w="med" len="med"/>
+                    </a:lnB>
+                  </a:tcPr>
+                </a:tc>
+                <a:extLst>
+                  <a:ext uri="{0D108BD9-81ED-4DB2-BD59-A6C34878D82A}">
+                    <a16:rowId xmlns:a16="http://schemas.microsoft.com/office/drawing/2014/main" val="3936251906"/>
+                  </a:ext>
+                </a:extLst>
+              </a:tr>
+              <a:tr h="259817">
+                <a:tc rowSpan="3">
+                  <a:txBody>
+                    <a:bodyPr/>
+                    <a:lstStyle/>
+                    <a:p>
+                      <a:pPr algn="ctr"/>
+                      <a:r>
+                        <a:rPr lang="en-US" sz="1100" dirty="0"/>
+                        <a:t>Optimizer</a:t>
+                      </a:r>
+                    </a:p>
+                  </a:txBody>
+                  <a:tcPr anchor="ctr">
+                    <a:lnL w="12700" cap="flat" cmpd="sng" algn="ctr">
+                      <a:solidFill>
+                        <a:schemeClr val="tx1"/>
+                      </a:solidFill>
+                      <a:prstDash val="solid"/>
+                      <a:round/>
+                      <a:headEnd type="none" w="med" len="med"/>
+                      <a:tailEnd type="none" w="med" len="med"/>
+                    </a:lnL>
+                    <a:lnR w="12700" cap="flat" cmpd="sng" algn="ctr">
+                      <a:solidFill>
+                        <a:schemeClr val="tx1"/>
+                      </a:solidFill>
+                      <a:prstDash val="solid"/>
+                      <a:round/>
+                      <a:headEnd type="none" w="med" len="med"/>
+                      <a:tailEnd type="none" w="med" len="med"/>
+                    </a:lnR>
+                    <a:lnT w="12700" cap="flat" cmpd="sng" algn="ctr">
+                      <a:solidFill>
+                        <a:schemeClr val="tx1"/>
+                      </a:solidFill>
+                      <a:prstDash val="solid"/>
+                      <a:round/>
+                      <a:headEnd type="none" w="med" len="med"/>
+                      <a:tailEnd type="none" w="med" len="med"/>
+                    </a:lnT>
+                    <a:lnB w="12700" cap="flat" cmpd="sng" algn="ctr">
+                      <a:solidFill>
+                        <a:schemeClr val="tx1"/>
+                      </a:solidFill>
+                      <a:prstDash val="solid"/>
+                      <a:round/>
+                      <a:headEnd type="none" w="med" len="med"/>
+                      <a:tailEnd type="none" w="med" len="med"/>
+                    </a:lnB>
+                  </a:tcPr>
+                </a:tc>
+                <a:tc>
+                  <a:txBody>
+                    <a:bodyPr/>
+                    <a:lstStyle/>
+                    <a:p>
+                      <a:pPr algn="ctr"/>
+                      <a:r>
+                        <a:rPr lang="en-US" sz="1100" dirty="0" err="1"/>
+                        <a:t>AdamW</a:t>
+                      </a:r>
+                      <a:endParaRPr lang="en-US" sz="1100" dirty="0"/>
+                    </a:p>
+                  </a:txBody>
+                  <a:tcPr anchor="ctr">
+                    <a:lnL w="12700" cap="flat" cmpd="sng" algn="ctr">
+                      <a:solidFill>
+                        <a:schemeClr val="tx1"/>
+                      </a:solidFill>
+                      <a:prstDash val="solid"/>
+                      <a:round/>
+                      <a:headEnd type="none" w="med" len="med"/>
+                      <a:tailEnd type="none" w="med" len="med"/>
+                    </a:lnL>
+                    <a:lnR w="12700" cap="flat" cmpd="sng" algn="ctr">
+                      <a:solidFill>
+                        <a:schemeClr val="tx1"/>
+                      </a:solidFill>
+                      <a:prstDash val="solid"/>
+                      <a:round/>
+                      <a:headEnd type="none" w="med" len="med"/>
+                      <a:tailEnd type="none" w="med" len="med"/>
+                    </a:lnR>
+                    <a:lnT w="12700" cap="flat" cmpd="sng" algn="ctr">
+                      <a:solidFill>
+                        <a:schemeClr val="tx1"/>
+                      </a:solidFill>
+                      <a:prstDash val="solid"/>
+                      <a:round/>
+                      <a:headEnd type="none" w="med" len="med"/>
+                      <a:tailEnd type="none" w="med" len="med"/>
+                    </a:lnT>
+                    <a:lnB w="12700" cap="flat" cmpd="sng" algn="ctr">
+                      <a:solidFill>
+                        <a:schemeClr val="tx1"/>
+                      </a:solidFill>
+                      <a:prstDash val="solid"/>
+                      <a:round/>
+                      <a:headEnd type="none" w="med" len="med"/>
+                      <a:tailEnd type="none" w="med" len="med"/>
+                    </a:lnB>
+                  </a:tcPr>
+                </a:tc>
+                <a:tc>
+                  <a:txBody>
+                    <a:bodyPr/>
+                    <a:lstStyle/>
+                    <a:p>
+                      <a:pPr algn="ctr"/>
+                      <a:r>
+                        <a:rPr lang="en-US" sz="1100" dirty="0"/>
+                        <a:t>-</a:t>
+                      </a:r>
+                    </a:p>
+                  </a:txBody>
+                  <a:tcPr anchor="ctr">
+                    <a:lnL w="12700" cap="flat" cmpd="sng" algn="ctr">
+                      <a:solidFill>
+                        <a:schemeClr val="tx1"/>
+                      </a:solidFill>
+                      <a:prstDash val="solid"/>
+                      <a:round/>
+                      <a:headEnd type="none" w="med" len="med"/>
+                      <a:tailEnd type="none" w="med" len="med"/>
+                    </a:lnL>
+                    <a:lnR w="12700" cap="flat" cmpd="sng" algn="ctr">
+                      <a:solidFill>
+                        <a:schemeClr val="tx1"/>
+                      </a:solidFill>
+                      <a:prstDash val="solid"/>
+                      <a:round/>
+                      <a:headEnd type="none" w="med" len="med"/>
+                      <a:tailEnd type="none" w="med" len="med"/>
+                    </a:lnR>
+                    <a:lnT w="12700" cap="flat" cmpd="sng" algn="ctr">
+                      <a:solidFill>
+                        <a:schemeClr val="tx1"/>
+                      </a:solidFill>
+                      <a:prstDash val="solid"/>
+                      <a:round/>
+                      <a:headEnd type="none" w="med" len="med"/>
+                      <a:tailEnd type="none" w="med" len="med"/>
+                    </a:lnT>
+                    <a:lnB w="12700" cap="flat" cmpd="sng" algn="ctr">
+                      <a:solidFill>
+                        <a:schemeClr val="tx1"/>
+                      </a:solidFill>
+                      <a:prstDash val="solid"/>
+                      <a:round/>
+                      <a:headEnd type="none" w="med" len="med"/>
+                      <a:tailEnd type="none" w="med" len="med"/>
+                    </a:lnB>
+                  </a:tcPr>
+                </a:tc>
+                <a:extLst>
+                  <a:ext uri="{0D108BD9-81ED-4DB2-BD59-A6C34878D82A}">
+                    <a16:rowId xmlns:a16="http://schemas.microsoft.com/office/drawing/2014/main" val="1115212545"/>
+                  </a:ext>
+                </a:extLst>
+              </a:tr>
+              <a:tr h="259817">
+                <a:tc vMerge="1">
+                  <a:txBody>
+                    <a:bodyPr/>
+                    <a:lstStyle/>
+                    <a:p>
+                      <a:pPr algn="ctr"/>
+                      <a:endParaRPr lang="en-US" sz="1200" dirty="0"/>
+                    </a:p>
+                  </a:txBody>
+                  <a:tcPr anchor="ctr"/>
+                </a:tc>
+                <a:tc>
+                  <a:txBody>
+                    <a:bodyPr/>
+                    <a:lstStyle/>
+                    <a:p>
+                      <a:pPr algn="ctr"/>
+                      <a:r>
+                        <a:rPr lang="en-US" sz="1100" dirty="0"/>
+                        <a:t>Learning rate</a:t>
+                      </a:r>
+                    </a:p>
+                  </a:txBody>
+                  <a:tcPr anchor="ctr">
+                    <a:lnL w="12700" cap="flat" cmpd="sng" algn="ctr">
+                      <a:solidFill>
+                        <a:schemeClr val="tx1"/>
+                      </a:solidFill>
+                      <a:prstDash val="solid"/>
+                      <a:round/>
+                      <a:headEnd type="none" w="med" len="med"/>
+                      <a:tailEnd type="none" w="med" len="med"/>
+                    </a:lnL>
+                    <a:lnR w="12700" cap="flat" cmpd="sng" algn="ctr">
+                      <a:solidFill>
+                        <a:schemeClr val="tx1"/>
+                      </a:solidFill>
+                      <a:prstDash val="solid"/>
+                      <a:round/>
+                      <a:headEnd type="none" w="med" len="med"/>
+                      <a:tailEnd type="none" w="med" len="med"/>
+                    </a:lnR>
+                    <a:lnT w="12700" cap="flat" cmpd="sng" algn="ctr">
+                      <a:solidFill>
+                        <a:schemeClr val="tx1"/>
+                      </a:solidFill>
+                      <a:prstDash val="solid"/>
+                      <a:round/>
+                      <a:headEnd type="none" w="med" len="med"/>
+                      <a:tailEnd type="none" w="med" len="med"/>
+                    </a:lnT>
+                    <a:lnB w="12700" cap="flat" cmpd="sng" algn="ctr">
+                      <a:solidFill>
+                        <a:schemeClr val="tx1"/>
+                      </a:solidFill>
+                      <a:prstDash val="solid"/>
+                      <a:round/>
+                      <a:headEnd type="none" w="med" len="med"/>
+                      <a:tailEnd type="none" w="med" len="med"/>
+                    </a:lnB>
+                  </a:tcPr>
+                </a:tc>
+                <a:tc>
+                  <a:txBody>
+                    <a:bodyPr/>
+                    <a:lstStyle/>
+                    <a:p>
+                      <a:pPr algn="ctr"/>
+                      <a:r>
+                        <a:rPr lang="en-US" sz="1100" dirty="0"/>
+                        <a:t>0.001</a:t>
+                      </a:r>
+                    </a:p>
+                  </a:txBody>
+                  <a:tcPr anchor="ctr">
+                    <a:lnL w="12700" cap="flat" cmpd="sng" algn="ctr">
+                      <a:solidFill>
+                        <a:schemeClr val="tx1"/>
+                      </a:solidFill>
+                      <a:prstDash val="solid"/>
+                      <a:round/>
+                      <a:headEnd type="none" w="med" len="med"/>
+                      <a:tailEnd type="none" w="med" len="med"/>
+                    </a:lnL>
+                    <a:lnR w="12700" cap="flat" cmpd="sng" algn="ctr">
+                      <a:solidFill>
+                        <a:schemeClr val="tx1"/>
+                      </a:solidFill>
+                      <a:prstDash val="solid"/>
+                      <a:round/>
+                      <a:headEnd type="none" w="med" len="med"/>
+                      <a:tailEnd type="none" w="med" len="med"/>
+                    </a:lnR>
+                    <a:lnT w="12700" cap="flat" cmpd="sng" algn="ctr">
+                      <a:solidFill>
+                        <a:schemeClr val="tx1"/>
+                      </a:solidFill>
+                      <a:prstDash val="solid"/>
+                      <a:round/>
+                      <a:headEnd type="none" w="med" len="med"/>
+                      <a:tailEnd type="none" w="med" len="med"/>
+                    </a:lnT>
+                    <a:lnB w="12700" cap="flat" cmpd="sng" algn="ctr">
+                      <a:solidFill>
+                        <a:schemeClr val="tx1"/>
+                      </a:solidFill>
+                      <a:prstDash val="solid"/>
+                      <a:round/>
+                      <a:headEnd type="none" w="med" len="med"/>
+                      <a:tailEnd type="none" w="med" len="med"/>
+                    </a:lnB>
+                  </a:tcPr>
+                </a:tc>
+                <a:extLst>
+                  <a:ext uri="{0D108BD9-81ED-4DB2-BD59-A6C34878D82A}">
+                    <a16:rowId xmlns:a16="http://schemas.microsoft.com/office/drawing/2014/main" val="1203029904"/>
+                  </a:ext>
+                </a:extLst>
+              </a:tr>
+              <a:tr h="259817">
+                <a:tc vMerge="1">
+                  <a:txBody>
+                    <a:bodyPr/>
+                    <a:lstStyle/>
+                    <a:p>
+                      <a:pPr algn="ctr"/>
+                      <a:endParaRPr lang="en-US" sz="1200" dirty="0"/>
+                    </a:p>
+                  </a:txBody>
+                  <a:tcPr anchor="ctr"/>
+                </a:tc>
+                <a:tc>
+                  <a:txBody>
+                    <a:bodyPr/>
+                    <a:lstStyle/>
+                    <a:p>
+                      <a:pPr algn="ctr"/>
+                      <a:r>
+                        <a:rPr lang="en-US" sz="1100" dirty="0"/>
+                        <a:t>Weight decay</a:t>
+                      </a:r>
+                    </a:p>
+                  </a:txBody>
+                  <a:tcPr anchor="ctr">
+                    <a:lnL w="12700" cap="flat" cmpd="sng" algn="ctr">
+                      <a:solidFill>
+                        <a:schemeClr val="tx1"/>
+                      </a:solidFill>
+                      <a:prstDash val="solid"/>
+                      <a:round/>
+                      <a:headEnd type="none" w="med" len="med"/>
+                      <a:tailEnd type="none" w="med" len="med"/>
+                    </a:lnL>
+                    <a:lnR w="12700" cap="flat" cmpd="sng" algn="ctr">
+                      <a:solidFill>
+                        <a:schemeClr val="tx1"/>
+                      </a:solidFill>
+                      <a:prstDash val="solid"/>
+                      <a:round/>
+                      <a:headEnd type="none" w="med" len="med"/>
+                      <a:tailEnd type="none" w="med" len="med"/>
+                    </a:lnR>
+                    <a:lnT w="12700" cap="flat" cmpd="sng" algn="ctr">
+                      <a:solidFill>
+                        <a:schemeClr val="tx1"/>
+                      </a:solidFill>
+                      <a:prstDash val="solid"/>
+                      <a:round/>
+                      <a:headEnd type="none" w="med" len="med"/>
+                      <a:tailEnd type="none" w="med" len="med"/>
+                    </a:lnT>
+                    <a:lnB w="12700" cap="flat" cmpd="sng" algn="ctr">
+                      <a:solidFill>
+                        <a:schemeClr val="tx1"/>
+                      </a:solidFill>
+                      <a:prstDash val="solid"/>
+                      <a:round/>
+                      <a:headEnd type="none" w="med" len="med"/>
+                      <a:tailEnd type="none" w="med" len="med"/>
+                    </a:lnB>
+                  </a:tcPr>
+                </a:tc>
+                <a:tc>
+                  <a:txBody>
+                    <a:bodyPr/>
+                    <a:lstStyle/>
+                    <a:p>
+                      <a:pPr algn="ctr"/>
+                      <a:r>
+                        <a:rPr lang="en-US" sz="1100" dirty="0"/>
+                        <a:t>0.0001</a:t>
+                      </a:r>
+                    </a:p>
+                  </a:txBody>
+                  <a:tcPr anchor="ctr">
+                    <a:lnL w="12700" cap="flat" cmpd="sng" algn="ctr">
+                      <a:solidFill>
+                        <a:schemeClr val="tx1"/>
+                      </a:solidFill>
+                      <a:prstDash val="solid"/>
+                      <a:round/>
+                      <a:headEnd type="none" w="med" len="med"/>
+                      <a:tailEnd type="none" w="med" len="med"/>
+                    </a:lnL>
+                    <a:lnR w="12700" cap="flat" cmpd="sng" algn="ctr">
+                      <a:solidFill>
+                        <a:schemeClr val="tx1"/>
+                      </a:solidFill>
+                      <a:prstDash val="solid"/>
+                      <a:round/>
+                      <a:headEnd type="none" w="med" len="med"/>
+                      <a:tailEnd type="none" w="med" len="med"/>
+                    </a:lnR>
+                    <a:lnT w="12700" cap="flat" cmpd="sng" algn="ctr">
+                      <a:solidFill>
+                        <a:schemeClr val="tx1"/>
+                      </a:solidFill>
+                      <a:prstDash val="solid"/>
+                      <a:round/>
+                      <a:headEnd type="none" w="med" len="med"/>
+                      <a:tailEnd type="none" w="med" len="med"/>
+                    </a:lnT>
+                    <a:lnB w="12700" cap="flat" cmpd="sng" algn="ctr">
+                      <a:solidFill>
+                        <a:schemeClr val="tx1"/>
+                      </a:solidFill>
+                      <a:prstDash val="solid"/>
+                      <a:round/>
+                      <a:headEnd type="none" w="med" len="med"/>
+                      <a:tailEnd type="none" w="med" len="med"/>
+                    </a:lnB>
+                  </a:tcPr>
+                </a:tc>
+                <a:extLst>
+                  <a:ext uri="{0D108BD9-81ED-4DB2-BD59-A6C34878D82A}">
+                    <a16:rowId xmlns:a16="http://schemas.microsoft.com/office/drawing/2014/main" val="3384254644"/>
+                  </a:ext>
+                </a:extLst>
+              </a:tr>
+              <a:tr h="259817">
+                <a:tc>
+                  <a:txBody>
+                    <a:bodyPr/>
+                    <a:lstStyle/>
+                    <a:p>
+                      <a:pPr algn="ctr"/>
+                      <a:r>
+                        <a:rPr lang="en-US" sz="1100" dirty="0"/>
+                        <a:t>Loss function</a:t>
+                      </a:r>
+                    </a:p>
+                  </a:txBody>
+                  <a:tcPr anchor="ctr">
+                    <a:lnL w="12700" cap="flat" cmpd="sng" algn="ctr">
+                      <a:solidFill>
+                        <a:schemeClr val="tx1"/>
+                      </a:solidFill>
+                      <a:prstDash val="solid"/>
+                      <a:round/>
+                      <a:headEnd type="none" w="med" len="med"/>
+                      <a:tailEnd type="none" w="med" len="med"/>
+                    </a:lnL>
+                    <a:lnR w="12700" cap="flat" cmpd="sng" algn="ctr">
+                      <a:solidFill>
+                        <a:schemeClr val="tx1"/>
+                      </a:solidFill>
+                      <a:prstDash val="solid"/>
+                      <a:round/>
+                      <a:headEnd type="none" w="med" len="med"/>
+                      <a:tailEnd type="none" w="med" len="med"/>
+                    </a:lnR>
+                    <a:lnT w="12700" cap="flat" cmpd="sng" algn="ctr">
+                      <a:solidFill>
+                        <a:schemeClr val="tx1"/>
+                      </a:solidFill>
+                      <a:prstDash val="solid"/>
+                      <a:round/>
+                      <a:headEnd type="none" w="med" len="med"/>
+                      <a:tailEnd type="none" w="med" len="med"/>
+                    </a:lnT>
+                    <a:lnB w="12700" cap="flat" cmpd="sng" algn="ctr">
+                      <a:solidFill>
+                        <a:schemeClr val="tx1"/>
+                      </a:solidFill>
+                      <a:prstDash val="solid"/>
+                      <a:round/>
+                      <a:headEnd type="none" w="med" len="med"/>
+                      <a:tailEnd type="none" w="med" len="med"/>
+                    </a:lnB>
+                  </a:tcPr>
+                </a:tc>
+                <a:tc>
+                  <a:txBody>
+                    <a:bodyPr/>
+                    <a:lstStyle/>
+                    <a:p>
+                      <a:pPr algn="ctr"/>
+                      <a:r>
+                        <a:rPr lang="en-US" sz="1100" dirty="0" err="1"/>
+                        <a:t>DiceCELoss</a:t>
+                      </a:r>
+                      <a:endParaRPr lang="en-US" sz="1100" dirty="0"/>
+                    </a:p>
+                  </a:txBody>
+                  <a:tcPr anchor="ctr">
+                    <a:lnL w="12700" cap="flat" cmpd="sng" algn="ctr">
+                      <a:solidFill>
+                        <a:schemeClr val="tx1"/>
+                      </a:solidFill>
+                      <a:prstDash val="solid"/>
+                      <a:round/>
+                      <a:headEnd type="none" w="med" len="med"/>
+                      <a:tailEnd type="none" w="med" len="med"/>
+                    </a:lnL>
+                    <a:lnR w="12700" cap="flat" cmpd="sng" algn="ctr">
+                      <a:solidFill>
+                        <a:schemeClr val="tx1"/>
+                      </a:solidFill>
+                      <a:prstDash val="solid"/>
+                      <a:round/>
+                      <a:headEnd type="none" w="med" len="med"/>
+                      <a:tailEnd type="none" w="med" len="med"/>
+                    </a:lnR>
+                    <a:lnT w="12700" cap="flat" cmpd="sng" algn="ctr">
+                      <a:solidFill>
+                        <a:schemeClr val="tx1"/>
+                      </a:solidFill>
+                      <a:prstDash val="solid"/>
+                      <a:round/>
+                      <a:headEnd type="none" w="med" len="med"/>
+                      <a:tailEnd type="none" w="med" len="med"/>
+                    </a:lnT>
+                    <a:lnB w="12700" cap="flat" cmpd="sng" algn="ctr">
+                      <a:solidFill>
+                        <a:schemeClr val="tx1"/>
+                      </a:solidFill>
+                      <a:prstDash val="solid"/>
+                      <a:round/>
+                      <a:headEnd type="none" w="med" len="med"/>
+                      <a:tailEnd type="none" w="med" len="med"/>
+                    </a:lnB>
+                  </a:tcPr>
+                </a:tc>
+                <a:tc>
+                  <a:txBody>
+                    <a:bodyPr/>
+                    <a:lstStyle/>
+                    <a:p>
+                      <a:pPr algn="ctr"/>
+                      <a:r>
+                        <a:rPr lang="en-US" sz="1100" dirty="0"/>
+                        <a:t>-</a:t>
+                      </a:r>
+                    </a:p>
+                  </a:txBody>
+                  <a:tcPr anchor="ctr">
+                    <a:lnL w="12700" cap="flat" cmpd="sng" algn="ctr">
+                      <a:solidFill>
+                        <a:schemeClr val="tx1"/>
+                      </a:solidFill>
+                      <a:prstDash val="solid"/>
+                      <a:round/>
+                      <a:headEnd type="none" w="med" len="med"/>
+                      <a:tailEnd type="none" w="med" len="med"/>
+                    </a:lnL>
+                    <a:lnR w="12700" cap="flat" cmpd="sng" algn="ctr">
+                      <a:solidFill>
+                        <a:schemeClr val="tx1"/>
+                      </a:solidFill>
+                      <a:prstDash val="solid"/>
+                      <a:round/>
+                      <a:headEnd type="none" w="med" len="med"/>
+                      <a:tailEnd type="none" w="med" len="med"/>
+                    </a:lnR>
+                    <a:lnT w="12700" cap="flat" cmpd="sng" algn="ctr">
+                      <a:solidFill>
+                        <a:schemeClr val="tx1"/>
+                      </a:solidFill>
+                      <a:prstDash val="solid"/>
+                      <a:round/>
+                      <a:headEnd type="none" w="med" len="med"/>
+                      <a:tailEnd type="none" w="med" len="med"/>
+                    </a:lnT>
+                    <a:lnB w="12700" cap="flat" cmpd="sng" algn="ctr">
+                      <a:solidFill>
+                        <a:schemeClr val="tx1"/>
+                      </a:solidFill>
+                      <a:prstDash val="solid"/>
+                      <a:round/>
+                      <a:headEnd type="none" w="med" len="med"/>
+                      <a:tailEnd type="none" w="med" len="med"/>
+                    </a:lnB>
+                  </a:tcPr>
+                </a:tc>
+                <a:extLst>
+                  <a:ext uri="{0D108BD9-81ED-4DB2-BD59-A6C34878D82A}">
+                    <a16:rowId xmlns:a16="http://schemas.microsoft.com/office/drawing/2014/main" val="170432507"/>
+                  </a:ext>
+                </a:extLst>
+              </a:tr>
+              <a:tr h="259817">
+                <a:tc rowSpan="2">
+                  <a:txBody>
+                    <a:bodyPr/>
+                    <a:lstStyle/>
+                    <a:p>
+                      <a:pPr algn="ctr"/>
+                      <a:r>
+                        <a:rPr lang="en-US" sz="1100" dirty="0"/>
+                        <a:t>Training loop</a:t>
+                      </a:r>
+                    </a:p>
+                  </a:txBody>
+                  <a:tcPr anchor="ctr">
+                    <a:lnL w="12700" cap="flat" cmpd="sng" algn="ctr">
+                      <a:solidFill>
+                        <a:schemeClr val="tx1"/>
+                      </a:solidFill>
+                      <a:prstDash val="solid"/>
+                      <a:round/>
+                      <a:headEnd type="none" w="med" len="med"/>
+                      <a:tailEnd type="none" w="med" len="med"/>
+                    </a:lnL>
+                    <a:lnR w="12700" cap="flat" cmpd="sng" algn="ctr">
+                      <a:solidFill>
+                        <a:schemeClr val="tx1"/>
+                      </a:solidFill>
+                      <a:prstDash val="solid"/>
+                      <a:round/>
+                      <a:headEnd type="none" w="med" len="med"/>
+                      <a:tailEnd type="none" w="med" len="med"/>
+                    </a:lnR>
+                    <a:lnT w="12700" cap="flat" cmpd="sng" algn="ctr">
+                      <a:solidFill>
+                        <a:schemeClr val="tx1"/>
+                      </a:solidFill>
+                      <a:prstDash val="solid"/>
+                      <a:round/>
+                      <a:headEnd type="none" w="med" len="med"/>
+                      <a:tailEnd type="none" w="med" len="med"/>
+                    </a:lnT>
+                    <a:lnB w="12700" cap="flat" cmpd="sng" algn="ctr">
+                      <a:solidFill>
+                        <a:schemeClr val="tx1"/>
+                      </a:solidFill>
+                      <a:prstDash val="solid"/>
+                      <a:round/>
+                      <a:headEnd type="none" w="med" len="med"/>
+                      <a:tailEnd type="none" w="med" len="med"/>
+                    </a:lnB>
+                  </a:tcPr>
+                </a:tc>
+                <a:tc>
+                  <a:txBody>
+                    <a:bodyPr/>
+                    <a:lstStyle/>
+                    <a:p>
+                      <a:pPr algn="ctr"/>
+                      <a:r>
+                        <a:rPr lang="en-US" sz="1100" dirty="0"/>
+                        <a:t>Epochs</a:t>
+                      </a:r>
+                    </a:p>
+                  </a:txBody>
+                  <a:tcPr anchor="ctr">
+                    <a:lnL w="12700" cap="flat" cmpd="sng" algn="ctr">
+                      <a:solidFill>
+                        <a:schemeClr val="tx1"/>
+                      </a:solidFill>
+                      <a:prstDash val="solid"/>
+                      <a:round/>
+                      <a:headEnd type="none" w="med" len="med"/>
+                      <a:tailEnd type="none" w="med" len="med"/>
+                    </a:lnL>
+                    <a:lnR w="12700" cap="flat" cmpd="sng" algn="ctr">
+                      <a:solidFill>
+                        <a:schemeClr val="tx1"/>
+                      </a:solidFill>
+                      <a:prstDash val="solid"/>
+                      <a:round/>
+                      <a:headEnd type="none" w="med" len="med"/>
+                      <a:tailEnd type="none" w="med" len="med"/>
+                    </a:lnR>
+                    <a:lnT w="12700" cap="flat" cmpd="sng" algn="ctr">
+                      <a:solidFill>
+                        <a:schemeClr val="tx1"/>
+                      </a:solidFill>
+                      <a:prstDash val="solid"/>
+                      <a:round/>
+                      <a:headEnd type="none" w="med" len="med"/>
+                      <a:tailEnd type="none" w="med" len="med"/>
+                    </a:lnT>
+                    <a:lnB w="12700" cap="flat" cmpd="sng" algn="ctr">
+                      <a:solidFill>
+                        <a:schemeClr val="tx1"/>
+                      </a:solidFill>
+                      <a:prstDash val="solid"/>
+                      <a:round/>
+                      <a:headEnd type="none" w="med" len="med"/>
+                      <a:tailEnd type="none" w="med" len="med"/>
+                    </a:lnB>
+                  </a:tcPr>
+                </a:tc>
+                <a:tc>
+                  <a:txBody>
+                    <a:bodyPr/>
+                    <a:lstStyle/>
+                    <a:p>
+                      <a:pPr algn="ctr"/>
+                      <a:r>
+                        <a:rPr lang="en-US" sz="1100" dirty="0"/>
+                        <a:t>50</a:t>
+                      </a:r>
+                    </a:p>
+                  </a:txBody>
+                  <a:tcPr anchor="ctr">
+                    <a:lnL w="12700" cap="flat" cmpd="sng" algn="ctr">
+                      <a:solidFill>
+                        <a:schemeClr val="tx1"/>
+                      </a:solidFill>
+                      <a:prstDash val="solid"/>
+                      <a:round/>
+                      <a:headEnd type="none" w="med" len="med"/>
+                      <a:tailEnd type="none" w="med" len="med"/>
+                    </a:lnL>
+                    <a:lnR w="12700" cap="flat" cmpd="sng" algn="ctr">
+                      <a:solidFill>
+                        <a:schemeClr val="tx1"/>
+                      </a:solidFill>
+                      <a:prstDash val="solid"/>
+                      <a:round/>
+                      <a:headEnd type="none" w="med" len="med"/>
+                      <a:tailEnd type="none" w="med" len="med"/>
+                    </a:lnR>
+                    <a:lnT w="12700" cap="flat" cmpd="sng" algn="ctr">
+                      <a:solidFill>
+                        <a:schemeClr val="tx1"/>
+                      </a:solidFill>
+                      <a:prstDash val="solid"/>
+                      <a:round/>
+                      <a:headEnd type="none" w="med" len="med"/>
+                      <a:tailEnd type="none" w="med" len="med"/>
+                    </a:lnT>
+                    <a:lnB w="12700" cap="flat" cmpd="sng" algn="ctr">
+                      <a:solidFill>
+                        <a:schemeClr val="tx1"/>
+                      </a:solidFill>
+                      <a:prstDash val="solid"/>
+                      <a:round/>
+                      <a:headEnd type="none" w="med" len="med"/>
+                      <a:tailEnd type="none" w="med" len="med"/>
+                    </a:lnB>
+                  </a:tcPr>
+                </a:tc>
+                <a:extLst>
+                  <a:ext uri="{0D108BD9-81ED-4DB2-BD59-A6C34878D82A}">
+                    <a16:rowId xmlns:a16="http://schemas.microsoft.com/office/drawing/2014/main" val="1915028472"/>
+                  </a:ext>
+                </a:extLst>
+              </a:tr>
+              <a:tr h="259817">
+                <a:tc vMerge="1">
+                  <a:txBody>
+                    <a:bodyPr/>
+                    <a:lstStyle/>
+                    <a:p>
+                      <a:pPr algn="ctr"/>
+                      <a:endParaRPr lang="en-US" sz="1200" dirty="0"/>
+                    </a:p>
+                  </a:txBody>
+                  <a:tcPr anchor="ctr">
+                    <a:lnL w="12700" cap="flat" cmpd="sng" algn="ctr">
+                      <a:solidFill>
+                        <a:schemeClr val="tx1"/>
+                      </a:solidFill>
+                      <a:prstDash val="solid"/>
+                      <a:round/>
+                      <a:headEnd type="none" w="med" len="med"/>
+                      <a:tailEnd type="none" w="med" len="med"/>
+                    </a:lnL>
+                    <a:lnR w="12700" cap="flat" cmpd="sng" algn="ctr">
+                      <a:solidFill>
+                        <a:schemeClr val="tx1"/>
+                      </a:solidFill>
+                      <a:prstDash val="solid"/>
+                      <a:round/>
+                      <a:headEnd type="none" w="med" len="med"/>
+                      <a:tailEnd type="none" w="med" len="med"/>
+                    </a:lnR>
+                    <a:lnT w="12700" cap="flat" cmpd="sng" algn="ctr">
+                      <a:solidFill>
+                        <a:schemeClr val="tx1"/>
+                      </a:solidFill>
+                      <a:prstDash val="solid"/>
+                      <a:round/>
+                      <a:headEnd type="none" w="med" len="med"/>
+                      <a:tailEnd type="none" w="med" len="med"/>
+                    </a:lnT>
+                    <a:lnB w="12700" cap="flat" cmpd="sng" algn="ctr">
+                      <a:solidFill>
+                        <a:schemeClr val="tx1"/>
+                      </a:solidFill>
+                      <a:prstDash val="solid"/>
+                      <a:round/>
+                      <a:headEnd type="none" w="med" len="med"/>
+                      <a:tailEnd type="none" w="med" len="med"/>
+                    </a:lnB>
+                  </a:tcPr>
+                </a:tc>
+                <a:tc>
+                  <a:txBody>
+                    <a:bodyPr/>
+                    <a:lstStyle/>
+                    <a:p>
+                      <a:pPr algn="ctr"/>
+                      <a:r>
+                        <a:rPr lang="en-US" sz="1100" dirty="0"/>
+                        <a:t>Batch size</a:t>
+                      </a:r>
+                    </a:p>
+                  </a:txBody>
+                  <a:tcPr anchor="ctr">
+                    <a:lnL w="12700" cap="flat" cmpd="sng" algn="ctr">
+                      <a:solidFill>
+                        <a:schemeClr val="tx1"/>
+                      </a:solidFill>
+                      <a:prstDash val="solid"/>
+                      <a:round/>
+                      <a:headEnd type="none" w="med" len="med"/>
+                      <a:tailEnd type="none" w="med" len="med"/>
+                    </a:lnL>
+                    <a:lnR w="12700" cap="flat" cmpd="sng" algn="ctr">
+                      <a:solidFill>
+                        <a:schemeClr val="tx1"/>
+                      </a:solidFill>
+                      <a:prstDash val="solid"/>
+                      <a:round/>
+                      <a:headEnd type="none" w="med" len="med"/>
+                      <a:tailEnd type="none" w="med" len="med"/>
+                    </a:lnR>
+                    <a:lnT w="12700" cap="flat" cmpd="sng" algn="ctr">
+                      <a:solidFill>
+                        <a:schemeClr val="tx1"/>
+                      </a:solidFill>
+                      <a:prstDash val="solid"/>
+                      <a:round/>
+                      <a:headEnd type="none" w="med" len="med"/>
+                      <a:tailEnd type="none" w="med" len="med"/>
+                    </a:lnT>
+                    <a:lnB w="12700" cap="flat" cmpd="sng" algn="ctr">
+                      <a:solidFill>
+                        <a:schemeClr val="tx1"/>
+                      </a:solidFill>
+                      <a:prstDash val="solid"/>
+                      <a:round/>
+                      <a:headEnd type="none" w="med" len="med"/>
+                      <a:tailEnd type="none" w="med" len="med"/>
+                    </a:lnB>
+                  </a:tcPr>
+                </a:tc>
+                <a:tc>
+                  <a:txBody>
+                    <a:bodyPr/>
+                    <a:lstStyle/>
+                    <a:p>
+                      <a:pPr algn="ctr"/>
+                      <a:r>
+                        <a:rPr lang="en-US" sz="1100" dirty="0"/>
+                        <a:t>2</a:t>
+                      </a:r>
+                    </a:p>
+                  </a:txBody>
+                  <a:tcPr anchor="ctr">
+                    <a:lnL w="12700" cap="flat" cmpd="sng" algn="ctr">
+                      <a:solidFill>
+                        <a:schemeClr val="tx1"/>
+                      </a:solidFill>
+                      <a:prstDash val="solid"/>
+                      <a:round/>
+                      <a:headEnd type="none" w="med" len="med"/>
+                      <a:tailEnd type="none" w="med" len="med"/>
+                    </a:lnL>
+                    <a:lnR w="12700" cap="flat" cmpd="sng" algn="ctr">
+                      <a:solidFill>
+                        <a:schemeClr val="tx1"/>
+                      </a:solidFill>
+                      <a:prstDash val="solid"/>
+                      <a:round/>
+                      <a:headEnd type="none" w="med" len="med"/>
+                      <a:tailEnd type="none" w="med" len="med"/>
+                    </a:lnR>
+                    <a:lnT w="12700" cap="flat" cmpd="sng" algn="ctr">
+                      <a:solidFill>
+                        <a:schemeClr val="tx1"/>
+                      </a:solidFill>
+                      <a:prstDash val="solid"/>
+                      <a:round/>
+                      <a:headEnd type="none" w="med" len="med"/>
+                      <a:tailEnd type="none" w="med" len="med"/>
+                    </a:lnT>
+                    <a:lnB w="12700" cap="flat" cmpd="sng" algn="ctr">
+                      <a:solidFill>
+                        <a:schemeClr val="tx1"/>
+                      </a:solidFill>
+                      <a:prstDash val="solid"/>
+                      <a:round/>
+                      <a:headEnd type="none" w="med" len="med"/>
+                      <a:tailEnd type="none" w="med" len="med"/>
+                    </a:lnB>
+                  </a:tcPr>
+                </a:tc>
+                <a:extLst>
+                  <a:ext uri="{0D108BD9-81ED-4DB2-BD59-A6C34878D82A}">
+                    <a16:rowId xmlns:a16="http://schemas.microsoft.com/office/drawing/2014/main" val="3019364762"/>
+                  </a:ext>
+                </a:extLst>
+              </a:tr>
+            </a:tbl>
+          </a:graphicData>
+        </a:graphic>
+      </p:graphicFrame>
+      <p:sp>
+        <p:nvSpPr>
+          <p:cNvPr id="30" name="TextBox 29">
+            <a:extLst>
+              <a:ext uri="{FF2B5EF4-FFF2-40B4-BE49-F238E27FC236}">
+                <a16:creationId xmlns:a16="http://schemas.microsoft.com/office/drawing/2014/main" id="{9BCBB3D1-E2CD-B292-0D73-01E299EA50EC}"/>
+              </a:ext>
+            </a:extLst>
+          </p:cNvPr>
+          <p:cNvSpPr txBox="1"/>
+          <p:nvPr/>
+        </p:nvSpPr>
+        <p:spPr>
+          <a:xfrm>
+            <a:off x="7188200" y="1708150"/>
+            <a:ext cx="2971800" cy="369332"/>
+          </a:xfrm>
+          <a:prstGeom prst="rect">
+            <a:avLst/>
+          </a:prstGeom>
+          <a:noFill/>
+          <a:ln>
+            <a:solidFill>
+              <a:schemeClr val="bg2">
+                <a:lumMod val="75000"/>
+              </a:schemeClr>
+            </a:solidFill>
+          </a:ln>
+        </p:spPr>
+        <p:txBody>
+          <a:bodyPr wrap="square" rtlCol="0">
+            <a:spAutoFit/>
+          </a:bodyPr>
+          <a:lstStyle/>
+          <a:p>
+            <a:pPr algn="ctr"/>
+            <a:r>
+              <a:rPr lang="en-US" dirty="0"/>
+              <a:t>U-NET architecture</a:t>
+            </a:r>
+          </a:p>
+        </p:txBody>
+      </p:sp>
+      <p:sp>
+        <p:nvSpPr>
+          <p:cNvPr id="31" name="Title 1">
+            <a:extLst>
+              <a:ext uri="{FF2B5EF4-FFF2-40B4-BE49-F238E27FC236}">
+                <a16:creationId xmlns:a16="http://schemas.microsoft.com/office/drawing/2014/main" id="{60DBCD0E-DBBD-9095-EF35-317929532D8E}"/>
               </a:ext>
             </a:extLst>
           </p:cNvPr>
@@ -13302,121 +20149,332 @@
             <a:spLocks noGrp="1"/>
           </p:cNvSpPr>
           <p:nvPr>
-            <p:ph type="title"/>
+            <p:ph type="ctrTitle"/>
           </p:nvPr>
         </p:nvSpPr>
-        <p:spPr/>
+        <p:spPr>
+          <a:xfrm>
+            <a:off x="1463675" y="156409"/>
+            <a:ext cx="9264649" cy="938530"/>
+          </a:xfrm>
+        </p:spPr>
         <p:txBody>
           <a:bodyPr/>
           <a:lstStyle/>
           <a:p>
-            <a:r>
-              <a:rPr lang="en-US" dirty="0"/>
-              <a:t>Navigating Q&amp;A sessions</a:t>
-            </a:r>
-          </a:p>
-        </p:txBody>
-      </p:sp>
-      <p:sp>
-        <p:nvSpPr>
-          <p:cNvPr id="3" name="Content Placeholder 2">
+            <a:pPr algn="ctr"/>
+            <a:r>
+              <a:rPr lang="en-US" sz="2800" dirty="0"/>
+              <a:t>MODEL SPECIFICATION</a:t>
+            </a:r>
+          </a:p>
+        </p:txBody>
+      </p:sp>
+      <p:sp>
+        <p:nvSpPr>
+          <p:cNvPr id="34" name="TextBox 33">
             <a:extLst>
               <a:ext uri="{FF2B5EF4-FFF2-40B4-BE49-F238E27FC236}">
-                <a16:creationId xmlns:a16="http://schemas.microsoft.com/office/drawing/2014/main" id="{68A5FD2B-E3E5-1C2B-0151-21F216B14A33}"/>
+                <a16:creationId xmlns:a16="http://schemas.microsoft.com/office/drawing/2014/main" id="{CFA0F3E9-5BED-ED49-9275-712A560D7053}"/>
               </a:ext>
             </a:extLst>
           </p:cNvPr>
-          <p:cNvSpPr>
-            <a:spLocks noGrp="1"/>
-          </p:cNvSpPr>
-          <p:nvPr>
-            <p:ph sz="half" idx="13"/>
-          </p:nvPr>
+          <p:cNvSpPr txBox="1"/>
+          <p:nvPr/>
         </p:nvSpPr>
         <p:spPr>
+          <a:xfrm>
+            <a:off x="5600700" y="2882900"/>
+            <a:ext cx="393700" cy="276999"/>
+          </a:xfrm>
+          <a:prstGeom prst="rect">
+            <a:avLst/>
+          </a:prstGeom>
           <a:noFill/>
         </p:spPr>
         <p:txBody>
-          <a:bodyPr>
-            <a:normAutofit/>
+          <a:bodyPr wrap="square" rtlCol="0">
+            <a:spAutoFit/>
           </a:bodyPr>
           <a:lstStyle/>
           <a:p>
             <a:r>
-              <a:rPr lang="en-US" dirty="0"/>
-              <a:t>Know your material in advance</a:t>
-            </a:r>
-          </a:p>
-          <a:p>
-            <a:r>
-              <a:rPr lang="en-US" dirty="0"/>
-              <a:t>Anticipate common questions</a:t>
-            </a:r>
-          </a:p>
-          <a:p>
-            <a:r>
-              <a:rPr lang="en-US" dirty="0"/>
-              <a:t>Rehearse your responses</a:t>
-            </a:r>
-          </a:p>
-        </p:txBody>
-      </p:sp>
-      <p:sp>
-        <p:nvSpPr>
-          <p:cNvPr id="4" name="Content Placeholder 3">
+              <a:rPr lang="en-US" sz="1200" dirty="0"/>
+              <a:t>(*)</a:t>
+            </a:r>
+          </a:p>
+        </p:txBody>
+      </p:sp>
+      <p:sp>
+        <p:nvSpPr>
+          <p:cNvPr id="36" name="TextBox 35">
             <a:extLst>
               <a:ext uri="{FF2B5EF4-FFF2-40B4-BE49-F238E27FC236}">
-                <a16:creationId xmlns:a16="http://schemas.microsoft.com/office/drawing/2014/main" id="{ACFBB810-3430-2C29-1AA0-9744AA0A1AA3}"/>
+                <a16:creationId xmlns:a16="http://schemas.microsoft.com/office/drawing/2014/main" id="{E83AE2D1-8791-E9B4-11F3-791395241A3B}"/>
               </a:ext>
             </a:extLst>
           </p:cNvPr>
-          <p:cNvSpPr>
-            <a:spLocks noGrp="1"/>
-          </p:cNvSpPr>
-          <p:nvPr>
-            <p:ph sz="half" idx="2"/>
-          </p:nvPr>
+          <p:cNvSpPr txBox="1"/>
+          <p:nvPr/>
         </p:nvSpPr>
         <p:spPr>
+          <a:xfrm>
+            <a:off x="539750" y="1297801"/>
+            <a:ext cx="393700" cy="276999"/>
+          </a:xfrm>
+          <a:prstGeom prst="rect">
+            <a:avLst/>
+          </a:prstGeom>
           <a:noFill/>
         </p:spPr>
         <p:txBody>
-          <a:bodyPr>
-            <a:normAutofit/>
+          <a:bodyPr wrap="square" rtlCol="0">
+            <a:spAutoFit/>
           </a:bodyPr>
           <a:lstStyle/>
           <a:p>
             <a:r>
+              <a:rPr lang="en-US" sz="1200" dirty="0"/>
+              <a:t>(*)</a:t>
+            </a:r>
+          </a:p>
+        </p:txBody>
+      </p:sp>
+      <p:sp>
+        <p:nvSpPr>
+          <p:cNvPr id="37" name="Rectangle: Rounded Corners 36">
+            <a:extLst>
+              <a:ext uri="{FF2B5EF4-FFF2-40B4-BE49-F238E27FC236}">
+                <a16:creationId xmlns:a16="http://schemas.microsoft.com/office/drawing/2014/main" id="{ECEC1321-8A2B-46EB-9C74-2F312D6BAB21}"/>
+              </a:ext>
+            </a:extLst>
+          </p:cNvPr>
+          <p:cNvSpPr/>
+          <p:nvPr/>
+        </p:nvSpPr>
+        <p:spPr>
+          <a:xfrm>
+            <a:off x="933450" y="1358900"/>
+            <a:ext cx="2279650" cy="471100"/>
+          </a:xfrm>
+          <a:prstGeom prst="roundRect">
+            <a:avLst/>
+          </a:prstGeom>
+        </p:spPr>
+        <p:style>
+          <a:lnRef idx="1">
+            <a:schemeClr val="accent5"/>
+          </a:lnRef>
+          <a:fillRef idx="2">
+            <a:schemeClr val="accent5"/>
+          </a:fillRef>
+          <a:effectRef idx="1">
+            <a:schemeClr val="accent5"/>
+          </a:effectRef>
+          <a:fontRef idx="minor">
+            <a:schemeClr val="dk1"/>
+          </a:fontRef>
+        </p:style>
+        <p:txBody>
+          <a:bodyPr rtlCol="0" anchor="ctr"/>
+          <a:lstStyle/>
+          <a:p>
+            <a:pPr algn="ctr"/>
+            <a:r>
               <a:rPr lang="en-US" dirty="0"/>
-              <a:t>Maintaining composure during the Q&amp;A session is essential for projecting confidence and authority. Consider the following tips for staying composed:</a:t>
-            </a:r>
-          </a:p>
-          <a:p>
-            <a:pPr lvl="1"/>
+              <a:t>Conv 3D</a:t>
+            </a:r>
+          </a:p>
+          <a:p>
+            <a:pPr algn="ctr"/>
+            <a:r>
+              <a:rPr lang="en-US" sz="1050" dirty="0"/>
+              <a:t>kernel size (3,3,3)</a:t>
+            </a:r>
+          </a:p>
+        </p:txBody>
+      </p:sp>
+      <p:sp>
+        <p:nvSpPr>
+          <p:cNvPr id="39" name="Rectangle: Rounded Corners 38">
+            <a:extLst>
+              <a:ext uri="{FF2B5EF4-FFF2-40B4-BE49-F238E27FC236}">
+                <a16:creationId xmlns:a16="http://schemas.microsoft.com/office/drawing/2014/main" id="{2F59A19B-476F-A485-6E4E-1C280A346F04}"/>
+              </a:ext>
+            </a:extLst>
+          </p:cNvPr>
+          <p:cNvSpPr/>
+          <p:nvPr/>
+        </p:nvSpPr>
+        <p:spPr>
+          <a:xfrm>
+            <a:off x="933450" y="2206625"/>
+            <a:ext cx="2279650" cy="393700"/>
+          </a:xfrm>
+          <a:prstGeom prst="roundRect">
+            <a:avLst/>
+          </a:prstGeom>
+        </p:spPr>
+        <p:style>
+          <a:lnRef idx="1">
+            <a:schemeClr val="accent5"/>
+          </a:lnRef>
+          <a:fillRef idx="2">
+            <a:schemeClr val="accent5"/>
+          </a:fillRef>
+          <a:effectRef idx="1">
+            <a:schemeClr val="accent5"/>
+          </a:effectRef>
+          <a:fontRef idx="minor">
+            <a:schemeClr val="dk1"/>
+          </a:fontRef>
+        </p:style>
+        <p:txBody>
+          <a:bodyPr rtlCol="0" anchor="ctr"/>
+          <a:lstStyle/>
+          <a:p>
+            <a:pPr algn="ctr"/>
             <a:r>
               <a:rPr lang="en-US" dirty="0"/>
-              <a:t>Stay calm</a:t>
-            </a:r>
-          </a:p>
-          <a:p>
-            <a:pPr lvl="1"/>
+              <a:t>Dropout</a:t>
+            </a:r>
+          </a:p>
+        </p:txBody>
+      </p:sp>
+      <p:sp>
+        <p:nvSpPr>
+          <p:cNvPr id="41" name="Rectangle: Rounded Corners 40">
+            <a:extLst>
+              <a:ext uri="{FF2B5EF4-FFF2-40B4-BE49-F238E27FC236}">
+                <a16:creationId xmlns:a16="http://schemas.microsoft.com/office/drawing/2014/main" id="{4C715843-FE40-A2C3-6A6A-04AFF8C9A9D0}"/>
+              </a:ext>
+            </a:extLst>
+          </p:cNvPr>
+          <p:cNvSpPr/>
+          <p:nvPr/>
+        </p:nvSpPr>
+        <p:spPr>
+          <a:xfrm>
+            <a:off x="933450" y="1816100"/>
+            <a:ext cx="2279650" cy="393700"/>
+          </a:xfrm>
+          <a:prstGeom prst="roundRect">
+            <a:avLst/>
+          </a:prstGeom>
+        </p:spPr>
+        <p:style>
+          <a:lnRef idx="1">
+            <a:schemeClr val="accent5"/>
+          </a:lnRef>
+          <a:fillRef idx="2">
+            <a:schemeClr val="accent5"/>
+          </a:fillRef>
+          <a:effectRef idx="1">
+            <a:schemeClr val="accent5"/>
+          </a:effectRef>
+          <a:fontRef idx="minor">
+            <a:schemeClr val="dk1"/>
+          </a:fontRef>
+        </p:style>
+        <p:txBody>
+          <a:bodyPr rtlCol="0" anchor="ctr"/>
+          <a:lstStyle/>
+          <a:p>
+            <a:pPr algn="ctr"/>
             <a:r>
               <a:rPr lang="en-US" dirty="0"/>
-              <a:t>Actively listen</a:t>
-            </a:r>
-          </a:p>
-          <a:p>
-            <a:pPr lvl="1"/>
-            <a:r>
-              <a:rPr lang="en-US" dirty="0"/>
-              <a:t>Pause and reflect</a:t>
-            </a:r>
-          </a:p>
-          <a:p>
-            <a:pPr lvl="1"/>
-            <a:r>
-              <a:rPr lang="en-US" dirty="0"/>
-              <a:t>Maintain eye contact</a:t>
+              <a:t>Feature map norm</a:t>
+            </a:r>
+          </a:p>
+        </p:txBody>
+      </p:sp>
+      <p:sp>
+        <p:nvSpPr>
+          <p:cNvPr id="43" name="Rectangle: Rounded Corners 42">
+            <a:extLst>
+              <a:ext uri="{FF2B5EF4-FFF2-40B4-BE49-F238E27FC236}">
+                <a16:creationId xmlns:a16="http://schemas.microsoft.com/office/drawing/2014/main" id="{9D62BDE9-EDA6-6C3C-E4C4-E27E4B2E4E32}"/>
+              </a:ext>
+            </a:extLst>
+          </p:cNvPr>
+          <p:cNvSpPr/>
+          <p:nvPr/>
+        </p:nvSpPr>
+        <p:spPr>
+          <a:xfrm>
+            <a:off x="933450" y="2597150"/>
+            <a:ext cx="2279650" cy="393700"/>
+          </a:xfrm>
+          <a:prstGeom prst="roundRect">
+            <a:avLst/>
+          </a:prstGeom>
+        </p:spPr>
+        <p:style>
+          <a:lnRef idx="1">
+            <a:schemeClr val="accent5"/>
+          </a:lnRef>
+          <a:fillRef idx="2">
+            <a:schemeClr val="accent5"/>
+          </a:fillRef>
+          <a:effectRef idx="1">
+            <a:schemeClr val="accent5"/>
+          </a:effectRef>
+          <a:fontRef idx="minor">
+            <a:schemeClr val="dk1"/>
+          </a:fontRef>
+        </p:style>
+        <p:txBody>
+          <a:bodyPr rtlCol="0" anchor="ctr"/>
+          <a:lstStyle/>
+          <a:p>
+            <a:pPr algn="ctr"/>
+            <a:r>
+              <a:rPr lang="en-US" dirty="0" err="1"/>
+              <a:t>PReLU</a:t>
+            </a:r>
+            <a:endParaRPr lang="en-US" dirty="0"/>
+          </a:p>
+        </p:txBody>
+      </p:sp>
+      <p:sp>
+        <p:nvSpPr>
+          <p:cNvPr id="44" name="TextBox 43">
+            <a:extLst>
+              <a:ext uri="{FF2B5EF4-FFF2-40B4-BE49-F238E27FC236}">
+                <a16:creationId xmlns:a16="http://schemas.microsoft.com/office/drawing/2014/main" id="{8484785C-1917-7F06-FC0F-26F5812F0548}"/>
+              </a:ext>
+            </a:extLst>
+          </p:cNvPr>
+          <p:cNvSpPr txBox="1"/>
+          <p:nvPr/>
+        </p:nvSpPr>
+        <p:spPr>
+          <a:xfrm>
+            <a:off x="641350" y="2962701"/>
+            <a:ext cx="3003550" cy="830997"/>
+          </a:xfrm>
+          <a:prstGeom prst="rect">
+            <a:avLst/>
+          </a:prstGeom>
+          <a:noFill/>
+        </p:spPr>
+        <p:txBody>
+          <a:bodyPr wrap="square" rtlCol="0">
+            <a:spAutoFit/>
+          </a:bodyPr>
+          <a:lstStyle/>
+          <a:p>
+            <a:r>
+              <a:rPr lang="en-US" sz="1200" i="1" dirty="0"/>
+              <a:t>Single residual unit blocks: after the 3D </a:t>
+            </a:r>
+            <a:r>
+              <a:rPr lang="en-US" sz="1200" i="1" dirty="0" err="1"/>
+              <a:t>convolution,values</a:t>
+            </a:r>
+            <a:r>
+              <a:rPr lang="en-US" sz="1200" i="1" dirty="0"/>
+              <a:t> of each single feature map are normalized. Dropout of rate 0.2 is performed and eventually a non linearity function is applied</a:t>
             </a:r>
           </a:p>
         </p:txBody>
@@ -13424,7 +20482,7 @@
     </p:spTree>
     <p:extLst>
       <p:ext uri="{BB962C8B-B14F-4D97-AF65-F5344CB8AC3E}">
-        <p14:creationId xmlns:p14="http://schemas.microsoft.com/office/powerpoint/2010/main" val="2676905442"/>
+        <p14:creationId xmlns:p14="http://schemas.microsoft.com/office/powerpoint/2010/main" val="1605306264"/>
       </p:ext>
     </p:extLst>
   </p:cSld>
@@ -14294,6 +21352,15 @@
 </file>
 
 <file path=customXml/item1.xml><?xml version="1.0" encoding="utf-8"?>
+<?mso-contentType ?>
+<FormTemplates xmlns="http://schemas.microsoft.com/sharepoint/v3/contenttype/forms">
+  <Display>DocumentLibraryForm</Display>
+  <Edit>DocumentLibraryForm</Edit>
+  <New>DocumentLibraryForm</New>
+</FormTemplates>
+</file>
+
+<file path=customXml/item2.xml><?xml version="1.0" encoding="utf-8"?>
 <ct:contentTypeSchema xmlns:ct="http://schemas.microsoft.com/office/2006/metadata/contentType" xmlns:ma="http://schemas.microsoft.com/office/2006/metadata/properties/metaAttributes" ct:_="" ma:_="" ma:contentTypeName="Document" ma:contentTypeID="0x01010079F111ED35F8CC479449609E8A0923A6" ma:contentTypeVersion="28" ma:contentTypeDescription="Create a new document." ma:contentTypeScope="" ma:versionID="60f5a4f2d2b0abadcf532d48ebf9cb71">
   <xsd:schema xmlns:xsd="http://www.w3.org/2001/XMLSchema" xmlns:xs="http://www.w3.org/2001/XMLSchema" xmlns:p="http://schemas.microsoft.com/office/2006/metadata/properties" xmlns:ns1="http://schemas.microsoft.com/sharepoint/v3" xmlns:ns2="71af3243-3dd4-4a8d-8c0d-dd76da1f02a5" xmlns:ns3="16c05727-aa75-4e4a-9b5f-8a80a1165891" xmlns:ns4="230e9df3-be65-4c73-a93b-d1236ebd677e" targetNamespace="http://schemas.microsoft.com/office/2006/metadata/properties" ma:root="true" ma:fieldsID="7dd78129e6a1811f84807ad11c651531" ns1:_="" ns2:_="" ns3:_="" ns4:_="">
     <xsd:import namespace="http://schemas.microsoft.com/sharepoint/v3"/>
@@ -14605,15 +21672,6 @@
 </ct:contentTypeSchema>
 </file>
 
-<file path=customXml/item2.xml><?xml version="1.0" encoding="utf-8"?>
-<?mso-contentType ?>
-<FormTemplates xmlns="http://schemas.microsoft.com/sharepoint/v3/contenttype/forms">
-  <Display>DocumentLibraryForm</Display>
-  <Edit>DocumentLibraryForm</Edit>
-  <New>DocumentLibraryForm</New>
-</FormTemplates>
-</file>
-
 <file path=customXml/item3.xml><?xml version="1.0" encoding="utf-8"?>
 <p:properties xmlns:p="http://schemas.microsoft.com/office/2006/metadata/properties" xmlns:xsi="http://www.w3.org/2001/XMLSchema-instance" xmlns:pc="http://schemas.microsoft.com/office/infopath/2007/PartnerControls">
   <documentManagement>
@@ -14635,6 +21693,14 @@
 </file>
 
 <file path=customXml/itemProps1.xml><?xml version="1.0" encoding="utf-8"?>
+<ds:datastoreItem xmlns:ds="http://schemas.openxmlformats.org/officeDocument/2006/customXml" ds:itemID="{19D1F84C-D1FD-4B1B-9CFD-8E0D96AC4DF2}">
+  <ds:schemaRefs>
+    <ds:schemaRef ds:uri="http://schemas.microsoft.com/sharepoint/v3/contenttype/forms"/>
+  </ds:schemaRefs>
+</ds:datastoreItem>
+</file>
+
+<file path=customXml/itemProps2.xml><?xml version="1.0" encoding="utf-8"?>
 <ds:datastoreItem xmlns:ds="http://schemas.openxmlformats.org/officeDocument/2006/customXml" ds:itemID="{0037C456-A6DA-4DEE-A3FB-4EC3058FD086}">
   <ds:schemaRefs>
     <ds:schemaRef ds:uri="http://schemas.microsoft.com/office/2006/metadata/contentType"/>
@@ -14655,14 +21721,6 @@
 </ds:datastoreItem>
 </file>
 
-<file path=customXml/itemProps2.xml><?xml version="1.0" encoding="utf-8"?>
-<ds:datastoreItem xmlns:ds="http://schemas.openxmlformats.org/officeDocument/2006/customXml" ds:itemID="{19D1F84C-D1FD-4B1B-9CFD-8E0D96AC4DF2}">
-  <ds:schemaRefs>
-    <ds:schemaRef ds:uri="http://schemas.microsoft.com/sharepoint/v3/contenttype/forms"/>
-  </ds:schemaRefs>
-</ds:datastoreItem>
-</file>
-
 <file path=customXml/itemProps3.xml><?xml version="1.0" encoding="utf-8"?>
 <ds:datastoreItem xmlns:ds="http://schemas.openxmlformats.org/officeDocument/2006/customXml" ds:itemID="{5A00B2AC-C335-4100-B8B3-2D9F49A72906}">
   <ds:schemaRefs>
